--- a/docs/Meine_Stimme.pptx
+++ b/docs/Meine_Stimme.pptx
@@ -153,7 +153,7 @@
       </p:grpSpPr>
       <p:sp>
         <p:nvSpPr>
-          <p:cNvPr id="1380244110" name="Header Placeholder 1"/>
+          <p:cNvPr id="48577992" name="Header Placeholder 1"/>
           <p:cNvSpPr>
             <a:spLocks noGrp="1"/>
           </p:cNvSpPr>
@@ -187,7 +187,7 @@
       </p:sp>
       <p:sp>
         <p:nvSpPr>
-          <p:cNvPr id="200875244" name="Date Placeholder 2"/>
+          <p:cNvPr id="1662714990" name="Date Placeholder 2"/>
           <p:cNvSpPr>
             <a:spLocks noGrp="1"/>
           </p:cNvSpPr>
@@ -225,7 +225,7 @@
       </p:sp>
       <p:sp>
         <p:nvSpPr>
-          <p:cNvPr id="2021051630" name="Slide Image Placeholder 3"/>
+          <p:cNvPr id="1179846718" name="Slide Image Placeholder 3"/>
           <p:cNvSpPr>
             <a:spLocks noChangeAspect="1" noGrp="1" noRot="1"/>
           </p:cNvSpPr>
@@ -261,7 +261,7 @@
       </p:sp>
       <p:sp>
         <p:nvSpPr>
-          <p:cNvPr id="166118895" name="Notes Placeholder 4"/>
+          <p:cNvPr id="1014474721" name="Notes Placeholder 4"/>
           <p:cNvSpPr>
             <a:spLocks noGrp="1"/>
           </p:cNvSpPr>
@@ -335,7 +335,7 @@
       </p:sp>
       <p:sp>
         <p:nvSpPr>
-          <p:cNvPr id="135022717" name="Footer Placeholder 5"/>
+          <p:cNvPr id="1554419734" name="Footer Placeholder 5"/>
           <p:cNvSpPr>
             <a:spLocks noGrp="1"/>
           </p:cNvSpPr>
@@ -369,7 +369,7 @@
       </p:sp>
       <p:sp>
         <p:nvSpPr>
-          <p:cNvPr id="268823314" name="Slide Number Placeholder 6"/>
+          <p:cNvPr id="1137352784" name="Slide Number Placeholder 6"/>
           <p:cNvSpPr>
             <a:spLocks noGrp="1"/>
           </p:cNvSpPr>
@@ -522,7 +522,7 @@
       </p:grpSpPr>
       <p:sp>
         <p:nvSpPr>
-          <p:cNvPr id="358240426" name="Slide Image Placeholder 1"/>
+          <p:cNvPr id="1925525928" name="Slide Image Placeholder 1"/>
           <p:cNvSpPr>
             <a:spLocks noChangeAspect="1" noGrp="1" noRot="1"/>
           </p:cNvSpPr>
@@ -534,7 +534,7 @@
       </p:sp>
       <p:sp>
         <p:nvSpPr>
-          <p:cNvPr id="1558412479" name="Notes Placeholder 2"/>
+          <p:cNvPr id="676699539" name="Notes Placeholder 2"/>
           <p:cNvSpPr>
             <a:spLocks noGrp="1"/>
           </p:cNvSpPr>
@@ -560,7 +560,7 @@
       </p:sp>
       <p:sp>
         <p:nvSpPr>
-          <p:cNvPr id="1844334604" name="Slide Number Placeholder 3"/>
+          <p:cNvPr id="139387820" name="Slide Number Placeholder 3"/>
           <p:cNvSpPr>
             <a:spLocks noGrp="1"/>
           </p:cNvSpPr>
@@ -611,7 +611,7 @@
       </p:grpSpPr>
       <p:sp>
         <p:nvSpPr>
-          <p:cNvPr id="1267069753" name="Slide Image Placeholder 1"/>
+          <p:cNvPr id="796208475" name="Slide Image Placeholder 1"/>
           <p:cNvSpPr>
             <a:spLocks noChangeAspect="1" noGrp="1" noRot="1"/>
           </p:cNvSpPr>
@@ -623,7 +623,7 @@
       </p:sp>
       <p:sp>
         <p:nvSpPr>
-          <p:cNvPr id="997578064" name="Notes Placeholder 2"/>
+          <p:cNvPr id="388250748" name="Notes Placeholder 2"/>
           <p:cNvSpPr>
             <a:spLocks noGrp="1"/>
           </p:cNvSpPr>
@@ -649,7 +649,7 @@
       </p:sp>
       <p:sp>
         <p:nvSpPr>
-          <p:cNvPr id="431438943" name="Slide Number Placeholder 3"/>
+          <p:cNvPr id="567514025" name="Slide Number Placeholder 3"/>
           <p:cNvSpPr>
             <a:spLocks noGrp="1"/>
           </p:cNvSpPr>
@@ -700,7 +700,7 @@
       </p:grpSpPr>
       <p:sp>
         <p:nvSpPr>
-          <p:cNvPr id="1456295919" name="Slide Image Placeholder 1"/>
+          <p:cNvPr id="1953096174" name="Slide Image Placeholder 1"/>
           <p:cNvSpPr>
             <a:spLocks noChangeAspect="1" noGrp="1" noRot="1"/>
           </p:cNvSpPr>
@@ -712,7 +712,7 @@
       </p:sp>
       <p:sp>
         <p:nvSpPr>
-          <p:cNvPr id="370725201" name="Notes Placeholder 2"/>
+          <p:cNvPr id="294865726" name="Notes Placeholder 2"/>
           <p:cNvSpPr>
             <a:spLocks noGrp="1"/>
           </p:cNvSpPr>
@@ -738,7 +738,7 @@
       </p:sp>
       <p:sp>
         <p:nvSpPr>
-          <p:cNvPr id="88459175" name="Slide Number Placeholder 3"/>
+          <p:cNvPr id="1517579592" name="Slide Number Placeholder 3"/>
           <p:cNvSpPr>
             <a:spLocks noGrp="1"/>
           </p:cNvSpPr>
@@ -789,7 +789,7 @@
       </p:grpSpPr>
       <p:sp>
         <p:nvSpPr>
-          <p:cNvPr id="47429081" name="Slide Image Placeholder 1"/>
+          <p:cNvPr id="811539971" name="Slide Image Placeholder 1"/>
           <p:cNvSpPr>
             <a:spLocks noChangeAspect="1" noGrp="1" noRot="1"/>
           </p:cNvSpPr>
@@ -801,7 +801,7 @@
       </p:sp>
       <p:sp>
         <p:nvSpPr>
-          <p:cNvPr id="1833967209" name="Notes Placeholder 2"/>
+          <p:cNvPr id="1663359361" name="Notes Placeholder 2"/>
           <p:cNvSpPr>
             <a:spLocks noGrp="1"/>
           </p:cNvSpPr>
@@ -827,7 +827,7 @@
       </p:sp>
       <p:sp>
         <p:nvSpPr>
-          <p:cNvPr id="72318794" name="Slide Number Placeholder 3"/>
+          <p:cNvPr id="404221696" name="Slide Number Placeholder 3"/>
           <p:cNvSpPr>
             <a:spLocks noGrp="1"/>
           </p:cNvSpPr>
@@ -878,7 +878,7 @@
       </p:grpSpPr>
       <p:sp>
         <p:nvSpPr>
-          <p:cNvPr id="935060466" name="Slide Image Placeholder 1"/>
+          <p:cNvPr id="15536804" name="Slide Image Placeholder 1"/>
           <p:cNvSpPr>
             <a:spLocks noChangeAspect="1" noGrp="1" noRot="1"/>
           </p:cNvSpPr>
@@ -890,7 +890,7 @@
       </p:sp>
       <p:sp>
         <p:nvSpPr>
-          <p:cNvPr id="1095724592" name="Notes Placeholder 2"/>
+          <p:cNvPr id="1523095028" name="Notes Placeholder 2"/>
           <p:cNvSpPr>
             <a:spLocks noGrp="1"/>
           </p:cNvSpPr>
@@ -916,7 +916,7 @@
       </p:sp>
       <p:sp>
         <p:nvSpPr>
-          <p:cNvPr id="643728983" name="Slide Number Placeholder 3"/>
+          <p:cNvPr id="179363153" name="Slide Number Placeholder 3"/>
           <p:cNvSpPr>
             <a:spLocks noGrp="1"/>
           </p:cNvSpPr>
@@ -967,7 +967,7 @@
       </p:grpSpPr>
       <p:sp>
         <p:nvSpPr>
-          <p:cNvPr id="1858963756" name="Slide Image Placeholder 1"/>
+          <p:cNvPr id="1853858392" name="Slide Image Placeholder 1"/>
           <p:cNvSpPr>
             <a:spLocks noChangeAspect="1" noGrp="1" noRot="1"/>
           </p:cNvSpPr>
@@ -979,7 +979,7 @@
       </p:sp>
       <p:sp>
         <p:nvSpPr>
-          <p:cNvPr id="1468576407" name="Notes Placeholder 2"/>
+          <p:cNvPr id="277508083" name="Notes Placeholder 2"/>
           <p:cNvSpPr>
             <a:spLocks noGrp="1"/>
           </p:cNvSpPr>
@@ -1005,7 +1005,7 @@
       </p:sp>
       <p:sp>
         <p:nvSpPr>
-          <p:cNvPr id="1260574979" name="Slide Number Placeholder 3"/>
+          <p:cNvPr id="260844822" name="Slide Number Placeholder 3"/>
           <p:cNvSpPr>
             <a:spLocks noGrp="1"/>
           </p:cNvSpPr>
@@ -1056,7 +1056,7 @@
       </p:grpSpPr>
       <p:sp>
         <p:nvSpPr>
-          <p:cNvPr id="1621989456" name="Slide Image Placeholder 1"/>
+          <p:cNvPr id="622834530" name="Slide Image Placeholder 1"/>
           <p:cNvSpPr>
             <a:spLocks noChangeAspect="1" noGrp="1" noRot="1"/>
           </p:cNvSpPr>
@@ -1068,7 +1068,7 @@
       </p:sp>
       <p:sp>
         <p:nvSpPr>
-          <p:cNvPr id="1606204988" name="Notes Placeholder 2"/>
+          <p:cNvPr id="1334750129" name="Notes Placeholder 2"/>
           <p:cNvSpPr>
             <a:spLocks noGrp="1"/>
           </p:cNvSpPr>
@@ -1094,7 +1094,7 @@
       </p:sp>
       <p:sp>
         <p:nvSpPr>
-          <p:cNvPr id="1828612759" name="Slide Number Placeholder 3"/>
+          <p:cNvPr id="785856917" name="Slide Number Placeholder 3"/>
           <p:cNvSpPr>
             <a:spLocks noGrp="1"/>
           </p:cNvSpPr>
@@ -1145,7 +1145,7 @@
       </p:grpSpPr>
       <p:sp>
         <p:nvSpPr>
-          <p:cNvPr id="1626787987" name="Slide Image Placeholder 1"/>
+          <p:cNvPr id="1804018143" name="Slide Image Placeholder 1"/>
           <p:cNvSpPr>
             <a:spLocks noChangeAspect="1" noGrp="1" noRot="1"/>
           </p:cNvSpPr>
@@ -1157,7 +1157,7 @@
       </p:sp>
       <p:sp>
         <p:nvSpPr>
-          <p:cNvPr id="18288785" name="Notes Placeholder 2"/>
+          <p:cNvPr id="882731433" name="Notes Placeholder 2"/>
           <p:cNvSpPr>
             <a:spLocks noGrp="1"/>
           </p:cNvSpPr>
@@ -1183,7 +1183,7 @@
       </p:sp>
       <p:sp>
         <p:nvSpPr>
-          <p:cNvPr id="1434263469" name="Slide Number Placeholder 3"/>
+          <p:cNvPr id="287723566" name="Slide Number Placeholder 3"/>
           <p:cNvSpPr>
             <a:spLocks noGrp="1"/>
           </p:cNvSpPr>
@@ -1234,7 +1234,7 @@
       </p:grpSpPr>
       <p:sp>
         <p:nvSpPr>
-          <p:cNvPr id="2008931060" name="Slide Image Placeholder 1"/>
+          <p:cNvPr id="148984505" name="Slide Image Placeholder 1"/>
           <p:cNvSpPr>
             <a:spLocks noChangeAspect="1" noGrp="1" noRot="1"/>
           </p:cNvSpPr>
@@ -1246,7 +1246,7 @@
       </p:sp>
       <p:sp>
         <p:nvSpPr>
-          <p:cNvPr id="1389783858" name="Notes Placeholder 2"/>
+          <p:cNvPr id="650594641" name="Notes Placeholder 2"/>
           <p:cNvSpPr>
             <a:spLocks noGrp="1"/>
           </p:cNvSpPr>
@@ -1272,7 +1272,7 @@
       </p:sp>
       <p:sp>
         <p:nvSpPr>
-          <p:cNvPr id="656371446" name="Slide Number Placeholder 3"/>
+          <p:cNvPr id="1682768211" name="Slide Number Placeholder 3"/>
           <p:cNvSpPr>
             <a:spLocks noGrp="1"/>
           </p:cNvSpPr>
@@ -1323,7 +1323,7 @@
       </p:grpSpPr>
       <p:sp>
         <p:nvSpPr>
-          <p:cNvPr id="426020612" name="Slide Image Placeholder 1"/>
+          <p:cNvPr id="1633992991" name="Slide Image Placeholder 1"/>
           <p:cNvSpPr>
             <a:spLocks noChangeAspect="1" noGrp="1" noRot="1"/>
           </p:cNvSpPr>
@@ -1335,7 +1335,7 @@
       </p:sp>
       <p:sp>
         <p:nvSpPr>
-          <p:cNvPr id="1979304667" name="Notes Placeholder 2"/>
+          <p:cNvPr id="1289649604" name="Notes Placeholder 2"/>
           <p:cNvSpPr>
             <a:spLocks noGrp="1"/>
           </p:cNvSpPr>
@@ -1361,7 +1361,7 @@
       </p:sp>
       <p:sp>
         <p:nvSpPr>
-          <p:cNvPr id="646086318" name="Slide Number Placeholder 3"/>
+          <p:cNvPr id="1498150283" name="Slide Number Placeholder 3"/>
           <p:cNvSpPr>
             <a:spLocks noGrp="1"/>
           </p:cNvSpPr>
@@ -1412,7 +1412,7 @@
       </p:grpSpPr>
       <p:sp>
         <p:nvSpPr>
-          <p:cNvPr id="821640492" name="Slide Image Placeholder 1"/>
+          <p:cNvPr id="1827471339" name="Slide Image Placeholder 1"/>
           <p:cNvSpPr>
             <a:spLocks noChangeAspect="1" noGrp="1" noRot="1"/>
           </p:cNvSpPr>
@@ -1424,7 +1424,7 @@
       </p:sp>
       <p:sp>
         <p:nvSpPr>
-          <p:cNvPr id="1059278689" name="Notes Placeholder 2"/>
+          <p:cNvPr id="107900344" name="Notes Placeholder 2"/>
           <p:cNvSpPr>
             <a:spLocks noGrp="1"/>
           </p:cNvSpPr>
@@ -1450,7 +1450,7 @@
       </p:sp>
       <p:sp>
         <p:nvSpPr>
-          <p:cNvPr id="873663072" name="Slide Number Placeholder 3"/>
+          <p:cNvPr id="1711566659" name="Slide Number Placeholder 3"/>
           <p:cNvSpPr>
             <a:spLocks noGrp="1"/>
           </p:cNvSpPr>
@@ -1501,7 +1501,7 @@
       </p:grpSpPr>
       <p:sp>
         <p:nvSpPr>
-          <p:cNvPr id="487848857" name="Slide Image Placeholder 1"/>
+          <p:cNvPr id="614135982" name="Slide Image Placeholder 1"/>
           <p:cNvSpPr>
             <a:spLocks noChangeAspect="1" noGrp="1" noRot="1"/>
           </p:cNvSpPr>
@@ -1513,7 +1513,7 @@
       </p:sp>
       <p:sp>
         <p:nvSpPr>
-          <p:cNvPr id="1307402640" name="Notes Placeholder 2"/>
+          <p:cNvPr id="499656445" name="Notes Placeholder 2"/>
           <p:cNvSpPr>
             <a:spLocks noGrp="1"/>
           </p:cNvSpPr>
@@ -1539,7 +1539,7 @@
       </p:sp>
       <p:sp>
         <p:nvSpPr>
-          <p:cNvPr id="205708699" name="Slide Number Placeholder 3"/>
+          <p:cNvPr id="460891460" name="Slide Number Placeholder 3"/>
           <p:cNvSpPr>
             <a:spLocks noGrp="1"/>
           </p:cNvSpPr>
@@ -1590,7 +1590,7 @@
       </p:grpSpPr>
       <p:sp>
         <p:nvSpPr>
-          <p:cNvPr id="539597701" name="Slide Image Placeholder 1"/>
+          <p:cNvPr id="183778346" name="Slide Image Placeholder 1"/>
           <p:cNvSpPr>
             <a:spLocks noChangeAspect="1" noGrp="1" noRot="1"/>
           </p:cNvSpPr>
@@ -1602,7 +1602,7 @@
       </p:sp>
       <p:sp>
         <p:nvSpPr>
-          <p:cNvPr id="850088822" name="Notes Placeholder 2"/>
+          <p:cNvPr id="1226107102" name="Notes Placeholder 2"/>
           <p:cNvSpPr>
             <a:spLocks noGrp="1"/>
           </p:cNvSpPr>
@@ -1628,7 +1628,7 @@
       </p:sp>
       <p:sp>
         <p:nvSpPr>
-          <p:cNvPr id="719266801" name="Slide Number Placeholder 3"/>
+          <p:cNvPr id="986672403" name="Slide Number Placeholder 3"/>
           <p:cNvSpPr>
             <a:spLocks noGrp="1"/>
           </p:cNvSpPr>
@@ -1679,7 +1679,7 @@
       </p:grpSpPr>
       <p:sp>
         <p:nvSpPr>
-          <p:cNvPr id="447529950" name="Slide Image Placeholder 1"/>
+          <p:cNvPr id="1748751804" name="Slide Image Placeholder 1"/>
           <p:cNvSpPr>
             <a:spLocks noChangeAspect="1" noGrp="1" noRot="1"/>
           </p:cNvSpPr>
@@ -1691,7 +1691,7 @@
       </p:sp>
       <p:sp>
         <p:nvSpPr>
-          <p:cNvPr id="2102585391" name="Notes Placeholder 2"/>
+          <p:cNvPr id="1013492460" name="Notes Placeholder 2"/>
           <p:cNvSpPr>
             <a:spLocks noGrp="1"/>
           </p:cNvSpPr>
@@ -1717,7 +1717,7 @@
       </p:sp>
       <p:sp>
         <p:nvSpPr>
-          <p:cNvPr id="1409672859" name="Slide Number Placeholder 3"/>
+          <p:cNvPr id="1700702173" name="Slide Number Placeholder 3"/>
           <p:cNvSpPr>
             <a:spLocks noGrp="1"/>
           </p:cNvSpPr>
@@ -1768,7 +1768,7 @@
       </p:grpSpPr>
       <p:sp>
         <p:nvSpPr>
-          <p:cNvPr id="897270623" name="Slide Image Placeholder 1"/>
+          <p:cNvPr id="1027041143" name="Slide Image Placeholder 1"/>
           <p:cNvSpPr>
             <a:spLocks noChangeAspect="1" noGrp="1" noRot="1"/>
           </p:cNvSpPr>
@@ -1780,7 +1780,7 @@
       </p:sp>
       <p:sp>
         <p:nvSpPr>
-          <p:cNvPr id="162792278" name="Notes Placeholder 2"/>
+          <p:cNvPr id="589151050" name="Notes Placeholder 2"/>
           <p:cNvSpPr>
             <a:spLocks noGrp="1"/>
           </p:cNvSpPr>
@@ -1806,7 +1806,7 @@
       </p:sp>
       <p:sp>
         <p:nvSpPr>
-          <p:cNvPr id="1729462118" name="Slide Number Placeholder 3"/>
+          <p:cNvPr id="1135812080" name="Slide Number Placeholder 3"/>
           <p:cNvSpPr>
             <a:spLocks noGrp="1"/>
           </p:cNvSpPr>
@@ -1857,7 +1857,7 @@
       </p:grpSpPr>
       <p:sp>
         <p:nvSpPr>
-          <p:cNvPr id="1058472081" name="Slide Image Placeholder 1"/>
+          <p:cNvPr id="2033271554" name="Slide Image Placeholder 1"/>
           <p:cNvSpPr>
             <a:spLocks noChangeAspect="1" noGrp="1" noRot="1"/>
           </p:cNvSpPr>
@@ -1869,7 +1869,7 @@
       </p:sp>
       <p:sp>
         <p:nvSpPr>
-          <p:cNvPr id="310157454" name="Notes Placeholder 2"/>
+          <p:cNvPr id="1469847375" name="Notes Placeholder 2"/>
           <p:cNvSpPr>
             <a:spLocks noGrp="1"/>
           </p:cNvSpPr>
@@ -1895,7 +1895,7 @@
       </p:sp>
       <p:sp>
         <p:nvSpPr>
-          <p:cNvPr id="212339480" name="Slide Number Placeholder 3"/>
+          <p:cNvPr id="499894223" name="Slide Number Placeholder 3"/>
           <p:cNvSpPr>
             <a:spLocks noGrp="1"/>
           </p:cNvSpPr>
@@ -1946,7 +1946,7 @@
       </p:grpSpPr>
       <p:sp>
         <p:nvSpPr>
-          <p:cNvPr id="850366609" name="Slide Image Placeholder 1"/>
+          <p:cNvPr id="372537113" name="Slide Image Placeholder 1"/>
           <p:cNvSpPr>
             <a:spLocks noChangeAspect="1" noGrp="1" noRot="1"/>
           </p:cNvSpPr>
@@ -1958,7 +1958,7 @@
       </p:sp>
       <p:sp>
         <p:nvSpPr>
-          <p:cNvPr id="1164737102" name="Notes Placeholder 2"/>
+          <p:cNvPr id="1618933577" name="Notes Placeholder 2"/>
           <p:cNvSpPr>
             <a:spLocks noGrp="1"/>
           </p:cNvSpPr>
@@ -1984,7 +1984,7 @@
       </p:sp>
       <p:sp>
         <p:nvSpPr>
-          <p:cNvPr id="1452736685" name="Slide Number Placeholder 3"/>
+          <p:cNvPr id="1453692821" name="Slide Number Placeholder 3"/>
           <p:cNvSpPr>
             <a:spLocks noGrp="1"/>
           </p:cNvSpPr>
@@ -2035,7 +2035,7 @@
       </p:grpSpPr>
       <p:sp>
         <p:nvSpPr>
-          <p:cNvPr id="169903359" name="Slide Image Placeholder 1"/>
+          <p:cNvPr id="1232188657" name="Slide Image Placeholder 1"/>
           <p:cNvSpPr>
             <a:spLocks noChangeAspect="1" noGrp="1" noRot="1"/>
           </p:cNvSpPr>
@@ -2047,7 +2047,7 @@
       </p:sp>
       <p:sp>
         <p:nvSpPr>
-          <p:cNvPr id="1409704401" name="Notes Placeholder 2"/>
+          <p:cNvPr id="665418894" name="Notes Placeholder 2"/>
           <p:cNvSpPr>
             <a:spLocks noGrp="1"/>
           </p:cNvSpPr>
@@ -2073,7 +2073,7 @@
       </p:sp>
       <p:sp>
         <p:nvSpPr>
-          <p:cNvPr id="483670841" name="Slide Number Placeholder 3"/>
+          <p:cNvPr id="1039404203" name="Slide Number Placeholder 3"/>
           <p:cNvSpPr>
             <a:spLocks noGrp="1"/>
           </p:cNvSpPr>
@@ -2124,7 +2124,7 @@
       </p:grpSpPr>
       <p:sp>
         <p:nvSpPr>
-          <p:cNvPr id="649990445" name="Slide Image Placeholder 1"/>
+          <p:cNvPr id="1141968399" name="Slide Image Placeholder 1"/>
           <p:cNvSpPr>
             <a:spLocks noChangeAspect="1" noGrp="1" noRot="1"/>
           </p:cNvSpPr>
@@ -2136,7 +2136,7 @@
       </p:sp>
       <p:sp>
         <p:nvSpPr>
-          <p:cNvPr id="1048431270" name="Notes Placeholder 2"/>
+          <p:cNvPr id="831031200" name="Notes Placeholder 2"/>
           <p:cNvSpPr>
             <a:spLocks noGrp="1"/>
           </p:cNvSpPr>
@@ -2162,7 +2162,7 @@
       </p:sp>
       <p:sp>
         <p:nvSpPr>
-          <p:cNvPr id="1478636791" name="Slide Number Placeholder 3"/>
+          <p:cNvPr id="1598907053" name="Slide Number Placeholder 3"/>
           <p:cNvSpPr>
             <a:spLocks noGrp="1"/>
           </p:cNvSpPr>
@@ -2213,7 +2213,7 @@
       </p:grpSpPr>
       <p:sp>
         <p:nvSpPr>
-          <p:cNvPr id="445815752" name="Slide Image Placeholder 1"/>
+          <p:cNvPr id="282161467" name="Slide Image Placeholder 1"/>
           <p:cNvSpPr>
             <a:spLocks noChangeAspect="1" noGrp="1" noRot="1"/>
           </p:cNvSpPr>
@@ -2225,7 +2225,7 @@
       </p:sp>
       <p:sp>
         <p:nvSpPr>
-          <p:cNvPr id="1865123917" name="Notes Placeholder 2"/>
+          <p:cNvPr id="671795293" name="Notes Placeholder 2"/>
           <p:cNvSpPr>
             <a:spLocks noGrp="1"/>
           </p:cNvSpPr>
@@ -2251,7 +2251,7 @@
       </p:sp>
       <p:sp>
         <p:nvSpPr>
-          <p:cNvPr id="1994528133" name="Slide Number Placeholder 3"/>
+          <p:cNvPr id="1978628831" name="Slide Number Placeholder 3"/>
           <p:cNvSpPr>
             <a:spLocks noGrp="1"/>
           </p:cNvSpPr>
@@ -2302,7 +2302,7 @@
       </p:grpSpPr>
       <p:sp>
         <p:nvSpPr>
-          <p:cNvPr id="300895466" name="Slide Image Placeholder 1"/>
+          <p:cNvPr id="84588076" name="Slide Image Placeholder 1"/>
           <p:cNvSpPr>
             <a:spLocks noChangeAspect="1" noGrp="1" noRot="1"/>
           </p:cNvSpPr>
@@ -2314,7 +2314,7 @@
       </p:sp>
       <p:sp>
         <p:nvSpPr>
-          <p:cNvPr id="552865899" name="Notes Placeholder 2"/>
+          <p:cNvPr id="1168536049" name="Notes Placeholder 2"/>
           <p:cNvSpPr>
             <a:spLocks noGrp="1"/>
           </p:cNvSpPr>
@@ -2340,7 +2340,7 @@
       </p:sp>
       <p:sp>
         <p:nvSpPr>
-          <p:cNvPr id="1090676310" name="Slide Number Placeholder 3"/>
+          <p:cNvPr id="2146905974" name="Slide Number Placeholder 3"/>
           <p:cNvSpPr>
             <a:spLocks noGrp="1"/>
           </p:cNvSpPr>
@@ -2391,7 +2391,7 @@
       </p:grpSpPr>
       <p:sp>
         <p:nvSpPr>
-          <p:cNvPr id="1694875626" name="Slide Image Placeholder 1"/>
+          <p:cNvPr id="1129481706" name="Slide Image Placeholder 1"/>
           <p:cNvSpPr>
             <a:spLocks noChangeAspect="1" noGrp="1" noRot="1"/>
           </p:cNvSpPr>
@@ -2403,7 +2403,7 @@
       </p:sp>
       <p:sp>
         <p:nvSpPr>
-          <p:cNvPr id="1788092540" name="Notes Placeholder 2"/>
+          <p:cNvPr id="2139438923" name="Notes Placeholder 2"/>
           <p:cNvSpPr>
             <a:spLocks noGrp="1"/>
           </p:cNvSpPr>
@@ -2429,7 +2429,7 @@
       </p:sp>
       <p:sp>
         <p:nvSpPr>
-          <p:cNvPr id="196092936" name="Slide Number Placeholder 3"/>
+          <p:cNvPr id="541039931" name="Slide Number Placeholder 3"/>
           <p:cNvSpPr>
             <a:spLocks noGrp="1"/>
           </p:cNvSpPr>
@@ -2480,7 +2480,7 @@
       </p:grpSpPr>
       <p:sp>
         <p:nvSpPr>
-          <p:cNvPr id="1931317347" name="Slide Image Placeholder 1"/>
+          <p:cNvPr id="1528528944" name="Slide Image Placeholder 1"/>
           <p:cNvSpPr>
             <a:spLocks noChangeAspect="1" noGrp="1" noRot="1"/>
           </p:cNvSpPr>
@@ -2492,7 +2492,7 @@
       </p:sp>
       <p:sp>
         <p:nvSpPr>
-          <p:cNvPr id="1910918410" name="Notes Placeholder 2"/>
+          <p:cNvPr id="1943589476" name="Notes Placeholder 2"/>
           <p:cNvSpPr>
             <a:spLocks noGrp="1"/>
           </p:cNvSpPr>
@@ -2518,7 +2518,7 @@
       </p:sp>
       <p:sp>
         <p:nvSpPr>
-          <p:cNvPr id="1398534243" name="Slide Number Placeholder 3"/>
+          <p:cNvPr id="1033998233" name="Slide Number Placeholder 3"/>
           <p:cNvSpPr>
             <a:spLocks noGrp="1"/>
           </p:cNvSpPr>
@@ -2883,7 +2883,7 @@
       </p:grpSpPr>
       <p:sp>
         <p:nvSpPr>
-          <p:cNvPr id="1758870664" name="Shape 0"/>
+          <p:cNvPr id="55893931" name="Shape 0"/>
           <p:cNvSpPr/>
           <p:nvPr/>
         </p:nvSpPr>
@@ -2905,7 +2905,7 @@
       </p:sp>
       <p:sp>
         <p:nvSpPr>
-          <p:cNvPr id="1572724926" name="Shape 1"/>
+          <p:cNvPr id="1526981926" name="Shape 1"/>
           <p:cNvSpPr/>
           <p:nvPr/>
         </p:nvSpPr>
@@ -2927,7 +2927,7 @@
       </p:sp>
       <p:sp>
         <p:nvSpPr>
-          <p:cNvPr id="431958110" name="Shape 2"/>
+          <p:cNvPr id="655420625" name="Shape 2"/>
           <p:cNvSpPr/>
           <p:nvPr/>
         </p:nvSpPr>
@@ -2949,7 +2949,7 @@
       </p:sp>
       <p:sp>
         <p:nvSpPr>
-          <p:cNvPr id="915713402" name="Shape 3"/>
+          <p:cNvPr id="1183997843" name="Shape 3"/>
           <p:cNvSpPr/>
           <p:nvPr/>
         </p:nvSpPr>
@@ -2971,7 +2971,7 @@
       </p:sp>
       <p:sp>
         <p:nvSpPr>
-          <p:cNvPr id="2067827335" name="Shape 4"/>
+          <p:cNvPr id="69221809" name="Shape 4"/>
           <p:cNvSpPr/>
           <p:nvPr/>
         </p:nvSpPr>
@@ -2993,7 +2993,7 @@
       </p:sp>
       <p:sp>
         <p:nvSpPr>
-          <p:cNvPr id="1289034030" name="Shape 5"/>
+          <p:cNvPr id="810825819" name="Shape 5"/>
           <p:cNvSpPr/>
           <p:nvPr/>
         </p:nvSpPr>
@@ -3015,7 +3015,7 @@
       </p:sp>
       <p:sp>
         <p:nvSpPr>
-          <p:cNvPr id="1987835442" name="Shape 6"/>
+          <p:cNvPr id="1715318518" name="Shape 6"/>
           <p:cNvSpPr/>
           <p:nvPr/>
         </p:nvSpPr>
@@ -3037,7 +3037,7 @@
       </p:sp>
       <p:sp>
         <p:nvSpPr>
-          <p:cNvPr id="190289521" name="Shape 7"/>
+          <p:cNvPr id="1160088257" name="Shape 7"/>
           <p:cNvSpPr/>
           <p:nvPr/>
         </p:nvSpPr>
@@ -3059,7 +3059,7 @@
       </p:sp>
       <p:sp>
         <p:nvSpPr>
-          <p:cNvPr id="331983249" name="Shape 8"/>
+          <p:cNvPr id="556499742" name="Shape 8"/>
           <p:cNvSpPr/>
           <p:nvPr/>
         </p:nvSpPr>
@@ -3081,7 +3081,7 @@
       </p:sp>
       <p:sp>
         <p:nvSpPr>
-          <p:cNvPr id="107701848" name="Shape 9"/>
+          <p:cNvPr id="2123542255" name="Shape 9"/>
           <p:cNvSpPr/>
           <p:nvPr/>
         </p:nvSpPr>
@@ -3103,7 +3103,7 @@
       </p:sp>
       <p:sp>
         <p:nvSpPr>
-          <p:cNvPr id="338460679" name="Shape 10"/>
+          <p:cNvPr id="423048451" name="Shape 10"/>
           <p:cNvSpPr/>
           <p:nvPr/>
         </p:nvSpPr>
@@ -3125,7 +3125,7 @@
       </p:sp>
       <p:sp>
         <p:nvSpPr>
-          <p:cNvPr id="778068478" name="Shape 11"/>
+          <p:cNvPr id="392125306" name="Shape 11"/>
           <p:cNvSpPr/>
           <p:nvPr/>
         </p:nvSpPr>
@@ -3147,7 +3147,7 @@
       </p:sp>
       <p:sp>
         <p:nvSpPr>
-          <p:cNvPr id="621034259" name="Shape 12"/>
+          <p:cNvPr id="707166167" name="Shape 12"/>
           <p:cNvSpPr/>
           <p:nvPr/>
         </p:nvSpPr>
@@ -3169,7 +3169,7 @@
       </p:sp>
       <p:sp>
         <p:nvSpPr>
-          <p:cNvPr id="90401805" name="Shape 13"/>
+          <p:cNvPr id="866927926" name="Shape 13"/>
           <p:cNvSpPr/>
           <p:nvPr/>
         </p:nvSpPr>
@@ -3191,7 +3191,7 @@
       </p:sp>
       <p:sp>
         <p:nvSpPr>
-          <p:cNvPr id="1302196215" name="Shape 14"/>
+          <p:cNvPr id="1714537113" name="Shape 14"/>
           <p:cNvSpPr/>
           <p:nvPr/>
         </p:nvSpPr>
@@ -3213,7 +3213,7 @@
       </p:sp>
       <p:sp>
         <p:nvSpPr>
-          <p:cNvPr id="1805225294" name="Shape 15"/>
+          <p:cNvPr id="1790881904" name="Shape 15"/>
           <p:cNvSpPr/>
           <p:nvPr/>
         </p:nvSpPr>
@@ -3235,7 +3235,7 @@
       </p:sp>
       <p:sp>
         <p:nvSpPr>
-          <p:cNvPr id="635918915" name="Shape 16"/>
+          <p:cNvPr id="156510313" name="Shape 16"/>
           <p:cNvSpPr/>
           <p:nvPr/>
         </p:nvSpPr>
@@ -3257,7 +3257,7 @@
       </p:sp>
       <p:sp>
         <p:nvSpPr>
-          <p:cNvPr id="320672644" name="Shape 17"/>
+          <p:cNvPr id="1761890437" name="Shape 17"/>
           <p:cNvSpPr/>
           <p:nvPr/>
         </p:nvSpPr>
@@ -3279,7 +3279,7 @@
       </p:sp>
       <p:sp>
         <p:nvSpPr>
-          <p:cNvPr id="202425852" name="Shape 18"/>
+          <p:cNvPr id="972621950" name="Shape 18"/>
           <p:cNvSpPr/>
           <p:nvPr/>
         </p:nvSpPr>
@@ -3301,7 +3301,7 @@
       </p:sp>
       <p:sp>
         <p:nvSpPr>
-          <p:cNvPr id="6000297" name="Shape 19"/>
+          <p:cNvPr id="989861249" name="Shape 19"/>
           <p:cNvSpPr/>
           <p:nvPr/>
         </p:nvSpPr>
@@ -3323,7 +3323,7 @@
       </p:sp>
       <p:sp>
         <p:nvSpPr>
-          <p:cNvPr id="684965626" name="Text 20"/>
+          <p:cNvPr id="527952341" name="Text 20"/>
           <p:cNvSpPr/>
           <p:nvPr/>
         </p:nvSpPr>
@@ -3363,7 +3363,7 @@
       </p:sp>
       <p:sp>
         <p:nvSpPr>
-          <p:cNvPr id="1583259807" name="Text 21"/>
+          <p:cNvPr id="1608615079" name="Text 21"/>
           <p:cNvSpPr/>
           <p:nvPr/>
         </p:nvSpPr>
@@ -3403,7 +3403,7 @@
       </p:sp>
       <p:sp>
         <p:nvSpPr>
-          <p:cNvPr id="826750550" name="Text 22"/>
+          <p:cNvPr id="587114621" name="Text 22"/>
           <p:cNvSpPr/>
           <p:nvPr/>
         </p:nvSpPr>
@@ -3467,7 +3467,7 @@
       </p:sp>
       <p:sp>
         <p:nvSpPr>
-          <p:cNvPr id="1858164623" name="Shape 23"/>
+          <p:cNvPr id="429824092" name="Shape 23"/>
           <p:cNvSpPr/>
           <p:nvPr/>
         </p:nvSpPr>
@@ -3494,7 +3494,7 @@
       </p:sp>
       <p:pic>
         <p:nvPicPr>
-          <p:cNvPr id="1846624082" name="Image 0" descr="preencoded.png"/>
+          <p:cNvPr id="1735999518" name="Image 0" descr="preencoded.png"/>
           <p:cNvPicPr>
             <a:picLocks noChangeAspect="1"/>
           </p:cNvPicPr>
@@ -3516,7 +3516,7 @@
       </p:pic>
       <p:sp>
         <p:nvSpPr>
-          <p:cNvPr id="1714911620" name="Text 24"/>
+          <p:cNvPr id="1882239743" name="Text 24"/>
           <p:cNvSpPr/>
           <p:nvPr/>
         </p:nvSpPr>
@@ -3561,13 +3561,24 @@
               </a:rPr>
               <a:t>meine-stimme.jutio.org</a:t>
             </a:r>
+            <a:r>
+              <a:rPr lang="de-DE" sz="1250">
+                <a:solidFill>
+                  <a:srgbClr val="FFFFFF"/>
+                </a:solidFill>
+                <a:latin typeface="Calibri"/>
+                <a:ea typeface="Calibri"/>
+                <a:cs typeface="Calibri"/>
+              </a:rPr>
+              <a:t>/{Einrichtungsname}</a:t>
+            </a:r>
             <a:endParaRPr lang="en-US" sz="1250"/>
           </a:p>
         </p:txBody>
       </p:sp>
       <p:sp>
         <p:nvSpPr>
-          <p:cNvPr id="1195691244" name="Shape 25"/>
+          <p:cNvPr id="1849092295" name="Shape 25"/>
           <p:cNvSpPr/>
           <p:nvPr/>
         </p:nvSpPr>
@@ -3594,7 +3605,7 @@
       </p:sp>
       <p:pic>
         <p:nvPicPr>
-          <p:cNvPr id="1653349766" name="Image 1" descr="preencoded.png"/>
+          <p:cNvPr id="2056492718" name="Image 1" descr="preencoded.png"/>
           <p:cNvPicPr>
             <a:picLocks noChangeAspect="1"/>
           </p:cNvPicPr>
@@ -3616,7 +3627,7 @@
       </p:pic>
       <p:sp>
         <p:nvSpPr>
-          <p:cNvPr id="1011423326" name="Text 26"/>
+          <p:cNvPr id="1744164166" name="Text 26"/>
           <p:cNvSpPr/>
           <p:nvPr/>
         </p:nvSpPr>
@@ -3667,7 +3678,7 @@
       </p:sp>
       <p:sp>
         <p:nvSpPr>
-          <p:cNvPr id="1756531825" name="Text 27"/>
+          <p:cNvPr id="1772039478" name="Text 27"/>
           <p:cNvSpPr/>
           <p:nvPr/>
         </p:nvSpPr>
@@ -3740,7 +3751,7 @@
       </p:sp>
       <p:sp>
         <p:nvSpPr>
-          <p:cNvPr id="1475123722" name="Text 28"/>
+          <p:cNvPr id="469342795" name="Text 28"/>
           <p:cNvSpPr/>
           <p:nvPr/>
         </p:nvSpPr>
@@ -3831,7 +3842,7 @@
       </p:grpSpPr>
       <p:sp>
         <p:nvSpPr>
-          <p:cNvPr id="341411236" name="Text 0"/>
+          <p:cNvPr id="712043135" name="Text 0"/>
           <p:cNvSpPr/>
           <p:nvPr/>
         </p:nvSpPr>
@@ -3871,7 +3882,7 @@
       </p:sp>
       <p:sp>
         <p:nvSpPr>
-          <p:cNvPr id="951035077" name="Text 1"/>
+          <p:cNvPr id="189005858" name="Text 1"/>
           <p:cNvSpPr/>
           <p:nvPr/>
         </p:nvSpPr>
@@ -3911,7 +3922,7 @@
       </p:sp>
       <p:sp>
         <p:nvSpPr>
-          <p:cNvPr id="1996255401" name="Shape 2"/>
+          <p:cNvPr id="721037541" name="Shape 2"/>
           <p:cNvSpPr/>
           <p:nvPr/>
         </p:nvSpPr>
@@ -3940,7 +3951,7 @@
       </p:sp>
       <p:sp>
         <p:nvSpPr>
-          <p:cNvPr id="2059177301" name="Text 3"/>
+          <p:cNvPr id="335684996" name="Text 3"/>
           <p:cNvSpPr/>
           <p:nvPr/>
         </p:nvSpPr>
@@ -3980,7 +3991,7 @@
       </p:sp>
       <p:sp>
         <p:nvSpPr>
-          <p:cNvPr id="1504469140" name="Text 4"/>
+          <p:cNvPr id="1689914478" name="Text 4"/>
           <p:cNvSpPr/>
           <p:nvPr/>
         </p:nvSpPr>
@@ -4371,7 +4382,7 @@
       </p:sp>
       <p:sp>
         <p:nvSpPr>
-          <p:cNvPr id="1577663904" name="Shape 5"/>
+          <p:cNvPr id="1314738743" name="Shape 5"/>
           <p:cNvSpPr/>
           <p:nvPr/>
         </p:nvSpPr>
@@ -4405,7 +4416,7 @@
       </p:sp>
       <p:sp>
         <p:nvSpPr>
-          <p:cNvPr id="1610876058" name="Shape 6"/>
+          <p:cNvPr id="1936365821" name="Shape 6"/>
           <p:cNvSpPr/>
           <p:nvPr/>
         </p:nvSpPr>
@@ -4425,7 +4436,7 @@
       </p:sp>
       <p:pic>
         <p:nvPicPr>
-          <p:cNvPr id="1447126896" name="Image 0" descr="preencoded.png"/>
+          <p:cNvPr id="1360673180" name="Image 0" descr="preencoded.png"/>
           <p:cNvPicPr>
             <a:picLocks noChangeAspect="1"/>
           </p:cNvPicPr>
@@ -4447,7 +4458,7 @@
       </p:pic>
       <p:sp>
         <p:nvSpPr>
-          <p:cNvPr id="665827181" name="Text 7"/>
+          <p:cNvPr id="1922175127" name="Text 7"/>
           <p:cNvSpPr/>
           <p:nvPr/>
         </p:nvSpPr>
@@ -4487,7 +4498,7 @@
       </p:sp>
       <p:sp>
         <p:nvSpPr>
-          <p:cNvPr id="157469523" name="Text 8"/>
+          <p:cNvPr id="356276207" name="Text 8"/>
           <p:cNvSpPr/>
           <p:nvPr/>
         </p:nvSpPr>
@@ -4530,7 +4541,7 @@
       </p:sp>
       <p:sp>
         <p:nvSpPr>
-          <p:cNvPr id="300540146" name="Shape 9"/>
+          <p:cNvPr id="1657626818" name="Shape 9"/>
           <p:cNvSpPr/>
           <p:nvPr/>
         </p:nvSpPr>
@@ -4564,7 +4575,7 @@
       </p:sp>
       <p:sp>
         <p:nvSpPr>
-          <p:cNvPr id="1048047682" name="Shape 10"/>
+          <p:cNvPr id="1601431166" name="Shape 10"/>
           <p:cNvSpPr/>
           <p:nvPr/>
         </p:nvSpPr>
@@ -4584,7 +4595,7 @@
       </p:sp>
       <p:pic>
         <p:nvPicPr>
-          <p:cNvPr id="198268555" name="Image 1" descr="preencoded.png"/>
+          <p:cNvPr id="1006048999" name="Image 1" descr="preencoded.png"/>
           <p:cNvPicPr>
             <a:picLocks noChangeAspect="1"/>
           </p:cNvPicPr>
@@ -4606,7 +4617,7 @@
       </p:pic>
       <p:sp>
         <p:nvSpPr>
-          <p:cNvPr id="1745642896" name="Text 11"/>
+          <p:cNvPr id="1932958327" name="Text 11"/>
           <p:cNvSpPr/>
           <p:nvPr/>
         </p:nvSpPr>
@@ -4646,7 +4657,7 @@
       </p:sp>
       <p:sp>
         <p:nvSpPr>
-          <p:cNvPr id="721326564" name="Text 12"/>
+          <p:cNvPr id="647683807" name="Text 12"/>
           <p:cNvSpPr/>
           <p:nvPr/>
         </p:nvSpPr>
@@ -4689,7 +4700,7 @@
       </p:sp>
       <p:sp>
         <p:nvSpPr>
-          <p:cNvPr id="1783466491" name="Shape 13"/>
+          <p:cNvPr id="1559808712" name="Shape 13"/>
           <p:cNvSpPr/>
           <p:nvPr/>
         </p:nvSpPr>
@@ -4723,7 +4734,7 @@
       </p:sp>
       <p:sp>
         <p:nvSpPr>
-          <p:cNvPr id="2026297715" name="Shape 14"/>
+          <p:cNvPr id="1479215228" name="Shape 14"/>
           <p:cNvSpPr/>
           <p:nvPr/>
         </p:nvSpPr>
@@ -4743,7 +4754,7 @@
       </p:sp>
       <p:pic>
         <p:nvPicPr>
-          <p:cNvPr id="1525830752" name="Image 2" descr="preencoded.png"/>
+          <p:cNvPr id="647713215" name="Image 2" descr="preencoded.png"/>
           <p:cNvPicPr>
             <a:picLocks noChangeAspect="1"/>
           </p:cNvPicPr>
@@ -4765,7 +4776,7 @@
       </p:pic>
       <p:sp>
         <p:nvSpPr>
-          <p:cNvPr id="7436268" name="Text 15"/>
+          <p:cNvPr id="1892569581" name="Text 15"/>
           <p:cNvSpPr/>
           <p:nvPr/>
         </p:nvSpPr>
@@ -4805,7 +4816,7 @@
       </p:sp>
       <p:sp>
         <p:nvSpPr>
-          <p:cNvPr id="417494198" name="Text 16"/>
+          <p:cNvPr id="2102806910" name="Text 16"/>
           <p:cNvSpPr/>
           <p:nvPr/>
         </p:nvSpPr>
@@ -4848,7 +4859,7 @@
       </p:sp>
       <p:sp>
         <p:nvSpPr>
-          <p:cNvPr id="984128330" name="Shape 17"/>
+          <p:cNvPr id="924609237" name="Shape 17"/>
           <p:cNvSpPr/>
           <p:nvPr/>
         </p:nvSpPr>
@@ -4882,7 +4893,7 @@
       </p:sp>
       <p:sp>
         <p:nvSpPr>
-          <p:cNvPr id="1547307075" name="Shape 18"/>
+          <p:cNvPr id="973822046" name="Shape 18"/>
           <p:cNvSpPr/>
           <p:nvPr/>
         </p:nvSpPr>
@@ -4902,7 +4913,7 @@
       </p:sp>
       <p:pic>
         <p:nvPicPr>
-          <p:cNvPr id="654066522" name="Image 3" descr="preencoded.png"/>
+          <p:cNvPr id="1640920871" name="Image 3" descr="preencoded.png"/>
           <p:cNvPicPr>
             <a:picLocks noChangeAspect="1"/>
           </p:cNvPicPr>
@@ -4924,7 +4935,7 @@
       </p:pic>
       <p:sp>
         <p:nvSpPr>
-          <p:cNvPr id="373738405" name="Text 19"/>
+          <p:cNvPr id="1034607671" name="Text 19"/>
           <p:cNvSpPr/>
           <p:nvPr/>
         </p:nvSpPr>
@@ -4964,7 +4975,7 @@
       </p:sp>
       <p:sp>
         <p:nvSpPr>
-          <p:cNvPr id="1183714452" name="Text 20"/>
+          <p:cNvPr id="2077830652" name="Text 20"/>
           <p:cNvSpPr/>
           <p:nvPr/>
         </p:nvSpPr>
@@ -5007,7 +5018,7 @@
       </p:sp>
       <p:sp>
         <p:nvSpPr>
-          <p:cNvPr id="1437806673" name="Shape 21"/>
+          <p:cNvPr id="1505018493" name="Shape 21"/>
           <p:cNvSpPr/>
           <p:nvPr/>
         </p:nvSpPr>
@@ -5041,7 +5052,7 @@
       </p:sp>
       <p:sp>
         <p:nvSpPr>
-          <p:cNvPr id="1375452269" name="Shape 22"/>
+          <p:cNvPr id="895395568" name="Shape 22"/>
           <p:cNvSpPr/>
           <p:nvPr/>
         </p:nvSpPr>
@@ -5061,7 +5072,7 @@
       </p:sp>
       <p:pic>
         <p:nvPicPr>
-          <p:cNvPr id="1090935059" name="Image 4" descr="preencoded.png"/>
+          <p:cNvPr id="584226137" name="Image 4" descr="preencoded.png"/>
           <p:cNvPicPr>
             <a:picLocks noChangeAspect="1"/>
           </p:cNvPicPr>
@@ -5083,7 +5094,7 @@
       </p:pic>
       <p:sp>
         <p:nvSpPr>
-          <p:cNvPr id="1677027112" name="Text 23"/>
+          <p:cNvPr id="1931001600" name="Text 23"/>
           <p:cNvSpPr/>
           <p:nvPr/>
         </p:nvSpPr>
@@ -5123,7 +5134,7 @@
       </p:sp>
       <p:sp>
         <p:nvSpPr>
-          <p:cNvPr id="2066683231" name="Text 24"/>
+          <p:cNvPr id="1555762037" name="Text 24"/>
           <p:cNvSpPr/>
           <p:nvPr/>
         </p:nvSpPr>
@@ -5166,7 +5177,7 @@
       </p:sp>
       <p:sp>
         <p:nvSpPr>
-          <p:cNvPr id="768775756" name="Text 25"/>
+          <p:cNvPr id="183585281" name="Text 25"/>
           <p:cNvSpPr/>
           <p:nvPr/>
         </p:nvSpPr>
@@ -5206,7 +5217,7 @@
       </p:sp>
       <p:sp>
         <p:nvSpPr>
-          <p:cNvPr id="2030640183" name="Text 26"/>
+          <p:cNvPr id="1351625900" name="Text 26"/>
           <p:cNvSpPr/>
           <p:nvPr/>
         </p:nvSpPr>
@@ -5286,7 +5297,7 @@
       </p:grpSpPr>
       <p:sp>
         <p:nvSpPr>
-          <p:cNvPr id="762053097" name="Text 0"/>
+          <p:cNvPr id="1427329949" name="Text 0"/>
           <p:cNvSpPr/>
           <p:nvPr/>
         </p:nvSpPr>
@@ -5326,7 +5337,7 @@
       </p:sp>
       <p:sp>
         <p:nvSpPr>
-          <p:cNvPr id="1566890835" name="Text 1"/>
+          <p:cNvPr id="385928836" name="Text 1"/>
           <p:cNvSpPr/>
           <p:nvPr/>
         </p:nvSpPr>
@@ -5366,7 +5377,7 @@
       </p:sp>
       <p:sp>
         <p:nvSpPr>
-          <p:cNvPr id="425970456" name="Text 2"/>
+          <p:cNvPr id="1032823701" name="Text 2"/>
           <p:cNvSpPr/>
           <p:nvPr/>
         </p:nvSpPr>
@@ -5409,7 +5420,7 @@
       </p:sp>
       <p:sp>
         <p:nvSpPr>
-          <p:cNvPr id="415915717" name="Shape 3"/>
+          <p:cNvPr id="421808602" name="Shape 3"/>
           <p:cNvSpPr/>
           <p:nvPr/>
         </p:nvSpPr>
@@ -5438,7 +5449,7 @@
       </p:sp>
       <p:sp>
         <p:nvSpPr>
-          <p:cNvPr id="1234313700" name="Text 4"/>
+          <p:cNvPr id="1792352313" name="Text 4"/>
           <p:cNvSpPr/>
           <p:nvPr/>
         </p:nvSpPr>
@@ -5478,7 +5489,7 @@
       </p:sp>
       <p:sp>
         <p:nvSpPr>
-          <p:cNvPr id="690435542" name="Text 5"/>
+          <p:cNvPr id="2083090999" name="Text 5"/>
           <p:cNvSpPr/>
           <p:nvPr/>
         </p:nvSpPr>
@@ -5795,7 +5806,7 @@
       </p:sp>
       <p:sp>
         <p:nvSpPr>
-          <p:cNvPr id="643466716" name="Shape 6"/>
+          <p:cNvPr id="1400471890" name="Shape 6"/>
           <p:cNvSpPr/>
           <p:nvPr/>
         </p:nvSpPr>
@@ -5829,7 +5840,7 @@
       </p:sp>
       <p:sp>
         <p:nvSpPr>
-          <p:cNvPr id="337472570" name="Shape 7"/>
+          <p:cNvPr id="35953733" name="Shape 7"/>
           <p:cNvSpPr/>
           <p:nvPr/>
         </p:nvSpPr>
@@ -5849,7 +5860,7 @@
       </p:sp>
       <p:pic>
         <p:nvPicPr>
-          <p:cNvPr id="292886728" name="Image 0" descr="preencoded.png"/>
+          <p:cNvPr id="2073698832" name="Image 0" descr="preencoded.png"/>
           <p:cNvPicPr>
             <a:picLocks noChangeAspect="1"/>
           </p:cNvPicPr>
@@ -5871,7 +5882,7 @@
       </p:pic>
       <p:sp>
         <p:nvSpPr>
-          <p:cNvPr id="1322092026" name="Text 8"/>
+          <p:cNvPr id="1266172644" name="Text 8"/>
           <p:cNvSpPr/>
           <p:nvPr/>
         </p:nvSpPr>
@@ -5911,7 +5922,7 @@
       </p:sp>
       <p:sp>
         <p:nvSpPr>
-          <p:cNvPr id="1266736894" name="Text 9"/>
+          <p:cNvPr id="1982358777" name="Text 9"/>
           <p:cNvSpPr/>
           <p:nvPr/>
         </p:nvSpPr>
@@ -5954,7 +5965,7 @@
       </p:sp>
       <p:sp>
         <p:nvSpPr>
-          <p:cNvPr id="1602694523" name="Shape 10"/>
+          <p:cNvPr id="578438576" name="Shape 10"/>
           <p:cNvSpPr/>
           <p:nvPr/>
         </p:nvSpPr>
@@ -5988,7 +5999,7 @@
       </p:sp>
       <p:sp>
         <p:nvSpPr>
-          <p:cNvPr id="1591085008" name="Shape 11"/>
+          <p:cNvPr id="989782278" name="Shape 11"/>
           <p:cNvSpPr/>
           <p:nvPr/>
         </p:nvSpPr>
@@ -6008,7 +6019,7 @@
       </p:sp>
       <p:pic>
         <p:nvPicPr>
-          <p:cNvPr id="563228309" name="Image 1" descr="preencoded.png"/>
+          <p:cNvPr id="700980603" name="Image 1" descr="preencoded.png"/>
           <p:cNvPicPr>
             <a:picLocks noChangeAspect="1"/>
           </p:cNvPicPr>
@@ -6030,7 +6041,7 @@
       </p:pic>
       <p:sp>
         <p:nvSpPr>
-          <p:cNvPr id="939664799" name="Text 12"/>
+          <p:cNvPr id="1287075099" name="Text 12"/>
           <p:cNvSpPr/>
           <p:nvPr/>
         </p:nvSpPr>
@@ -6070,7 +6081,7 @@
       </p:sp>
       <p:sp>
         <p:nvSpPr>
-          <p:cNvPr id="1401616439" name="Text 13"/>
+          <p:cNvPr id="1888283188" name="Text 13"/>
           <p:cNvSpPr/>
           <p:nvPr/>
         </p:nvSpPr>
@@ -6113,7 +6124,7 @@
       </p:sp>
       <p:sp>
         <p:nvSpPr>
-          <p:cNvPr id="446163125" name="Shape 14"/>
+          <p:cNvPr id="593233691" name="Shape 14"/>
           <p:cNvSpPr/>
           <p:nvPr/>
         </p:nvSpPr>
@@ -6147,7 +6158,7 @@
       </p:sp>
       <p:sp>
         <p:nvSpPr>
-          <p:cNvPr id="981936045" name="Shape 15"/>
+          <p:cNvPr id="1721212895" name="Shape 15"/>
           <p:cNvSpPr/>
           <p:nvPr/>
         </p:nvSpPr>
@@ -6167,7 +6178,7 @@
       </p:sp>
       <p:pic>
         <p:nvPicPr>
-          <p:cNvPr id="101577615" name="Image 2" descr="preencoded.png"/>
+          <p:cNvPr id="1248908863" name="Image 2" descr="preencoded.png"/>
           <p:cNvPicPr>
             <a:picLocks noChangeAspect="1"/>
           </p:cNvPicPr>
@@ -6189,7 +6200,7 @@
       </p:pic>
       <p:sp>
         <p:nvSpPr>
-          <p:cNvPr id="2030342927" name="Text 16"/>
+          <p:cNvPr id="1605012681" name="Text 16"/>
           <p:cNvSpPr/>
           <p:nvPr/>
         </p:nvSpPr>
@@ -6229,7 +6240,7 @@
       </p:sp>
       <p:sp>
         <p:nvSpPr>
-          <p:cNvPr id="1353047463" name="Text 17"/>
+          <p:cNvPr id="989495098" name="Text 17"/>
           <p:cNvSpPr/>
           <p:nvPr/>
         </p:nvSpPr>
@@ -6272,7 +6283,7 @@
       </p:sp>
       <p:sp>
         <p:nvSpPr>
-          <p:cNvPr id="2093263453" name="Text 18"/>
+          <p:cNvPr id="1746343721" name="Text 18"/>
           <p:cNvSpPr/>
           <p:nvPr/>
         </p:nvSpPr>
@@ -6312,7 +6323,7 @@
       </p:sp>
       <p:sp>
         <p:nvSpPr>
-          <p:cNvPr id="575804690" name="Text 19"/>
+          <p:cNvPr id="827393618" name="Text 19"/>
           <p:cNvSpPr/>
           <p:nvPr/>
         </p:nvSpPr>
@@ -6392,7 +6403,7 @@
       </p:grpSpPr>
       <p:sp>
         <p:nvSpPr>
-          <p:cNvPr id="1688285322" name="Text 0"/>
+          <p:cNvPr id="504036093" name="Text 0"/>
           <p:cNvSpPr/>
           <p:nvPr/>
         </p:nvSpPr>
@@ -6432,7 +6443,7 @@
       </p:sp>
       <p:sp>
         <p:nvSpPr>
-          <p:cNvPr id="1146796584" name="Text 1"/>
+          <p:cNvPr id="405877257" name="Text 1"/>
           <p:cNvSpPr/>
           <p:nvPr/>
         </p:nvSpPr>
@@ -6472,7 +6483,7 @@
       </p:sp>
       <p:sp>
         <p:nvSpPr>
-          <p:cNvPr id="1145269154" name="Shape 2"/>
+          <p:cNvPr id="82369998" name="Shape 2"/>
           <p:cNvSpPr/>
           <p:nvPr/>
         </p:nvSpPr>
@@ -6501,7 +6512,7 @@
       </p:sp>
       <p:sp>
         <p:nvSpPr>
-          <p:cNvPr id="1495641882" name="Shape 3"/>
+          <p:cNvPr id="1093392656" name="Shape 3"/>
           <p:cNvSpPr/>
           <p:nvPr/>
         </p:nvSpPr>
@@ -6521,7 +6532,7 @@
       </p:sp>
       <p:sp>
         <p:nvSpPr>
-          <p:cNvPr id="1511301004" name="Shape 4"/>
+          <p:cNvPr id="1491767161" name="Shape 4"/>
           <p:cNvSpPr/>
           <p:nvPr/>
         </p:nvSpPr>
@@ -6541,7 +6552,7 @@
       </p:sp>
       <p:sp>
         <p:nvSpPr>
-          <p:cNvPr id="1908373214" name="Shape 5"/>
+          <p:cNvPr id="1953579715" name="Shape 5"/>
           <p:cNvSpPr/>
           <p:nvPr/>
         </p:nvSpPr>
@@ -6561,7 +6572,7 @@
       </p:sp>
       <p:sp>
         <p:nvSpPr>
-          <p:cNvPr id="327813228" name="Text 6"/>
+          <p:cNvPr id="1119459886" name="Text 6"/>
           <p:cNvSpPr/>
           <p:nvPr/>
         </p:nvSpPr>
@@ -6601,7 +6612,7 @@
       </p:sp>
       <p:sp>
         <p:nvSpPr>
-          <p:cNvPr id="1647655729" name="Text 7"/>
+          <p:cNvPr id="738747445" name="Text 7"/>
           <p:cNvSpPr/>
           <p:nvPr/>
         </p:nvSpPr>
@@ -6886,7 +6897,7 @@
       </p:sp>
       <p:sp>
         <p:nvSpPr>
-          <p:cNvPr id="50143764" name="Shape 8"/>
+          <p:cNvPr id="44237535" name="Shape 8"/>
           <p:cNvSpPr/>
           <p:nvPr/>
         </p:nvSpPr>
@@ -6920,7 +6931,7 @@
       </p:sp>
       <p:sp>
         <p:nvSpPr>
-          <p:cNvPr id="263674461" name="Shape 9"/>
+          <p:cNvPr id="921012905" name="Shape 9"/>
           <p:cNvSpPr/>
           <p:nvPr/>
         </p:nvSpPr>
@@ -6940,7 +6951,7 @@
       </p:sp>
       <p:sp>
         <p:nvSpPr>
-          <p:cNvPr id="966407771" name="Text 10"/>
+          <p:cNvPr id="1353836269" name="Text 10"/>
           <p:cNvSpPr/>
           <p:nvPr/>
         </p:nvSpPr>
@@ -6980,7 +6991,7 @@
       </p:sp>
       <p:sp>
         <p:nvSpPr>
-          <p:cNvPr id="1697389584" name="Text 11"/>
+          <p:cNvPr id="1800042854" name="Text 11"/>
           <p:cNvSpPr/>
           <p:nvPr/>
         </p:nvSpPr>
@@ -7020,7 +7031,7 @@
       </p:sp>
       <p:sp>
         <p:nvSpPr>
-          <p:cNvPr id="2095310233" name="Text 12"/>
+          <p:cNvPr id="99590695" name="Text 12"/>
           <p:cNvSpPr/>
           <p:nvPr/>
         </p:nvSpPr>
@@ -7063,7 +7074,7 @@
       </p:sp>
       <p:sp>
         <p:nvSpPr>
-          <p:cNvPr id="566244987" name="Shape 13"/>
+          <p:cNvPr id="1835413595" name="Shape 13"/>
           <p:cNvSpPr/>
           <p:nvPr/>
         </p:nvSpPr>
@@ -7097,7 +7108,7 @@
       </p:sp>
       <p:sp>
         <p:nvSpPr>
-          <p:cNvPr id="383172263" name="Shape 14"/>
+          <p:cNvPr id="1613362668" name="Shape 14"/>
           <p:cNvSpPr/>
           <p:nvPr/>
         </p:nvSpPr>
@@ -7117,7 +7128,7 @@
       </p:sp>
       <p:sp>
         <p:nvSpPr>
-          <p:cNvPr id="1470182862" name="Text 15"/>
+          <p:cNvPr id="630569468" name="Text 15"/>
           <p:cNvSpPr/>
           <p:nvPr/>
         </p:nvSpPr>
@@ -7157,7 +7168,7 @@
       </p:sp>
       <p:sp>
         <p:nvSpPr>
-          <p:cNvPr id="1713965544" name="Text 16"/>
+          <p:cNvPr id="1956445136" name="Text 16"/>
           <p:cNvSpPr/>
           <p:nvPr/>
         </p:nvSpPr>
@@ -7197,7 +7208,7 @@
       </p:sp>
       <p:sp>
         <p:nvSpPr>
-          <p:cNvPr id="1150171500" name="Text 17"/>
+          <p:cNvPr id="1663444383" name="Text 17"/>
           <p:cNvSpPr/>
           <p:nvPr/>
         </p:nvSpPr>
@@ -7240,7 +7251,7 @@
       </p:sp>
       <p:sp>
         <p:nvSpPr>
-          <p:cNvPr id="1235763626" name="Shape 18"/>
+          <p:cNvPr id="1015507490" name="Shape 18"/>
           <p:cNvSpPr/>
           <p:nvPr/>
         </p:nvSpPr>
@@ -7274,7 +7285,7 @@
       </p:sp>
       <p:sp>
         <p:nvSpPr>
-          <p:cNvPr id="969794770" name="Shape 19"/>
+          <p:cNvPr id="1995744619" name="Shape 19"/>
           <p:cNvSpPr/>
           <p:nvPr/>
         </p:nvSpPr>
@@ -7294,7 +7305,7 @@
       </p:sp>
       <p:sp>
         <p:nvSpPr>
-          <p:cNvPr id="357715378" name="Text 20"/>
+          <p:cNvPr id="1579913025" name="Text 20"/>
           <p:cNvSpPr/>
           <p:nvPr/>
         </p:nvSpPr>
@@ -7334,7 +7345,7 @@
       </p:sp>
       <p:sp>
         <p:nvSpPr>
-          <p:cNvPr id="1702172718" name="Text 21"/>
+          <p:cNvPr id="934981807" name="Text 21"/>
           <p:cNvSpPr/>
           <p:nvPr/>
         </p:nvSpPr>
@@ -7374,7 +7385,7 @@
       </p:sp>
       <p:sp>
         <p:nvSpPr>
-          <p:cNvPr id="1221322682" name="Text 22"/>
+          <p:cNvPr id="177559110" name="Text 22"/>
           <p:cNvSpPr/>
           <p:nvPr/>
         </p:nvSpPr>
@@ -7417,7 +7428,7 @@
       </p:sp>
       <p:sp>
         <p:nvSpPr>
-          <p:cNvPr id="902487125" name="Text 23"/>
+          <p:cNvPr id="264675980" name="Text 23"/>
           <p:cNvSpPr/>
           <p:nvPr/>
         </p:nvSpPr>
@@ -7457,7 +7468,7 @@
       </p:sp>
       <p:sp>
         <p:nvSpPr>
-          <p:cNvPr id="4395537" name="Text 24"/>
+          <p:cNvPr id="1279051982" name="Text 24"/>
           <p:cNvSpPr/>
           <p:nvPr/>
         </p:nvSpPr>
@@ -7537,7 +7548,7 @@
       </p:grpSpPr>
       <p:sp>
         <p:nvSpPr>
-          <p:cNvPr id="1053904187" name="Text 0"/>
+          <p:cNvPr id="408654540" name="Text 0"/>
           <p:cNvSpPr/>
           <p:nvPr/>
         </p:nvSpPr>
@@ -7577,7 +7588,7 @@
       </p:sp>
       <p:sp>
         <p:nvSpPr>
-          <p:cNvPr id="832361231" name="Text 1"/>
+          <p:cNvPr id="863831649" name="Text 1"/>
           <p:cNvSpPr/>
           <p:nvPr/>
         </p:nvSpPr>
@@ -7617,7 +7628,7 @@
       </p:sp>
       <p:sp>
         <p:nvSpPr>
-          <p:cNvPr id="1445055660" name="Shape 2"/>
+          <p:cNvPr id="1391303154" name="Shape 2"/>
           <p:cNvSpPr/>
           <p:nvPr/>
         </p:nvSpPr>
@@ -7646,7 +7657,7 @@
       </p:sp>
       <p:sp>
         <p:nvSpPr>
-          <p:cNvPr id="1259268046" name="Shape 3"/>
+          <p:cNvPr id="1323252361" name="Shape 3"/>
           <p:cNvSpPr/>
           <p:nvPr/>
         </p:nvSpPr>
@@ -7666,7 +7677,7 @@
       </p:sp>
       <p:sp>
         <p:nvSpPr>
-          <p:cNvPr id="636223872" name="Shape 4"/>
+          <p:cNvPr id="369941753" name="Shape 4"/>
           <p:cNvSpPr/>
           <p:nvPr/>
         </p:nvSpPr>
@@ -7686,7 +7697,7 @@
       </p:sp>
       <p:sp>
         <p:nvSpPr>
-          <p:cNvPr id="371984883" name="Shape 5"/>
+          <p:cNvPr id="2098306787" name="Shape 5"/>
           <p:cNvSpPr/>
           <p:nvPr/>
         </p:nvSpPr>
@@ -7706,7 +7717,7 @@
       </p:sp>
       <p:sp>
         <p:nvSpPr>
-          <p:cNvPr id="1811323783" name="Text 6"/>
+          <p:cNvPr id="968190591" name="Text 6"/>
           <p:cNvSpPr/>
           <p:nvPr/>
         </p:nvSpPr>
@@ -7746,7 +7757,7 @@
       </p:sp>
       <p:sp>
         <p:nvSpPr>
-          <p:cNvPr id="1430999855" name="Text 7"/>
+          <p:cNvPr id="1093694606" name="Text 7"/>
           <p:cNvSpPr/>
           <p:nvPr/>
         </p:nvSpPr>
@@ -8084,7 +8095,7 @@
       </p:sp>
       <p:sp>
         <p:nvSpPr>
-          <p:cNvPr id="1628561856" name="Shape 8"/>
+          <p:cNvPr id="159745147" name="Shape 8"/>
           <p:cNvSpPr/>
           <p:nvPr/>
         </p:nvSpPr>
@@ -8118,7 +8129,7 @@
       </p:sp>
       <p:sp>
         <p:nvSpPr>
-          <p:cNvPr id="1214910008" name="Shape 9"/>
+          <p:cNvPr id="292231830" name="Shape 9"/>
           <p:cNvSpPr/>
           <p:nvPr/>
         </p:nvSpPr>
@@ -8138,7 +8149,7 @@
       </p:sp>
       <p:sp>
         <p:nvSpPr>
-          <p:cNvPr id="84879360" name="Text 10"/>
+          <p:cNvPr id="1746989537" name="Text 10"/>
           <p:cNvSpPr/>
           <p:nvPr/>
         </p:nvSpPr>
@@ -8178,7 +8189,7 @@
       </p:sp>
       <p:sp>
         <p:nvSpPr>
-          <p:cNvPr id="1771360315" name="Text 11"/>
+          <p:cNvPr id="740591076" name="Text 11"/>
           <p:cNvSpPr/>
           <p:nvPr/>
         </p:nvSpPr>
@@ -8218,7 +8229,7 @@
       </p:sp>
       <p:sp>
         <p:nvSpPr>
-          <p:cNvPr id="936250155" name="Text 12"/>
+          <p:cNvPr id="93347618" name="Text 12"/>
           <p:cNvSpPr/>
           <p:nvPr/>
         </p:nvSpPr>
@@ -8261,7 +8272,7 @@
       </p:sp>
       <p:sp>
         <p:nvSpPr>
-          <p:cNvPr id="1998416355" name="Shape 13"/>
+          <p:cNvPr id="1868585636" name="Shape 13"/>
           <p:cNvSpPr/>
           <p:nvPr/>
         </p:nvSpPr>
@@ -8295,7 +8306,7 @@
       </p:sp>
       <p:sp>
         <p:nvSpPr>
-          <p:cNvPr id="1950469061" name="Shape 14"/>
+          <p:cNvPr id="1309630832" name="Shape 14"/>
           <p:cNvSpPr/>
           <p:nvPr/>
         </p:nvSpPr>
@@ -8315,7 +8326,7 @@
       </p:sp>
       <p:sp>
         <p:nvSpPr>
-          <p:cNvPr id="924452278" name="Text 15"/>
+          <p:cNvPr id="911858213" name="Text 15"/>
           <p:cNvSpPr/>
           <p:nvPr/>
         </p:nvSpPr>
@@ -8355,7 +8366,7 @@
       </p:sp>
       <p:sp>
         <p:nvSpPr>
-          <p:cNvPr id="938430544" name="Text 16"/>
+          <p:cNvPr id="1681714143" name="Text 16"/>
           <p:cNvSpPr/>
           <p:nvPr/>
         </p:nvSpPr>
@@ -8395,7 +8406,7 @@
       </p:sp>
       <p:sp>
         <p:nvSpPr>
-          <p:cNvPr id="974452746" name="Text 17"/>
+          <p:cNvPr id="1657545650" name="Text 17"/>
           <p:cNvSpPr/>
           <p:nvPr/>
         </p:nvSpPr>
@@ -8438,7 +8449,7 @@
       </p:sp>
       <p:sp>
         <p:nvSpPr>
-          <p:cNvPr id="1895715171" name="Shape 18"/>
+          <p:cNvPr id="1915257818" name="Shape 18"/>
           <p:cNvSpPr/>
           <p:nvPr/>
         </p:nvSpPr>
@@ -8472,7 +8483,7 @@
       </p:sp>
       <p:sp>
         <p:nvSpPr>
-          <p:cNvPr id="325992177" name="Shape 19"/>
+          <p:cNvPr id="1076821091" name="Shape 19"/>
           <p:cNvSpPr/>
           <p:nvPr/>
         </p:nvSpPr>
@@ -8492,7 +8503,7 @@
       </p:sp>
       <p:sp>
         <p:nvSpPr>
-          <p:cNvPr id="239792329" name="Text 20"/>
+          <p:cNvPr id="1221977081" name="Text 20"/>
           <p:cNvSpPr/>
           <p:nvPr/>
         </p:nvSpPr>
@@ -8532,7 +8543,7 @@
       </p:sp>
       <p:sp>
         <p:nvSpPr>
-          <p:cNvPr id="428020535" name="Text 21"/>
+          <p:cNvPr id="1876301423" name="Text 21"/>
           <p:cNvSpPr/>
           <p:nvPr/>
         </p:nvSpPr>
@@ -8572,7 +8583,7 @@
       </p:sp>
       <p:sp>
         <p:nvSpPr>
-          <p:cNvPr id="327488581" name="Text 22"/>
+          <p:cNvPr id="653015013" name="Text 22"/>
           <p:cNvSpPr/>
           <p:nvPr/>
         </p:nvSpPr>
@@ -8615,7 +8626,7 @@
       </p:sp>
       <p:sp>
         <p:nvSpPr>
-          <p:cNvPr id="1369201809" name="Text 23"/>
+          <p:cNvPr id="74319556" name="Text 23"/>
           <p:cNvSpPr/>
           <p:nvPr/>
         </p:nvSpPr>
@@ -8655,7 +8666,7 @@
       </p:sp>
       <p:sp>
         <p:nvSpPr>
-          <p:cNvPr id="1093400951" name="Text 24"/>
+          <p:cNvPr id="75075839" name="Text 24"/>
           <p:cNvSpPr/>
           <p:nvPr/>
         </p:nvSpPr>
@@ -8735,7 +8746,7 @@
       </p:grpSpPr>
       <p:sp>
         <p:nvSpPr>
-          <p:cNvPr id="1414772745" name="Text 0"/>
+          <p:cNvPr id="1367426053" name="Text 0"/>
           <p:cNvSpPr/>
           <p:nvPr/>
         </p:nvSpPr>
@@ -8775,7 +8786,7 @@
       </p:sp>
       <p:sp>
         <p:nvSpPr>
-          <p:cNvPr id="1187073989" name="Text 1"/>
+          <p:cNvPr id="374434886" name="Text 1"/>
           <p:cNvSpPr/>
           <p:nvPr/>
         </p:nvSpPr>
@@ -8815,7 +8826,7 @@
       </p:sp>
       <p:sp>
         <p:nvSpPr>
-          <p:cNvPr id="535703823" name="Shape 2"/>
+          <p:cNvPr id="947909299" name="Shape 2"/>
           <p:cNvSpPr/>
           <p:nvPr/>
         </p:nvSpPr>
@@ -8844,7 +8855,7 @@
       </p:sp>
       <p:sp>
         <p:nvSpPr>
-          <p:cNvPr id="1050087563" name="Shape 3"/>
+          <p:cNvPr id="1496890057" name="Shape 3"/>
           <p:cNvSpPr/>
           <p:nvPr/>
         </p:nvSpPr>
@@ -8864,7 +8875,7 @@
       </p:sp>
       <p:sp>
         <p:nvSpPr>
-          <p:cNvPr id="1393105017" name="Shape 4"/>
+          <p:cNvPr id="2133354805" name="Shape 4"/>
           <p:cNvSpPr/>
           <p:nvPr/>
         </p:nvSpPr>
@@ -8884,7 +8895,7 @@
       </p:sp>
       <p:sp>
         <p:nvSpPr>
-          <p:cNvPr id="479392982" name="Shape 5"/>
+          <p:cNvPr id="1102433805" name="Shape 5"/>
           <p:cNvSpPr/>
           <p:nvPr/>
         </p:nvSpPr>
@@ -8904,7 +8915,7 @@
       </p:sp>
       <p:sp>
         <p:nvSpPr>
-          <p:cNvPr id="1868031637" name="Text 6"/>
+          <p:cNvPr id="1584673639" name="Text 6"/>
           <p:cNvSpPr/>
           <p:nvPr/>
         </p:nvSpPr>
@@ -8944,7 +8955,7 @@
       </p:sp>
       <p:sp>
         <p:nvSpPr>
-          <p:cNvPr id="1379717728" name="Text 7"/>
+          <p:cNvPr id="590498572" name="Text 7"/>
           <p:cNvSpPr/>
           <p:nvPr/>
         </p:nvSpPr>
@@ -9303,7 +9314,7 @@
       </p:sp>
       <p:sp>
         <p:nvSpPr>
-          <p:cNvPr id="2117692321" name="Shape 8"/>
+          <p:cNvPr id="2044848282" name="Shape 8"/>
           <p:cNvSpPr/>
           <p:nvPr/>
         </p:nvSpPr>
@@ -9337,7 +9348,7 @@
       </p:sp>
       <p:sp>
         <p:nvSpPr>
-          <p:cNvPr id="802638996" name="Shape 9"/>
+          <p:cNvPr id="338916783" name="Shape 9"/>
           <p:cNvSpPr/>
           <p:nvPr/>
         </p:nvSpPr>
@@ -9357,7 +9368,7 @@
       </p:sp>
       <p:sp>
         <p:nvSpPr>
-          <p:cNvPr id="1735840086" name="Text 10"/>
+          <p:cNvPr id="132556108" name="Text 10"/>
           <p:cNvSpPr/>
           <p:nvPr/>
         </p:nvSpPr>
@@ -9397,7 +9408,7 @@
       </p:sp>
       <p:sp>
         <p:nvSpPr>
-          <p:cNvPr id="1880581282" name="Text 11"/>
+          <p:cNvPr id="849946234" name="Text 11"/>
           <p:cNvSpPr/>
           <p:nvPr/>
         </p:nvSpPr>
@@ -9437,7 +9448,7 @@
       </p:sp>
       <p:sp>
         <p:nvSpPr>
-          <p:cNvPr id="1853307077" name="Text 12"/>
+          <p:cNvPr id="1854792908" name="Text 12"/>
           <p:cNvSpPr/>
           <p:nvPr/>
         </p:nvSpPr>
@@ -9480,7 +9491,7 @@
       </p:sp>
       <p:sp>
         <p:nvSpPr>
-          <p:cNvPr id="1353953560" name="Shape 13"/>
+          <p:cNvPr id="201176764" name="Shape 13"/>
           <p:cNvSpPr/>
           <p:nvPr/>
         </p:nvSpPr>
@@ -9514,7 +9525,7 @@
       </p:sp>
       <p:sp>
         <p:nvSpPr>
-          <p:cNvPr id="486446540" name="Shape 14"/>
+          <p:cNvPr id="192342588" name="Shape 14"/>
           <p:cNvSpPr/>
           <p:nvPr/>
         </p:nvSpPr>
@@ -9534,7 +9545,7 @@
       </p:sp>
       <p:sp>
         <p:nvSpPr>
-          <p:cNvPr id="1225921224" name="Text 15"/>
+          <p:cNvPr id="736663125" name="Text 15"/>
           <p:cNvSpPr/>
           <p:nvPr/>
         </p:nvSpPr>
@@ -9574,7 +9585,7 @@
       </p:sp>
       <p:sp>
         <p:nvSpPr>
-          <p:cNvPr id="886082646" name="Text 16"/>
+          <p:cNvPr id="769779049" name="Text 16"/>
           <p:cNvSpPr/>
           <p:nvPr/>
         </p:nvSpPr>
@@ -9614,7 +9625,7 @@
       </p:sp>
       <p:sp>
         <p:nvSpPr>
-          <p:cNvPr id="562809363" name="Text 17"/>
+          <p:cNvPr id="1402069960" name="Text 17"/>
           <p:cNvSpPr/>
           <p:nvPr/>
         </p:nvSpPr>
@@ -9657,7 +9668,7 @@
       </p:sp>
       <p:sp>
         <p:nvSpPr>
-          <p:cNvPr id="1882899595" name="Shape 18"/>
+          <p:cNvPr id="1018307593" name="Shape 18"/>
           <p:cNvSpPr/>
           <p:nvPr/>
         </p:nvSpPr>
@@ -9691,7 +9702,7 @@
       </p:sp>
       <p:sp>
         <p:nvSpPr>
-          <p:cNvPr id="1177915176" name="Shape 19"/>
+          <p:cNvPr id="331067484" name="Shape 19"/>
           <p:cNvSpPr/>
           <p:nvPr/>
         </p:nvSpPr>
@@ -9711,7 +9722,7 @@
       </p:sp>
       <p:sp>
         <p:nvSpPr>
-          <p:cNvPr id="319946605" name="Text 20"/>
+          <p:cNvPr id="1177785006" name="Text 20"/>
           <p:cNvSpPr/>
           <p:nvPr/>
         </p:nvSpPr>
@@ -9751,7 +9762,7 @@
       </p:sp>
       <p:sp>
         <p:nvSpPr>
-          <p:cNvPr id="45088653" name="Text 21"/>
+          <p:cNvPr id="1236551911" name="Text 21"/>
           <p:cNvSpPr/>
           <p:nvPr/>
         </p:nvSpPr>
@@ -9791,7 +9802,7 @@
       </p:sp>
       <p:sp>
         <p:nvSpPr>
-          <p:cNvPr id="574466815" name="Text 22"/>
+          <p:cNvPr id="2031843755" name="Text 22"/>
           <p:cNvSpPr/>
           <p:nvPr/>
         </p:nvSpPr>
@@ -9834,7 +9845,7 @@
       </p:sp>
       <p:sp>
         <p:nvSpPr>
-          <p:cNvPr id="1932873099" name="Text 23"/>
+          <p:cNvPr id="688550088" name="Text 23"/>
           <p:cNvSpPr/>
           <p:nvPr/>
         </p:nvSpPr>
@@ -9874,7 +9885,7 @@
       </p:sp>
       <p:sp>
         <p:nvSpPr>
-          <p:cNvPr id="2104174534" name="Text 24"/>
+          <p:cNvPr id="1093287086" name="Text 24"/>
           <p:cNvSpPr/>
           <p:nvPr/>
         </p:nvSpPr>
@@ -9954,7 +9965,7 @@
       </p:grpSpPr>
       <p:sp>
         <p:nvSpPr>
-          <p:cNvPr id="215827514" name="Text 0"/>
+          <p:cNvPr id="655237575" name="Text 0"/>
           <p:cNvSpPr/>
           <p:nvPr/>
         </p:nvSpPr>
@@ -9994,7 +10005,7 @@
       </p:sp>
       <p:sp>
         <p:nvSpPr>
-          <p:cNvPr id="1546000561" name="Text 1"/>
+          <p:cNvPr id="1923573712" name="Text 1"/>
           <p:cNvSpPr/>
           <p:nvPr/>
         </p:nvSpPr>
@@ -10034,7 +10045,7 @@
       </p:sp>
       <p:sp>
         <p:nvSpPr>
-          <p:cNvPr id="1057823917" name="Shape 2"/>
+          <p:cNvPr id="1090109913" name="Shape 2"/>
           <p:cNvSpPr/>
           <p:nvPr/>
         </p:nvSpPr>
@@ -10063,7 +10074,7 @@
       </p:sp>
       <p:sp>
         <p:nvSpPr>
-          <p:cNvPr id="1224468098" name="Shape 3"/>
+          <p:cNvPr id="710376448" name="Shape 3"/>
           <p:cNvSpPr/>
           <p:nvPr/>
         </p:nvSpPr>
@@ -10083,7 +10094,7 @@
       </p:sp>
       <p:sp>
         <p:nvSpPr>
-          <p:cNvPr id="946538627" name="Shape 4"/>
+          <p:cNvPr id="968126390" name="Shape 4"/>
           <p:cNvSpPr/>
           <p:nvPr/>
         </p:nvSpPr>
@@ -10103,7 +10114,7 @@
       </p:sp>
       <p:sp>
         <p:nvSpPr>
-          <p:cNvPr id="491426494" name="Shape 5"/>
+          <p:cNvPr id="1371963245" name="Shape 5"/>
           <p:cNvSpPr/>
           <p:nvPr/>
         </p:nvSpPr>
@@ -10123,7 +10134,7 @@
       </p:sp>
       <p:sp>
         <p:nvSpPr>
-          <p:cNvPr id="473411571" name="Text 6"/>
+          <p:cNvPr id="238682655" name="Text 6"/>
           <p:cNvSpPr/>
           <p:nvPr/>
         </p:nvSpPr>
@@ -10163,7 +10174,7 @@
       </p:sp>
       <p:sp>
         <p:nvSpPr>
-          <p:cNvPr id="775727474" name="Text 7"/>
+          <p:cNvPr id="1812907766" name="Text 7"/>
           <p:cNvSpPr/>
           <p:nvPr/>
         </p:nvSpPr>
@@ -10501,7 +10512,7 @@
       </p:sp>
       <p:sp>
         <p:nvSpPr>
-          <p:cNvPr id="1748258848" name="Shape 8"/>
+          <p:cNvPr id="1460258778" name="Shape 8"/>
           <p:cNvSpPr/>
           <p:nvPr/>
         </p:nvSpPr>
@@ -10535,7 +10546,7 @@
       </p:sp>
       <p:sp>
         <p:nvSpPr>
-          <p:cNvPr id="28687245" name="Shape 9"/>
+          <p:cNvPr id="264030006" name="Shape 9"/>
           <p:cNvSpPr/>
           <p:nvPr/>
         </p:nvSpPr>
@@ -10555,7 +10566,7 @@
       </p:sp>
       <p:sp>
         <p:nvSpPr>
-          <p:cNvPr id="2019149551" name="Text 10"/>
+          <p:cNvPr id="1032473987" name="Text 10"/>
           <p:cNvSpPr/>
           <p:nvPr/>
         </p:nvSpPr>
@@ -10595,7 +10606,7 @@
       </p:sp>
       <p:sp>
         <p:nvSpPr>
-          <p:cNvPr id="1727415511" name="Text 11"/>
+          <p:cNvPr id="409468540" name="Text 11"/>
           <p:cNvSpPr/>
           <p:nvPr/>
         </p:nvSpPr>
@@ -10635,7 +10646,7 @@
       </p:sp>
       <p:sp>
         <p:nvSpPr>
-          <p:cNvPr id="1593172772" name="Text 12"/>
+          <p:cNvPr id="1324496440" name="Text 12"/>
           <p:cNvSpPr/>
           <p:nvPr/>
         </p:nvSpPr>
@@ -10678,7 +10689,7 @@
       </p:sp>
       <p:sp>
         <p:nvSpPr>
-          <p:cNvPr id="1028612412" name="Shape 13"/>
+          <p:cNvPr id="890804597" name="Shape 13"/>
           <p:cNvSpPr/>
           <p:nvPr/>
         </p:nvSpPr>
@@ -10712,7 +10723,7 @@
       </p:sp>
       <p:sp>
         <p:nvSpPr>
-          <p:cNvPr id="1167560777" name="Shape 14"/>
+          <p:cNvPr id="453394501" name="Shape 14"/>
           <p:cNvSpPr/>
           <p:nvPr/>
         </p:nvSpPr>
@@ -10732,7 +10743,7 @@
       </p:sp>
       <p:sp>
         <p:nvSpPr>
-          <p:cNvPr id="728541783" name="Text 15"/>
+          <p:cNvPr id="1665913089" name="Text 15"/>
           <p:cNvSpPr/>
           <p:nvPr/>
         </p:nvSpPr>
@@ -10772,7 +10783,7 @@
       </p:sp>
       <p:sp>
         <p:nvSpPr>
-          <p:cNvPr id="1244159423" name="Text 16"/>
+          <p:cNvPr id="1911869133" name="Text 16"/>
           <p:cNvSpPr/>
           <p:nvPr/>
         </p:nvSpPr>
@@ -10812,7 +10823,7 @@
       </p:sp>
       <p:sp>
         <p:nvSpPr>
-          <p:cNvPr id="928166459" name="Text 17"/>
+          <p:cNvPr id="1885848252" name="Text 17"/>
           <p:cNvSpPr/>
           <p:nvPr/>
         </p:nvSpPr>
@@ -10855,7 +10866,7 @@
       </p:sp>
       <p:sp>
         <p:nvSpPr>
-          <p:cNvPr id="1783375267" name="Shape 18"/>
+          <p:cNvPr id="1832395362" name="Shape 18"/>
           <p:cNvSpPr/>
           <p:nvPr/>
         </p:nvSpPr>
@@ -10889,7 +10900,7 @@
       </p:sp>
       <p:sp>
         <p:nvSpPr>
-          <p:cNvPr id="1103413337" name="Shape 19"/>
+          <p:cNvPr id="1884601787" name="Shape 19"/>
           <p:cNvSpPr/>
           <p:nvPr/>
         </p:nvSpPr>
@@ -10909,7 +10920,7 @@
       </p:sp>
       <p:sp>
         <p:nvSpPr>
-          <p:cNvPr id="1167831176" name="Text 20"/>
+          <p:cNvPr id="1027584641" name="Text 20"/>
           <p:cNvSpPr/>
           <p:nvPr/>
         </p:nvSpPr>
@@ -10949,7 +10960,7 @@
       </p:sp>
       <p:sp>
         <p:nvSpPr>
-          <p:cNvPr id="510889342" name="Text 21"/>
+          <p:cNvPr id="2146066854" name="Text 21"/>
           <p:cNvSpPr/>
           <p:nvPr/>
         </p:nvSpPr>
@@ -10989,7 +11000,7 @@
       </p:sp>
       <p:sp>
         <p:nvSpPr>
-          <p:cNvPr id="690926751" name="Text 22"/>
+          <p:cNvPr id="1543595808" name="Text 22"/>
           <p:cNvSpPr/>
           <p:nvPr/>
         </p:nvSpPr>
@@ -11032,7 +11043,7 @@
       </p:sp>
       <p:sp>
         <p:nvSpPr>
-          <p:cNvPr id="1493218000" name="Text 23"/>
+          <p:cNvPr id="242252251" name="Text 23"/>
           <p:cNvSpPr/>
           <p:nvPr/>
         </p:nvSpPr>
@@ -11072,7 +11083,7 @@
       </p:sp>
       <p:sp>
         <p:nvSpPr>
-          <p:cNvPr id="284616430" name="Text 24"/>
+          <p:cNvPr id="1410070761" name="Text 24"/>
           <p:cNvSpPr/>
           <p:nvPr/>
         </p:nvSpPr>
@@ -11152,7 +11163,7 @@
       </p:grpSpPr>
       <p:sp>
         <p:nvSpPr>
-          <p:cNvPr id="918110781" name="Text 0"/>
+          <p:cNvPr id="520501558" name="Text 0"/>
           <p:cNvSpPr/>
           <p:nvPr/>
         </p:nvSpPr>
@@ -11192,7 +11203,7 @@
       </p:sp>
       <p:sp>
         <p:nvSpPr>
-          <p:cNvPr id="553750394" name="Text 1"/>
+          <p:cNvPr id="1482736945" name="Text 1"/>
           <p:cNvSpPr/>
           <p:nvPr/>
         </p:nvSpPr>
@@ -11232,7 +11243,7 @@
       </p:sp>
       <p:sp>
         <p:nvSpPr>
-          <p:cNvPr id="870632082" name="Shape 2"/>
+          <p:cNvPr id="151361625" name="Shape 2"/>
           <p:cNvSpPr/>
           <p:nvPr/>
         </p:nvSpPr>
@@ -11266,7 +11277,7 @@
       </p:sp>
       <p:sp>
         <p:nvSpPr>
-          <p:cNvPr id="1438000264" name="Shape 3"/>
+          <p:cNvPr id="1032189539" name="Shape 3"/>
           <p:cNvSpPr/>
           <p:nvPr/>
         </p:nvSpPr>
@@ -11286,7 +11297,7 @@
       </p:sp>
       <p:pic>
         <p:nvPicPr>
-          <p:cNvPr id="245363567" name="Image 0" descr="preencoded.png"/>
+          <p:cNvPr id="1854974092" name="Image 0" descr="preencoded.png"/>
           <p:cNvPicPr>
             <a:picLocks noChangeAspect="1"/>
           </p:cNvPicPr>
@@ -11308,7 +11319,7 @@
       </p:pic>
       <p:sp>
         <p:nvSpPr>
-          <p:cNvPr id="424278824" name="Text 4"/>
+          <p:cNvPr id="1311583211" name="Text 4"/>
           <p:cNvSpPr/>
           <p:nvPr/>
         </p:nvSpPr>
@@ -11348,7 +11359,7 @@
       </p:sp>
       <p:sp>
         <p:nvSpPr>
-          <p:cNvPr id="224201102" name="Text 5"/>
+          <p:cNvPr id="1102924587" name="Text 5"/>
           <p:cNvSpPr/>
           <p:nvPr/>
         </p:nvSpPr>
@@ -11391,7 +11402,7 @@
       </p:sp>
       <p:sp>
         <p:nvSpPr>
-          <p:cNvPr id="1624811726" name="Shape 6"/>
+          <p:cNvPr id="1672152479" name="Shape 6"/>
           <p:cNvSpPr/>
           <p:nvPr/>
         </p:nvSpPr>
@@ -11425,7 +11436,7 @@
       </p:sp>
       <p:sp>
         <p:nvSpPr>
-          <p:cNvPr id="853378621" name="Shape 7"/>
+          <p:cNvPr id="1311858527" name="Shape 7"/>
           <p:cNvSpPr/>
           <p:nvPr/>
         </p:nvSpPr>
@@ -11445,7 +11456,7 @@
       </p:sp>
       <p:pic>
         <p:nvPicPr>
-          <p:cNvPr id="1127915850" name="Image 1" descr="preencoded.png"/>
+          <p:cNvPr id="568726234" name="Image 1" descr="preencoded.png"/>
           <p:cNvPicPr>
             <a:picLocks noChangeAspect="1"/>
           </p:cNvPicPr>
@@ -11467,7 +11478,7 @@
       </p:pic>
       <p:sp>
         <p:nvSpPr>
-          <p:cNvPr id="2038295400" name="Text 8"/>
+          <p:cNvPr id="1328706396" name="Text 8"/>
           <p:cNvSpPr/>
           <p:nvPr/>
         </p:nvSpPr>
@@ -11507,7 +11518,7 @@
       </p:sp>
       <p:sp>
         <p:nvSpPr>
-          <p:cNvPr id="1445592344" name="Text 9"/>
+          <p:cNvPr id="330366813" name="Text 9"/>
           <p:cNvSpPr/>
           <p:nvPr/>
         </p:nvSpPr>
@@ -11550,7 +11561,7 @@
       </p:sp>
       <p:sp>
         <p:nvSpPr>
-          <p:cNvPr id="940327665" name="Shape 10"/>
+          <p:cNvPr id="89413932" name="Shape 10"/>
           <p:cNvSpPr/>
           <p:nvPr/>
         </p:nvSpPr>
@@ -11584,7 +11595,7 @@
       </p:sp>
       <p:sp>
         <p:nvSpPr>
-          <p:cNvPr id="1009699481" name="Shape 11"/>
+          <p:cNvPr id="290049382" name="Shape 11"/>
           <p:cNvSpPr/>
           <p:nvPr/>
         </p:nvSpPr>
@@ -11604,7 +11615,7 @@
       </p:sp>
       <p:pic>
         <p:nvPicPr>
-          <p:cNvPr id="2072726064" name="Image 2" descr="preencoded.png"/>
+          <p:cNvPr id="191735915" name="Image 2" descr="preencoded.png"/>
           <p:cNvPicPr>
             <a:picLocks noChangeAspect="1"/>
           </p:cNvPicPr>
@@ -11626,7 +11637,7 @@
       </p:pic>
       <p:sp>
         <p:nvSpPr>
-          <p:cNvPr id="554611967" name="Text 12"/>
+          <p:cNvPr id="304328160" name="Text 12"/>
           <p:cNvSpPr/>
           <p:nvPr/>
         </p:nvSpPr>
@@ -11666,7 +11677,7 @@
       </p:sp>
       <p:sp>
         <p:nvSpPr>
-          <p:cNvPr id="1252788076" name="Text 13"/>
+          <p:cNvPr id="335650304" name="Text 13"/>
           <p:cNvSpPr/>
           <p:nvPr/>
         </p:nvSpPr>
@@ -11709,7 +11720,7 @@
       </p:sp>
       <p:sp>
         <p:nvSpPr>
-          <p:cNvPr id="2016110521" name="Shape 14"/>
+          <p:cNvPr id="1364348205" name="Shape 14"/>
           <p:cNvSpPr/>
           <p:nvPr/>
         </p:nvSpPr>
@@ -11743,7 +11754,7 @@
       </p:sp>
       <p:sp>
         <p:nvSpPr>
-          <p:cNvPr id="1706420092" name="Shape 15"/>
+          <p:cNvPr id="710932891" name="Shape 15"/>
           <p:cNvSpPr/>
           <p:nvPr/>
         </p:nvSpPr>
@@ -11763,7 +11774,7 @@
       </p:sp>
       <p:pic>
         <p:nvPicPr>
-          <p:cNvPr id="1350202733" name="Image 3" descr="preencoded.png"/>
+          <p:cNvPr id="1883637346" name="Image 3" descr="preencoded.png"/>
           <p:cNvPicPr>
             <a:picLocks noChangeAspect="1"/>
           </p:cNvPicPr>
@@ -11785,7 +11796,7 @@
       </p:pic>
       <p:sp>
         <p:nvSpPr>
-          <p:cNvPr id="892631147" name="Text 16"/>
+          <p:cNvPr id="220674129" name="Text 16"/>
           <p:cNvSpPr/>
           <p:nvPr/>
         </p:nvSpPr>
@@ -11825,7 +11836,7 @@
       </p:sp>
       <p:sp>
         <p:nvSpPr>
-          <p:cNvPr id="1028161531" name="Text 17"/>
+          <p:cNvPr id="1356605949" name="Text 17"/>
           <p:cNvSpPr/>
           <p:nvPr/>
         </p:nvSpPr>
@@ -11868,7 +11879,7 @@
       </p:sp>
       <p:sp>
         <p:nvSpPr>
-          <p:cNvPr id="349358104" name="Shape 18"/>
+          <p:cNvPr id="2090232015" name="Shape 18"/>
           <p:cNvSpPr/>
           <p:nvPr/>
         </p:nvSpPr>
@@ -11902,7 +11913,7 @@
       </p:sp>
       <p:sp>
         <p:nvSpPr>
-          <p:cNvPr id="1433341395" name="Shape 19"/>
+          <p:cNvPr id="85160066" name="Shape 19"/>
           <p:cNvSpPr/>
           <p:nvPr/>
         </p:nvSpPr>
@@ -11922,7 +11933,7 @@
       </p:sp>
       <p:pic>
         <p:nvPicPr>
-          <p:cNvPr id="881231299" name="Image 4" descr="preencoded.png"/>
+          <p:cNvPr id="333839291" name="Image 4" descr="preencoded.png"/>
           <p:cNvPicPr>
             <a:picLocks noChangeAspect="1"/>
           </p:cNvPicPr>
@@ -11944,7 +11955,7 @@
       </p:pic>
       <p:sp>
         <p:nvSpPr>
-          <p:cNvPr id="1732934193" name="Text 20"/>
+          <p:cNvPr id="1101665984" name="Text 20"/>
           <p:cNvSpPr/>
           <p:nvPr/>
         </p:nvSpPr>
@@ -11984,7 +11995,7 @@
       </p:sp>
       <p:sp>
         <p:nvSpPr>
-          <p:cNvPr id="1515964240" name="Text 21"/>
+          <p:cNvPr id="224873656" name="Text 21"/>
           <p:cNvSpPr/>
           <p:nvPr/>
         </p:nvSpPr>
@@ -12027,7 +12038,7 @@
       </p:sp>
       <p:sp>
         <p:nvSpPr>
-          <p:cNvPr id="63699842" name="Shape 22"/>
+          <p:cNvPr id="698828955" name="Shape 22"/>
           <p:cNvSpPr/>
           <p:nvPr/>
         </p:nvSpPr>
@@ -12061,7 +12072,7 @@
       </p:sp>
       <p:sp>
         <p:nvSpPr>
-          <p:cNvPr id="497182347" name="Shape 23"/>
+          <p:cNvPr id="356487807" name="Shape 23"/>
           <p:cNvSpPr/>
           <p:nvPr/>
         </p:nvSpPr>
@@ -12081,7 +12092,7 @@
       </p:sp>
       <p:pic>
         <p:nvPicPr>
-          <p:cNvPr id="777675328" name="Image 5" descr="preencoded.png"/>
+          <p:cNvPr id="1400478754" name="Image 5" descr="preencoded.png"/>
           <p:cNvPicPr>
             <a:picLocks noChangeAspect="1"/>
           </p:cNvPicPr>
@@ -12103,7 +12114,7 @@
       </p:pic>
       <p:sp>
         <p:nvSpPr>
-          <p:cNvPr id="1056394666" name="Text 24"/>
+          <p:cNvPr id="1204246884" name="Text 24"/>
           <p:cNvSpPr/>
           <p:nvPr/>
         </p:nvSpPr>
@@ -12143,7 +12154,7 @@
       </p:sp>
       <p:sp>
         <p:nvSpPr>
-          <p:cNvPr id="2124810580" name="Text 25"/>
+          <p:cNvPr id="481309509" name="Text 25"/>
           <p:cNvSpPr/>
           <p:nvPr/>
         </p:nvSpPr>
@@ -12186,7 +12197,7 @@
       </p:sp>
       <p:sp>
         <p:nvSpPr>
-          <p:cNvPr id="1907612414" name="Shape 26"/>
+          <p:cNvPr id="252378792" name="Shape 26"/>
           <p:cNvSpPr/>
           <p:nvPr/>
         </p:nvSpPr>
@@ -12220,7 +12231,7 @@
       </p:sp>
       <p:sp>
         <p:nvSpPr>
-          <p:cNvPr id="1637622506" name="Shape 27"/>
+          <p:cNvPr id="1079803233" name="Shape 27"/>
           <p:cNvSpPr/>
           <p:nvPr/>
         </p:nvSpPr>
@@ -12240,7 +12251,7 @@
       </p:sp>
       <p:pic>
         <p:nvPicPr>
-          <p:cNvPr id="141423340" name="Image 6" descr="preencoded.png"/>
+          <p:cNvPr id="886382558" name="Image 6" descr="preencoded.png"/>
           <p:cNvPicPr>
             <a:picLocks noChangeAspect="1"/>
           </p:cNvPicPr>
@@ -12262,7 +12273,7 @@
       </p:pic>
       <p:sp>
         <p:nvSpPr>
-          <p:cNvPr id="1564280713" name="Text 28"/>
+          <p:cNvPr id="223371595" name="Text 28"/>
           <p:cNvSpPr/>
           <p:nvPr/>
         </p:nvSpPr>
@@ -12302,7 +12313,7 @@
       </p:sp>
       <p:sp>
         <p:nvSpPr>
-          <p:cNvPr id="879725679" name="Text 29"/>
+          <p:cNvPr id="1192945110" name="Text 29"/>
           <p:cNvSpPr/>
           <p:nvPr/>
         </p:nvSpPr>
@@ -12345,7 +12356,7 @@
       </p:sp>
       <p:sp>
         <p:nvSpPr>
-          <p:cNvPr id="909641221" name="Shape 30"/>
+          <p:cNvPr id="1324504685" name="Shape 30"/>
           <p:cNvSpPr/>
           <p:nvPr/>
         </p:nvSpPr>
@@ -12379,7 +12390,7 @@
       </p:sp>
       <p:sp>
         <p:nvSpPr>
-          <p:cNvPr id="811331104" name="Shape 31"/>
+          <p:cNvPr id="713528896" name="Shape 31"/>
           <p:cNvSpPr/>
           <p:nvPr/>
         </p:nvSpPr>
@@ -12399,7 +12410,7 @@
       </p:sp>
       <p:pic>
         <p:nvPicPr>
-          <p:cNvPr id="1630660327" name="Image 7" descr="preencoded.png"/>
+          <p:cNvPr id="1705400893" name="Image 7" descr="preencoded.png"/>
           <p:cNvPicPr>
             <a:picLocks noChangeAspect="1"/>
           </p:cNvPicPr>
@@ -12421,7 +12432,7 @@
       </p:pic>
       <p:sp>
         <p:nvSpPr>
-          <p:cNvPr id="1567730381" name="Text 32"/>
+          <p:cNvPr id="1239755459" name="Text 32"/>
           <p:cNvSpPr/>
           <p:nvPr/>
         </p:nvSpPr>
@@ -12461,7 +12472,7 @@
       </p:sp>
       <p:sp>
         <p:nvSpPr>
-          <p:cNvPr id="747099299" name="Text 33"/>
+          <p:cNvPr id="1455318063" name="Text 33"/>
           <p:cNvSpPr/>
           <p:nvPr/>
         </p:nvSpPr>
@@ -12504,7 +12515,7 @@
       </p:sp>
       <p:sp>
         <p:nvSpPr>
-          <p:cNvPr id="1036120330" name="Shape 34"/>
+          <p:cNvPr id="1849844466" name="Shape 34"/>
           <p:cNvSpPr/>
           <p:nvPr/>
         </p:nvSpPr>
@@ -12538,7 +12549,7 @@
       </p:sp>
       <p:sp>
         <p:nvSpPr>
-          <p:cNvPr id="418857499" name="Shape 35"/>
+          <p:cNvPr id="59554752" name="Shape 35"/>
           <p:cNvSpPr/>
           <p:nvPr/>
         </p:nvSpPr>
@@ -12558,7 +12569,7 @@
       </p:sp>
       <p:pic>
         <p:nvPicPr>
-          <p:cNvPr id="69982283" name="Image 8" descr="preencoded.png"/>
+          <p:cNvPr id="590716492" name="Image 8" descr="preencoded.png"/>
           <p:cNvPicPr>
             <a:picLocks noChangeAspect="1"/>
           </p:cNvPicPr>
@@ -12580,7 +12591,7 @@
       </p:pic>
       <p:sp>
         <p:nvSpPr>
-          <p:cNvPr id="1996414833" name="Text 36"/>
+          <p:cNvPr id="823674008" name="Text 36"/>
           <p:cNvSpPr/>
           <p:nvPr/>
         </p:nvSpPr>
@@ -12620,7 +12631,7 @@
       </p:sp>
       <p:sp>
         <p:nvSpPr>
-          <p:cNvPr id="1885643852" name="Text 37"/>
+          <p:cNvPr id="1217917752" name="Text 37"/>
           <p:cNvSpPr/>
           <p:nvPr/>
         </p:nvSpPr>
@@ -12663,7 +12674,7 @@
       </p:sp>
       <p:sp>
         <p:nvSpPr>
-          <p:cNvPr id="600141153" name="Shape 38"/>
+          <p:cNvPr id="1436782294" name="Shape 38"/>
           <p:cNvSpPr/>
           <p:nvPr/>
         </p:nvSpPr>
@@ -12697,7 +12708,7 @@
       </p:sp>
       <p:sp>
         <p:nvSpPr>
-          <p:cNvPr id="1602003776" name="Shape 39"/>
+          <p:cNvPr id="326815841" name="Shape 39"/>
           <p:cNvSpPr/>
           <p:nvPr/>
         </p:nvSpPr>
@@ -12717,7 +12728,7 @@
       </p:sp>
       <p:pic>
         <p:nvPicPr>
-          <p:cNvPr id="1240670225" name="Image 9" descr="preencoded.png"/>
+          <p:cNvPr id="954056377" name="Image 9" descr="preencoded.png"/>
           <p:cNvPicPr>
             <a:picLocks noChangeAspect="1"/>
           </p:cNvPicPr>
@@ -12739,7 +12750,7 @@
       </p:pic>
       <p:sp>
         <p:nvSpPr>
-          <p:cNvPr id="1021512696" name="Text 40"/>
+          <p:cNvPr id="838743576" name="Text 40"/>
           <p:cNvSpPr/>
           <p:nvPr/>
         </p:nvSpPr>
@@ -12790,7 +12801,7 @@
       </p:sp>
       <p:sp>
         <p:nvSpPr>
-          <p:cNvPr id="1928692289" name="Text 41"/>
+          <p:cNvPr id="1122546762" name="Text 41"/>
           <p:cNvSpPr/>
           <p:nvPr/>
         </p:nvSpPr>
@@ -12830,7 +12841,7 @@
       </p:sp>
       <p:sp>
         <p:nvSpPr>
-          <p:cNvPr id="2099963604" name="Text 42"/>
+          <p:cNvPr id="1191760587" name="Text 42"/>
           <p:cNvSpPr/>
           <p:nvPr/>
         </p:nvSpPr>
@@ -12910,7 +12921,7 @@
       </p:grpSpPr>
       <p:sp>
         <p:nvSpPr>
-          <p:cNvPr id="1983067560" name="Text 0"/>
+          <p:cNvPr id="787594774" name="Text 0"/>
           <p:cNvSpPr/>
           <p:nvPr/>
         </p:nvSpPr>
@@ -12950,7 +12961,7 @@
       </p:sp>
       <p:sp>
         <p:nvSpPr>
-          <p:cNvPr id="2088505263" name="Text 1"/>
+          <p:cNvPr id="1762183105" name="Text 1"/>
           <p:cNvSpPr/>
           <p:nvPr/>
         </p:nvSpPr>
@@ -12990,7 +13001,7 @@
       </p:sp>
       <p:sp>
         <p:nvSpPr>
-          <p:cNvPr id="1585063298" name="Shape 2"/>
+          <p:cNvPr id="625877701" name="Shape 2"/>
           <p:cNvSpPr/>
           <p:nvPr/>
         </p:nvSpPr>
@@ -13024,7 +13035,7 @@
       </p:sp>
       <p:sp>
         <p:nvSpPr>
-          <p:cNvPr id="1344889745" name="Shape 3"/>
+          <p:cNvPr id="1973253914" name="Shape 3"/>
           <p:cNvSpPr/>
           <p:nvPr/>
         </p:nvSpPr>
@@ -13051,7 +13062,7 @@
       </p:sp>
       <p:pic>
         <p:nvPicPr>
-          <p:cNvPr id="1256139861" name="Image 0" descr="preencoded.png"/>
+          <p:cNvPr id="139117943" name="Image 0" descr="preencoded.png"/>
           <p:cNvPicPr>
             <a:picLocks noChangeAspect="1"/>
           </p:cNvPicPr>
@@ -13073,7 +13084,7 @@
       </p:pic>
       <p:sp>
         <p:nvSpPr>
-          <p:cNvPr id="1084597616" name="Text 4"/>
+          <p:cNvPr id="1842943764" name="Text 4"/>
           <p:cNvSpPr/>
           <p:nvPr/>
         </p:nvSpPr>
@@ -13113,7 +13124,7 @@
       </p:sp>
       <p:sp>
         <p:nvSpPr>
-          <p:cNvPr id="2048553735" name="Shape 5"/>
+          <p:cNvPr id="1258298685" name="Shape 5"/>
           <p:cNvSpPr/>
           <p:nvPr/>
         </p:nvSpPr>
@@ -13140,7 +13151,7 @@
       </p:sp>
       <p:sp>
         <p:nvSpPr>
-          <p:cNvPr id="1799745803" name="Text 6"/>
+          <p:cNvPr id="60429703" name="Text 6"/>
           <p:cNvSpPr/>
           <p:nvPr/>
         </p:nvSpPr>
@@ -13180,7 +13191,7 @@
       </p:sp>
       <p:sp>
         <p:nvSpPr>
-          <p:cNvPr id="1410124104" name="Shape 7"/>
+          <p:cNvPr id="942520650" name="Shape 7"/>
           <p:cNvSpPr/>
           <p:nvPr/>
         </p:nvSpPr>
@@ -13207,7 +13218,7 @@
       </p:sp>
       <p:sp>
         <p:nvSpPr>
-          <p:cNvPr id="171412822" name="Text 8"/>
+          <p:cNvPr id="631923206" name="Text 8"/>
           <p:cNvSpPr/>
           <p:nvPr/>
         </p:nvSpPr>
@@ -13247,7 +13258,7 @@
       </p:sp>
       <p:sp>
         <p:nvSpPr>
-          <p:cNvPr id="506865003" name="Shape 9"/>
+          <p:cNvPr id="1059456087" name="Shape 9"/>
           <p:cNvSpPr/>
           <p:nvPr/>
         </p:nvSpPr>
@@ -13274,7 +13285,7 @@
       </p:sp>
       <p:sp>
         <p:nvSpPr>
-          <p:cNvPr id="228475173" name="Text 10"/>
+          <p:cNvPr id="787688810" name="Text 10"/>
           <p:cNvSpPr/>
           <p:nvPr/>
         </p:nvSpPr>
@@ -13314,7 +13325,7 @@
       </p:sp>
       <p:sp>
         <p:nvSpPr>
-          <p:cNvPr id="1309127876" name="Shape 11"/>
+          <p:cNvPr id="1321746920" name="Shape 11"/>
           <p:cNvSpPr/>
           <p:nvPr/>
         </p:nvSpPr>
@@ -13341,7 +13352,7 @@
       </p:sp>
       <p:sp>
         <p:nvSpPr>
-          <p:cNvPr id="13488037" name="Text 12"/>
+          <p:cNvPr id="544266328" name="Text 12"/>
           <p:cNvSpPr/>
           <p:nvPr/>
         </p:nvSpPr>
@@ -13381,7 +13392,7 @@
       </p:sp>
       <p:sp>
         <p:nvSpPr>
-          <p:cNvPr id="2122654591" name="Shape 13"/>
+          <p:cNvPr id="2108973916" name="Shape 13"/>
           <p:cNvSpPr/>
           <p:nvPr/>
         </p:nvSpPr>
@@ -13408,7 +13419,7 @@
       </p:sp>
       <p:sp>
         <p:nvSpPr>
-          <p:cNvPr id="115806314" name="Text 14"/>
+          <p:cNvPr id="969915284" name="Text 14"/>
           <p:cNvSpPr/>
           <p:nvPr/>
         </p:nvSpPr>
@@ -13448,7 +13459,7 @@
       </p:sp>
       <p:sp>
         <p:nvSpPr>
-          <p:cNvPr id="435571642" name="Shape 15"/>
+          <p:cNvPr id="18302380" name="Shape 15"/>
           <p:cNvSpPr/>
           <p:nvPr/>
         </p:nvSpPr>
@@ -13475,7 +13486,7 @@
       </p:sp>
       <p:sp>
         <p:nvSpPr>
-          <p:cNvPr id="2036119731" name="Text 16"/>
+          <p:cNvPr id="1546097437" name="Text 16"/>
           <p:cNvSpPr/>
           <p:nvPr/>
         </p:nvSpPr>
@@ -13515,7 +13526,7 @@
       </p:sp>
       <p:sp>
         <p:nvSpPr>
-          <p:cNvPr id="1493652898" name="Shape 17"/>
+          <p:cNvPr id="2002418949" name="Shape 17"/>
           <p:cNvSpPr/>
           <p:nvPr/>
         </p:nvSpPr>
@@ -13542,7 +13553,7 @@
       </p:sp>
       <p:sp>
         <p:nvSpPr>
-          <p:cNvPr id="1111324688" name="Text 18"/>
+          <p:cNvPr id="202861338" name="Text 18"/>
           <p:cNvSpPr/>
           <p:nvPr/>
         </p:nvSpPr>
@@ -13582,7 +13593,7 @@
       </p:sp>
       <p:sp>
         <p:nvSpPr>
-          <p:cNvPr id="934194442" name="Shape 19"/>
+          <p:cNvPr id="1598279298" name="Shape 19"/>
           <p:cNvSpPr/>
           <p:nvPr/>
         </p:nvSpPr>
@@ -13616,7 +13627,7 @@
       </p:sp>
       <p:sp>
         <p:nvSpPr>
-          <p:cNvPr id="95944739" name="Shape 20"/>
+          <p:cNvPr id="934529363" name="Shape 20"/>
           <p:cNvSpPr/>
           <p:nvPr/>
         </p:nvSpPr>
@@ -13643,7 +13654,7 @@
       </p:sp>
       <p:pic>
         <p:nvPicPr>
-          <p:cNvPr id="707587423" name="Image 1" descr="preencoded.png"/>
+          <p:cNvPr id="1435249033" name="Image 1" descr="preencoded.png"/>
           <p:cNvPicPr>
             <a:picLocks noChangeAspect="1"/>
           </p:cNvPicPr>
@@ -13665,7 +13676,7 @@
       </p:pic>
       <p:sp>
         <p:nvSpPr>
-          <p:cNvPr id="718610101" name="Text 21"/>
+          <p:cNvPr id="426935737" name="Text 21"/>
           <p:cNvSpPr/>
           <p:nvPr/>
         </p:nvSpPr>
@@ -13705,7 +13716,7 @@
       </p:sp>
       <p:sp>
         <p:nvSpPr>
-          <p:cNvPr id="1062603483" name="Shape 22"/>
+          <p:cNvPr id="394542903" name="Shape 22"/>
           <p:cNvSpPr/>
           <p:nvPr/>
         </p:nvSpPr>
@@ -13732,7 +13743,7 @@
       </p:sp>
       <p:sp>
         <p:nvSpPr>
-          <p:cNvPr id="1483074115" name="Text 23"/>
+          <p:cNvPr id="124737269" name="Text 23"/>
           <p:cNvSpPr/>
           <p:nvPr/>
         </p:nvSpPr>
@@ -13772,7 +13783,7 @@
       </p:sp>
       <p:sp>
         <p:nvSpPr>
-          <p:cNvPr id="163320965" name="Shape 24"/>
+          <p:cNvPr id="294441745" name="Shape 24"/>
           <p:cNvSpPr/>
           <p:nvPr/>
         </p:nvSpPr>
@@ -13799,7 +13810,7 @@
       </p:sp>
       <p:sp>
         <p:nvSpPr>
-          <p:cNvPr id="1846399914" name="Text 25"/>
+          <p:cNvPr id="857321973" name="Text 25"/>
           <p:cNvSpPr/>
           <p:nvPr/>
         </p:nvSpPr>
@@ -13839,7 +13850,7 @@
       </p:sp>
       <p:sp>
         <p:nvSpPr>
-          <p:cNvPr id="273785432" name="Shape 26"/>
+          <p:cNvPr id="1367206175" name="Shape 26"/>
           <p:cNvSpPr/>
           <p:nvPr/>
         </p:nvSpPr>
@@ -13866,7 +13877,7 @@
       </p:sp>
       <p:sp>
         <p:nvSpPr>
-          <p:cNvPr id="464729863" name="Text 27"/>
+          <p:cNvPr id="1247476953" name="Text 27"/>
           <p:cNvSpPr/>
           <p:nvPr/>
         </p:nvSpPr>
@@ -13906,7 +13917,7 @@
       </p:sp>
       <p:sp>
         <p:nvSpPr>
-          <p:cNvPr id="1682457990" name="Shape 28"/>
+          <p:cNvPr id="446001540" name="Shape 28"/>
           <p:cNvSpPr/>
           <p:nvPr/>
         </p:nvSpPr>
@@ -13933,7 +13944,7 @@
       </p:sp>
       <p:sp>
         <p:nvSpPr>
-          <p:cNvPr id="872405088" name="Text 29"/>
+          <p:cNvPr id="1137102488" name="Text 29"/>
           <p:cNvSpPr/>
           <p:nvPr/>
         </p:nvSpPr>
@@ -13973,7 +13984,7 @@
       </p:sp>
       <p:sp>
         <p:nvSpPr>
-          <p:cNvPr id="30237424" name="Shape 30"/>
+          <p:cNvPr id="420776489" name="Shape 30"/>
           <p:cNvSpPr/>
           <p:nvPr/>
         </p:nvSpPr>
@@ -14007,7 +14018,7 @@
       </p:sp>
       <p:sp>
         <p:nvSpPr>
-          <p:cNvPr id="1646510633" name="Shape 31"/>
+          <p:cNvPr id="775405830" name="Shape 31"/>
           <p:cNvSpPr/>
           <p:nvPr/>
         </p:nvSpPr>
@@ -14034,7 +14045,7 @@
       </p:sp>
       <p:pic>
         <p:nvPicPr>
-          <p:cNvPr id="532486886" name="Image 2" descr="preencoded.png"/>
+          <p:cNvPr id="1790530747" name="Image 2" descr="preencoded.png"/>
           <p:cNvPicPr>
             <a:picLocks noChangeAspect="1"/>
           </p:cNvPicPr>
@@ -14056,7 +14067,7 @@
       </p:pic>
       <p:sp>
         <p:nvSpPr>
-          <p:cNvPr id="1921817867" name="Text 32"/>
+          <p:cNvPr id="1609322486" name="Text 32"/>
           <p:cNvSpPr/>
           <p:nvPr/>
         </p:nvSpPr>
@@ -14096,7 +14107,7 @@
       </p:sp>
       <p:sp>
         <p:nvSpPr>
-          <p:cNvPr id="784508758" name="Shape 33"/>
+          <p:cNvPr id="1610265453" name="Shape 33"/>
           <p:cNvSpPr/>
           <p:nvPr/>
         </p:nvSpPr>
@@ -14123,7 +14134,7 @@
       </p:sp>
       <p:sp>
         <p:nvSpPr>
-          <p:cNvPr id="371380612" name="Text 34"/>
+          <p:cNvPr id="72692920" name="Text 34"/>
           <p:cNvSpPr/>
           <p:nvPr/>
         </p:nvSpPr>
@@ -14163,7 +14174,7 @@
       </p:sp>
       <p:sp>
         <p:nvSpPr>
-          <p:cNvPr id="1575596039" name="Shape 35"/>
+          <p:cNvPr id="1768105832" name="Shape 35"/>
           <p:cNvSpPr/>
           <p:nvPr/>
         </p:nvSpPr>
@@ -14190,7 +14201,7 @@
       </p:sp>
       <p:sp>
         <p:nvSpPr>
-          <p:cNvPr id="1675689272" name="Text 36"/>
+          <p:cNvPr id="1538560157" name="Text 36"/>
           <p:cNvSpPr/>
           <p:nvPr/>
         </p:nvSpPr>
@@ -14230,7 +14241,7 @@
       </p:sp>
       <p:sp>
         <p:nvSpPr>
-          <p:cNvPr id="573869161" name="Shape 37"/>
+          <p:cNvPr id="1551210670" name="Shape 37"/>
           <p:cNvSpPr/>
           <p:nvPr/>
         </p:nvSpPr>
@@ -14257,7 +14268,7 @@
       </p:sp>
       <p:sp>
         <p:nvSpPr>
-          <p:cNvPr id="1387678760" name="Text 38"/>
+          <p:cNvPr id="383180547" name="Text 38"/>
           <p:cNvSpPr/>
           <p:nvPr/>
         </p:nvSpPr>
@@ -14297,7 +14308,7 @@
       </p:sp>
       <p:sp>
         <p:nvSpPr>
-          <p:cNvPr id="1102289550" name="Shape 39"/>
+          <p:cNvPr id="1792497961" name="Shape 39"/>
           <p:cNvSpPr/>
           <p:nvPr/>
         </p:nvSpPr>
@@ -14324,7 +14335,7 @@
       </p:sp>
       <p:sp>
         <p:nvSpPr>
-          <p:cNvPr id="1640391277" name="Text 40"/>
+          <p:cNvPr id="1496880537" name="Text 40"/>
           <p:cNvSpPr/>
           <p:nvPr/>
         </p:nvSpPr>
@@ -14364,7 +14375,7 @@
       </p:sp>
       <p:sp>
         <p:nvSpPr>
-          <p:cNvPr id="85535461" name="Shape 41"/>
+          <p:cNvPr id="1420494632" name="Shape 41"/>
           <p:cNvSpPr/>
           <p:nvPr/>
         </p:nvSpPr>
@@ -14391,7 +14402,7 @@
       </p:sp>
       <p:sp>
         <p:nvSpPr>
-          <p:cNvPr id="199663653" name="Text 42"/>
+          <p:cNvPr id="1467655529" name="Text 42"/>
           <p:cNvSpPr/>
           <p:nvPr/>
         </p:nvSpPr>
@@ -14431,7 +14442,7 @@
       </p:sp>
       <p:sp>
         <p:nvSpPr>
-          <p:cNvPr id="1199435009" name="Shape 43"/>
+          <p:cNvPr id="871023204" name="Shape 43"/>
           <p:cNvSpPr/>
           <p:nvPr/>
         </p:nvSpPr>
@@ -14458,7 +14469,7 @@
       </p:sp>
       <p:sp>
         <p:nvSpPr>
-          <p:cNvPr id="483491537" name="Shape 44"/>
+          <p:cNvPr id="230781848" name="Shape 44"/>
           <p:cNvSpPr/>
           <p:nvPr/>
         </p:nvSpPr>
@@ -14478,7 +14489,7 @@
       </p:sp>
       <p:pic>
         <p:nvPicPr>
-          <p:cNvPr id="384672404" name="Image 3" descr="preencoded.png"/>
+          <p:cNvPr id="1340081966" name="Image 3" descr="preencoded.png"/>
           <p:cNvPicPr>
             <a:picLocks noChangeAspect="1"/>
           </p:cNvPicPr>
@@ -14500,7 +14511,7 @@
       </p:pic>
       <p:sp>
         <p:nvSpPr>
-          <p:cNvPr id="30426514" name="Text 45"/>
+          <p:cNvPr id="688422291" name="Text 45"/>
           <p:cNvSpPr/>
           <p:nvPr/>
         </p:nvSpPr>
@@ -14554,7 +14565,7 @@
       </p:sp>
       <p:sp>
         <p:nvSpPr>
-          <p:cNvPr id="1366080261" name="Text 46"/>
+          <p:cNvPr id="1660009517" name="Text 46"/>
           <p:cNvSpPr/>
           <p:nvPr/>
         </p:nvSpPr>
@@ -14594,7 +14605,7 @@
       </p:sp>
       <p:sp>
         <p:nvSpPr>
-          <p:cNvPr id="2091281660" name="Text 47"/>
+          <p:cNvPr id="1159425399" name="Text 47"/>
           <p:cNvSpPr/>
           <p:nvPr/>
         </p:nvSpPr>
@@ -14674,7 +14685,7 @@
       </p:grpSpPr>
       <p:sp>
         <p:nvSpPr>
-          <p:cNvPr id="1226504323" name="Text 0"/>
+          <p:cNvPr id="298750444" name="Text 0"/>
           <p:cNvSpPr/>
           <p:nvPr/>
         </p:nvSpPr>
@@ -14714,7 +14725,7 @@
       </p:sp>
       <p:sp>
         <p:nvSpPr>
-          <p:cNvPr id="405583228" name="Text 1"/>
+          <p:cNvPr id="1029426620" name="Text 1"/>
           <p:cNvSpPr/>
           <p:nvPr/>
         </p:nvSpPr>
@@ -14754,7 +14765,7 @@
       </p:sp>
       <p:sp>
         <p:nvSpPr>
-          <p:cNvPr id="2122834562" name="Text 2"/>
+          <p:cNvPr id="1310854394" name="Text 2"/>
           <p:cNvSpPr/>
           <p:nvPr/>
         </p:nvSpPr>
@@ -14794,7 +14805,7 @@
       </p:sp>
       <p:sp>
         <p:nvSpPr>
-          <p:cNvPr id="2095231113" name="Shape 3"/>
+          <p:cNvPr id="777282777" name="Shape 3"/>
           <p:cNvSpPr/>
           <p:nvPr/>
         </p:nvSpPr>
@@ -14828,7 +14839,7 @@
       </p:sp>
       <p:sp>
         <p:nvSpPr>
-          <p:cNvPr id="576795203" name="Shape 4"/>
+          <p:cNvPr id="540924277" name="Shape 4"/>
           <p:cNvSpPr/>
           <p:nvPr/>
         </p:nvSpPr>
@@ -14855,7 +14866,7 @@
       </p:sp>
       <p:sp>
         <p:nvSpPr>
-          <p:cNvPr id="1463814373" name="Text 5"/>
+          <p:cNvPr id="2111870506" name="Text 5"/>
           <p:cNvSpPr/>
           <p:nvPr/>
         </p:nvSpPr>
@@ -14895,7 +14906,7 @@
       </p:sp>
       <p:sp>
         <p:nvSpPr>
-          <p:cNvPr id="2145241412" name="Text 6"/>
+          <p:cNvPr id="788551924" name="Text 6"/>
           <p:cNvSpPr/>
           <p:nvPr/>
         </p:nvSpPr>
@@ -14938,7 +14949,7 @@
       </p:sp>
       <p:sp>
         <p:nvSpPr>
-          <p:cNvPr id="1707183577" name="Text 7"/>
+          <p:cNvPr id="1776105029" name="Text 7"/>
           <p:cNvSpPr/>
           <p:nvPr/>
         </p:nvSpPr>
@@ -15048,7 +15059,7 @@
       </p:sp>
       <p:sp>
         <p:nvSpPr>
-          <p:cNvPr id="1177570071" name="Shape 8"/>
+          <p:cNvPr id="408534253" name="Shape 8"/>
           <p:cNvSpPr/>
           <p:nvPr/>
         </p:nvSpPr>
@@ -15072,13 +15083,13 @@
       </p:sp>
       <p:sp>
         <p:nvSpPr>
-          <p:cNvPr id="453790789" name="Shape 9"/>
-          <p:cNvSpPr/>
-          <p:nvPr/>
-        </p:nvSpPr>
-        <p:spPr bwMode="auto">
-          <a:xfrm>
-            <a:off x="2564864" y="2148840"/>
+          <p:cNvPr id="1196142702" name="Shape 9"/>
+          <p:cNvSpPr/>
+          <p:nvPr/>
+        </p:nvSpPr>
+        <p:spPr bwMode="auto">
+          <a:xfrm>
+            <a:off x="2564863" y="2148840"/>
             <a:ext cx="2148840" cy="3840480"/>
           </a:xfrm>
           <a:prstGeom prst="roundRect">
@@ -15106,7 +15117,7 @@
       </p:sp>
       <p:sp>
         <p:nvSpPr>
-          <p:cNvPr id="1596867100" name="Shape 10"/>
+          <p:cNvPr id="878217525" name="Shape 10"/>
           <p:cNvSpPr/>
           <p:nvPr/>
         </p:nvSpPr>
@@ -15133,7 +15144,7 @@
       </p:sp>
       <p:sp>
         <p:nvSpPr>
-          <p:cNvPr id="497507529" name="Text 11"/>
+          <p:cNvPr id="952327170" name="Text 11"/>
           <p:cNvSpPr/>
           <p:nvPr/>
         </p:nvSpPr>
@@ -15173,7 +15184,7 @@
       </p:sp>
       <p:sp>
         <p:nvSpPr>
-          <p:cNvPr id="1088316149" name="Text 12"/>
+          <p:cNvPr id="1219947923" name="Text 12"/>
           <p:cNvSpPr/>
           <p:nvPr/>
         </p:nvSpPr>
@@ -15216,7 +15227,7 @@
       </p:sp>
       <p:sp>
         <p:nvSpPr>
-          <p:cNvPr id="1411385679" name="Text 13"/>
+          <p:cNvPr id="1865755742" name="Text 13"/>
           <p:cNvSpPr/>
           <p:nvPr/>
         </p:nvSpPr>
@@ -15326,13 +15337,13 @@
       </p:sp>
       <p:sp>
         <p:nvSpPr>
-          <p:cNvPr id="918641691" name="Shape 14"/>
-          <p:cNvSpPr/>
-          <p:nvPr/>
-        </p:nvSpPr>
-        <p:spPr bwMode="auto">
-          <a:xfrm>
-            <a:off x="4731992" y="2788920"/>
+          <p:cNvPr id="117194099" name="Shape 14"/>
+          <p:cNvSpPr/>
+          <p:nvPr/>
+        </p:nvSpPr>
+        <p:spPr bwMode="auto">
+          <a:xfrm>
+            <a:off x="4731991" y="2788920"/>
             <a:ext cx="237744" cy="0"/>
           </a:xfrm>
           <a:prstGeom prst="line">
@@ -15350,7 +15361,7 @@
       </p:sp>
       <p:sp>
         <p:nvSpPr>
-          <p:cNvPr id="1688011764" name="Shape 15"/>
+          <p:cNvPr id="1526336953" name="Shape 15"/>
           <p:cNvSpPr/>
           <p:nvPr/>
         </p:nvSpPr>
@@ -15384,7 +15395,7 @@
       </p:sp>
       <p:sp>
         <p:nvSpPr>
-          <p:cNvPr id="1999904999" name="Shape 16"/>
+          <p:cNvPr id="860074268" name="Shape 16"/>
           <p:cNvSpPr/>
           <p:nvPr/>
         </p:nvSpPr>
@@ -15411,7 +15422,7 @@
       </p:sp>
       <p:sp>
         <p:nvSpPr>
-          <p:cNvPr id="1383903625" name="Text 17"/>
+          <p:cNvPr id="977656844" name="Text 17"/>
           <p:cNvSpPr/>
           <p:nvPr/>
         </p:nvSpPr>
@@ -15451,7 +15462,7 @@
       </p:sp>
       <p:sp>
         <p:nvSpPr>
-          <p:cNvPr id="945024630" name="Text 18"/>
+          <p:cNvPr id="1881617358" name="Text 18"/>
           <p:cNvSpPr/>
           <p:nvPr/>
         </p:nvSpPr>
@@ -15494,7 +15505,7 @@
       </p:sp>
       <p:sp>
         <p:nvSpPr>
-          <p:cNvPr id="1116068326" name="Text 19"/>
+          <p:cNvPr id="1617905544" name="Text 19"/>
           <p:cNvSpPr/>
           <p:nvPr/>
         </p:nvSpPr>
@@ -15604,7 +15615,7 @@
       </p:sp>
       <p:sp>
         <p:nvSpPr>
-          <p:cNvPr id="783566691" name="Shape 20"/>
+          <p:cNvPr id="2114749439" name="Shape 20"/>
           <p:cNvSpPr/>
           <p:nvPr/>
         </p:nvSpPr>
@@ -15628,7 +15639,7 @@
       </p:sp>
       <p:sp>
         <p:nvSpPr>
-          <p:cNvPr id="236196093" name="Shape 21"/>
+          <p:cNvPr id="2100341236" name="Shape 21"/>
           <p:cNvSpPr/>
           <p:nvPr/>
         </p:nvSpPr>
@@ -15662,7 +15673,7 @@
       </p:sp>
       <p:sp>
         <p:nvSpPr>
-          <p:cNvPr id="1672789755" name="Shape 22"/>
+          <p:cNvPr id="1211151046" name="Shape 22"/>
           <p:cNvSpPr/>
           <p:nvPr/>
         </p:nvSpPr>
@@ -15689,7 +15700,7 @@
       </p:sp>
       <p:sp>
         <p:nvSpPr>
-          <p:cNvPr id="1613716283" name="Text 23"/>
+          <p:cNvPr id="1262592765" name="Text 23"/>
           <p:cNvSpPr/>
           <p:nvPr/>
         </p:nvSpPr>
@@ -15729,7 +15740,7 @@
       </p:sp>
       <p:sp>
         <p:nvSpPr>
-          <p:cNvPr id="1914565026" name="Text 24"/>
+          <p:cNvPr id="1897453941" name="Text 24"/>
           <p:cNvSpPr/>
           <p:nvPr/>
         </p:nvSpPr>
@@ -15772,7 +15783,7 @@
       </p:sp>
       <p:sp>
         <p:nvSpPr>
-          <p:cNvPr id="969125297" name="Text 25"/>
+          <p:cNvPr id="819357757" name="Text 25"/>
           <p:cNvSpPr/>
           <p:nvPr/>
         </p:nvSpPr>
@@ -15882,7 +15893,7 @@
       </p:sp>
       <p:sp>
         <p:nvSpPr>
-          <p:cNvPr id="89895701" name="Shape 26"/>
+          <p:cNvPr id="621711512" name="Shape 26"/>
           <p:cNvSpPr/>
           <p:nvPr/>
         </p:nvSpPr>
@@ -15906,7 +15917,7 @@
       </p:sp>
       <p:sp>
         <p:nvSpPr>
-          <p:cNvPr id="1501446938" name="Shape 27"/>
+          <p:cNvPr id="1668225606" name="Shape 27"/>
           <p:cNvSpPr/>
           <p:nvPr/>
         </p:nvSpPr>
@@ -15940,7 +15951,7 @@
       </p:sp>
       <p:sp>
         <p:nvSpPr>
-          <p:cNvPr id="1017990630" name="Shape 28"/>
+          <p:cNvPr id="1266223667" name="Shape 28"/>
           <p:cNvSpPr/>
           <p:nvPr/>
         </p:nvSpPr>
@@ -15967,7 +15978,7 @@
       </p:sp>
       <p:sp>
         <p:nvSpPr>
-          <p:cNvPr id="1586341583" name="Text 29"/>
+          <p:cNvPr id="3219001" name="Text 29"/>
           <p:cNvSpPr/>
           <p:nvPr/>
         </p:nvSpPr>
@@ -16007,7 +16018,7 @@
       </p:sp>
       <p:sp>
         <p:nvSpPr>
-          <p:cNvPr id="828208927" name="Text 30"/>
+          <p:cNvPr id="399514124" name="Text 30"/>
           <p:cNvSpPr/>
           <p:nvPr/>
         </p:nvSpPr>
@@ -16050,7 +16061,7 @@
       </p:sp>
       <p:sp>
         <p:nvSpPr>
-          <p:cNvPr id="74899807" name="Text 31"/>
+          <p:cNvPr id="1967158809" name="Text 31"/>
           <p:cNvSpPr/>
           <p:nvPr/>
         </p:nvSpPr>
@@ -16160,7 +16171,7 @@
       </p:sp>
       <p:sp>
         <p:nvSpPr>
-          <p:cNvPr id="591426308" name="Text 32"/>
+          <p:cNvPr id="2041680749" name="Text 32"/>
           <p:cNvSpPr/>
           <p:nvPr/>
         </p:nvSpPr>
@@ -16200,7 +16211,7 @@
       </p:sp>
       <p:sp>
         <p:nvSpPr>
-          <p:cNvPr id="798431499" name="Text 33"/>
+          <p:cNvPr id="434910696" name="Text 33"/>
           <p:cNvSpPr/>
           <p:nvPr/>
         </p:nvSpPr>
@@ -16280,7 +16291,7 @@
       </p:grpSpPr>
       <p:sp>
         <p:nvSpPr>
-          <p:cNvPr id="1927841159" name="Text 0"/>
+          <p:cNvPr id="1455612565" name="Text 0"/>
           <p:cNvSpPr/>
           <p:nvPr/>
         </p:nvSpPr>
@@ -16320,7 +16331,7 @@
       </p:sp>
       <p:sp>
         <p:nvSpPr>
-          <p:cNvPr id="2041712140" name="Text 1"/>
+          <p:cNvPr id="1211647224" name="Text 1"/>
           <p:cNvSpPr/>
           <p:nvPr/>
         </p:nvSpPr>
@@ -16360,7 +16371,7 @@
       </p:sp>
       <p:sp>
         <p:nvSpPr>
-          <p:cNvPr id="1874931983" name="Shape 2"/>
+          <p:cNvPr id="1029488662" name="Shape 2"/>
           <p:cNvSpPr/>
           <p:nvPr/>
         </p:nvSpPr>
@@ -16394,7 +16405,7 @@
       </p:sp>
       <p:sp>
         <p:nvSpPr>
-          <p:cNvPr id="358337396" name="Shape 3"/>
+          <p:cNvPr id="1813329217" name="Shape 3"/>
           <p:cNvSpPr/>
           <p:nvPr/>
         </p:nvSpPr>
@@ -16414,7 +16425,7 @@
       </p:sp>
       <p:pic>
         <p:nvPicPr>
-          <p:cNvPr id="126046477" name="Image 0" descr="preencoded.png"/>
+          <p:cNvPr id="1083955087" name="Image 0" descr="preencoded.png"/>
           <p:cNvPicPr>
             <a:picLocks noChangeAspect="1"/>
           </p:cNvPicPr>
@@ -16436,7 +16447,7 @@
       </p:pic>
       <p:sp>
         <p:nvSpPr>
-          <p:cNvPr id="410259384" name="Text 4"/>
+          <p:cNvPr id="265205297" name="Text 4"/>
           <p:cNvSpPr/>
           <p:nvPr/>
         </p:nvSpPr>
@@ -16479,7 +16490,7 @@
       </p:sp>
       <p:sp>
         <p:nvSpPr>
-          <p:cNvPr id="767064870" name="Shape 5"/>
+          <p:cNvPr id="1400919436" name="Shape 5"/>
           <p:cNvSpPr/>
           <p:nvPr/>
         </p:nvSpPr>
@@ -16499,7 +16510,7 @@
       </p:sp>
       <p:pic>
         <p:nvPicPr>
-          <p:cNvPr id="1733702204" name="Image 1" descr="preencoded.png"/>
+          <p:cNvPr id="603388732" name="Image 1" descr="preencoded.png"/>
           <p:cNvPicPr>
             <a:picLocks noChangeAspect="1"/>
           </p:cNvPicPr>
@@ -16521,7 +16532,7 @@
       </p:pic>
       <p:sp>
         <p:nvSpPr>
-          <p:cNvPr id="1787683558" name="Text 6"/>
+          <p:cNvPr id="179134795" name="Text 6"/>
           <p:cNvSpPr/>
           <p:nvPr/>
         </p:nvSpPr>
@@ -16564,7 +16575,7 @@
       </p:sp>
       <p:sp>
         <p:nvSpPr>
-          <p:cNvPr id="946799853" name="Shape 7"/>
+          <p:cNvPr id="1889037727" name="Shape 7"/>
           <p:cNvSpPr/>
           <p:nvPr/>
         </p:nvSpPr>
@@ -16598,7 +16609,7 @@
       </p:sp>
       <p:sp>
         <p:nvSpPr>
-          <p:cNvPr id="109667088" name="Shape 8"/>
+          <p:cNvPr id="1712088727" name="Shape 8"/>
           <p:cNvSpPr/>
           <p:nvPr/>
         </p:nvSpPr>
@@ -16618,7 +16629,7 @@
       </p:sp>
       <p:pic>
         <p:nvPicPr>
-          <p:cNvPr id="1803479381" name="Image 2" descr="preencoded.png"/>
+          <p:cNvPr id="474701542" name="Image 2" descr="preencoded.png"/>
           <p:cNvPicPr>
             <a:picLocks noChangeAspect="1"/>
           </p:cNvPicPr>
@@ -16640,7 +16651,7 @@
       </p:pic>
       <p:sp>
         <p:nvSpPr>
-          <p:cNvPr id="80617765" name="Text 9"/>
+          <p:cNvPr id="1796130178" name="Text 9"/>
           <p:cNvSpPr/>
           <p:nvPr/>
         </p:nvSpPr>
@@ -16683,7 +16694,7 @@
       </p:sp>
       <p:sp>
         <p:nvSpPr>
-          <p:cNvPr id="261094976" name="Shape 10"/>
+          <p:cNvPr id="795355724" name="Shape 10"/>
           <p:cNvSpPr/>
           <p:nvPr/>
         </p:nvSpPr>
@@ -16703,7 +16714,7 @@
       </p:sp>
       <p:pic>
         <p:nvPicPr>
-          <p:cNvPr id="1170247135" name="Image 3" descr="preencoded.png"/>
+          <p:cNvPr id="17257819" name="Image 3" descr="preencoded.png"/>
           <p:cNvPicPr>
             <a:picLocks noChangeAspect="1"/>
           </p:cNvPicPr>
@@ -16725,7 +16736,7 @@
       </p:pic>
       <p:sp>
         <p:nvSpPr>
-          <p:cNvPr id="1189995376" name="Text 11"/>
+          <p:cNvPr id="639020340" name="Text 11"/>
           <p:cNvSpPr/>
           <p:nvPr/>
         </p:nvSpPr>
@@ -16768,7 +16779,7 @@
       </p:sp>
       <p:sp>
         <p:nvSpPr>
-          <p:cNvPr id="607750111" name="Shape 12"/>
+          <p:cNvPr id="985070091" name="Shape 12"/>
           <p:cNvSpPr/>
           <p:nvPr/>
         </p:nvSpPr>
@@ -16802,7 +16813,7 @@
       </p:sp>
       <p:sp>
         <p:nvSpPr>
-          <p:cNvPr id="1108874723" name="Shape 13"/>
+          <p:cNvPr id="1994639345" name="Shape 13"/>
           <p:cNvSpPr/>
           <p:nvPr/>
         </p:nvSpPr>
@@ -16822,7 +16833,7 @@
       </p:sp>
       <p:pic>
         <p:nvPicPr>
-          <p:cNvPr id="1757589892" name="Image 4" descr="preencoded.png"/>
+          <p:cNvPr id="1170731207" name="Image 4" descr="preencoded.png"/>
           <p:cNvPicPr>
             <a:picLocks noChangeAspect="1"/>
           </p:cNvPicPr>
@@ -16844,7 +16855,7 @@
       </p:pic>
       <p:sp>
         <p:nvSpPr>
-          <p:cNvPr id="1234102570" name="Text 14"/>
+          <p:cNvPr id="1725392901" name="Text 14"/>
           <p:cNvSpPr/>
           <p:nvPr/>
         </p:nvSpPr>
@@ -16887,7 +16898,7 @@
       </p:sp>
       <p:sp>
         <p:nvSpPr>
-          <p:cNvPr id="1162758764" name="Shape 15"/>
+          <p:cNvPr id="783789760" name="Shape 15"/>
           <p:cNvSpPr/>
           <p:nvPr/>
         </p:nvSpPr>
@@ -16907,7 +16918,7 @@
       </p:sp>
       <p:pic>
         <p:nvPicPr>
-          <p:cNvPr id="670487217" name="Image 5" descr="preencoded.png"/>
+          <p:cNvPr id="2106878629" name="Image 5" descr="preencoded.png"/>
           <p:cNvPicPr>
             <a:picLocks noChangeAspect="1"/>
           </p:cNvPicPr>
@@ -16929,7 +16940,7 @@
       </p:pic>
       <p:sp>
         <p:nvSpPr>
-          <p:cNvPr id="848279719" name="Text 16"/>
+          <p:cNvPr id="1089166085" name="Text 16"/>
           <p:cNvSpPr/>
           <p:nvPr/>
         </p:nvSpPr>
@@ -16972,7 +16983,7 @@
       </p:sp>
       <p:sp>
         <p:nvSpPr>
-          <p:cNvPr id="2125893584" name="Shape 17"/>
+          <p:cNvPr id="1713353475" name="Shape 17"/>
           <p:cNvSpPr/>
           <p:nvPr/>
         </p:nvSpPr>
@@ -17006,7 +17017,7 @@
       </p:sp>
       <p:sp>
         <p:nvSpPr>
-          <p:cNvPr id="1666254618" name="Shape 18"/>
+          <p:cNvPr id="1231176071" name="Shape 18"/>
           <p:cNvSpPr/>
           <p:nvPr/>
         </p:nvSpPr>
@@ -17026,7 +17037,7 @@
       </p:sp>
       <p:pic>
         <p:nvPicPr>
-          <p:cNvPr id="165504165" name="Image 6" descr="preencoded.png"/>
+          <p:cNvPr id="1557794537" name="Image 6" descr="preencoded.png"/>
           <p:cNvPicPr>
             <a:picLocks noChangeAspect="1"/>
           </p:cNvPicPr>
@@ -17048,7 +17059,7 @@
       </p:pic>
       <p:sp>
         <p:nvSpPr>
-          <p:cNvPr id="1858691923" name="Text 19"/>
+          <p:cNvPr id="1186975141" name="Text 19"/>
           <p:cNvSpPr/>
           <p:nvPr/>
         </p:nvSpPr>
@@ -17091,7 +17102,7 @@
       </p:sp>
       <p:sp>
         <p:nvSpPr>
-          <p:cNvPr id="1553201826" name="Shape 20"/>
+          <p:cNvPr id="333335873" name="Shape 20"/>
           <p:cNvSpPr/>
           <p:nvPr/>
         </p:nvSpPr>
@@ -17111,7 +17122,7 @@
       </p:sp>
       <p:pic>
         <p:nvPicPr>
-          <p:cNvPr id="3662661" name="Image 7" descr="preencoded.png"/>
+          <p:cNvPr id="649436590" name="Image 7" descr="preencoded.png"/>
           <p:cNvPicPr>
             <a:picLocks noChangeAspect="1"/>
           </p:cNvPicPr>
@@ -17133,7 +17144,7 @@
       </p:pic>
       <p:sp>
         <p:nvSpPr>
-          <p:cNvPr id="1953035658" name="Text 21"/>
+          <p:cNvPr id="1440793452" name="Text 21"/>
           <p:cNvSpPr/>
           <p:nvPr/>
         </p:nvSpPr>
@@ -17176,7 +17187,7 @@
       </p:sp>
       <p:sp>
         <p:nvSpPr>
-          <p:cNvPr id="326291086" name="Shape 22"/>
+          <p:cNvPr id="1155845220" name="Shape 22"/>
           <p:cNvSpPr/>
           <p:nvPr/>
         </p:nvSpPr>
@@ -17210,7 +17221,7 @@
       </p:sp>
       <p:sp>
         <p:nvSpPr>
-          <p:cNvPr id="1827020918" name="Shape 23"/>
+          <p:cNvPr id="202106025" name="Shape 23"/>
           <p:cNvSpPr/>
           <p:nvPr/>
         </p:nvSpPr>
@@ -17230,7 +17241,7 @@
       </p:sp>
       <p:pic>
         <p:nvPicPr>
-          <p:cNvPr id="1554902390" name="Image 8" descr="preencoded.png"/>
+          <p:cNvPr id="118205671" name="Image 8" descr="preencoded.png"/>
           <p:cNvPicPr>
             <a:picLocks noChangeAspect="1"/>
           </p:cNvPicPr>
@@ -17252,7 +17263,7 @@
       </p:pic>
       <p:sp>
         <p:nvSpPr>
-          <p:cNvPr id="842292818" name="Text 24"/>
+          <p:cNvPr id="1581557852" name="Text 24"/>
           <p:cNvSpPr/>
           <p:nvPr/>
         </p:nvSpPr>
@@ -17295,7 +17306,7 @@
       </p:sp>
       <p:sp>
         <p:nvSpPr>
-          <p:cNvPr id="1660498130" name="Shape 25"/>
+          <p:cNvPr id="1811912299" name="Shape 25"/>
           <p:cNvSpPr/>
           <p:nvPr/>
         </p:nvSpPr>
@@ -17315,7 +17326,7 @@
       </p:sp>
       <p:pic>
         <p:nvPicPr>
-          <p:cNvPr id="279536162" name="Image 9" descr="preencoded.png"/>
+          <p:cNvPr id="799778307" name="Image 9" descr="preencoded.png"/>
           <p:cNvPicPr>
             <a:picLocks noChangeAspect="1"/>
           </p:cNvPicPr>
@@ -17337,7 +17348,7 @@
       </p:pic>
       <p:sp>
         <p:nvSpPr>
-          <p:cNvPr id="101768511" name="Text 26"/>
+          <p:cNvPr id="383302081" name="Text 26"/>
           <p:cNvSpPr/>
           <p:nvPr/>
         </p:nvSpPr>
@@ -17380,7 +17391,7 @@
       </p:sp>
       <p:sp>
         <p:nvSpPr>
-          <p:cNvPr id="214601806" name="Shape 27"/>
+          <p:cNvPr id="2028755523" name="Shape 27"/>
           <p:cNvSpPr/>
           <p:nvPr/>
         </p:nvSpPr>
@@ -17414,7 +17425,7 @@
       </p:sp>
       <p:sp>
         <p:nvSpPr>
-          <p:cNvPr id="226037371" name="Shape 28"/>
+          <p:cNvPr id="1295877382" name="Shape 28"/>
           <p:cNvSpPr/>
           <p:nvPr/>
         </p:nvSpPr>
@@ -17434,7 +17445,7 @@
       </p:sp>
       <p:pic>
         <p:nvPicPr>
-          <p:cNvPr id="707733108" name="Image 10" descr="preencoded.png"/>
+          <p:cNvPr id="90984099" name="Image 10" descr="preencoded.png"/>
           <p:cNvPicPr>
             <a:picLocks noChangeAspect="1"/>
           </p:cNvPicPr>
@@ -17456,7 +17467,7 @@
       </p:pic>
       <p:sp>
         <p:nvSpPr>
-          <p:cNvPr id="1960948224" name="Text 29"/>
+          <p:cNvPr id="1498979984" name="Text 29"/>
           <p:cNvSpPr/>
           <p:nvPr/>
         </p:nvSpPr>
@@ -17499,7 +17510,7 @@
       </p:sp>
       <p:sp>
         <p:nvSpPr>
-          <p:cNvPr id="1559991227" name="Shape 30"/>
+          <p:cNvPr id="1336402897" name="Shape 30"/>
           <p:cNvSpPr/>
           <p:nvPr/>
         </p:nvSpPr>
@@ -17519,7 +17530,7 @@
       </p:sp>
       <p:pic>
         <p:nvPicPr>
-          <p:cNvPr id="1197244891" name="Image 11" descr="preencoded.png"/>
+          <p:cNvPr id="2078327974" name="Image 11" descr="preencoded.png"/>
           <p:cNvPicPr>
             <a:picLocks noChangeAspect="1"/>
           </p:cNvPicPr>
@@ -17541,7 +17552,7 @@
       </p:pic>
       <p:sp>
         <p:nvSpPr>
-          <p:cNvPr id="86180593" name="Text 31"/>
+          <p:cNvPr id="1937828266" name="Text 31"/>
           <p:cNvSpPr/>
           <p:nvPr/>
         </p:nvSpPr>
@@ -17584,7 +17595,7 @@
       </p:sp>
       <p:sp>
         <p:nvSpPr>
-          <p:cNvPr id="640632458" name="Text 32"/>
+          <p:cNvPr id="2141024276" name="Text 32"/>
           <p:cNvSpPr/>
           <p:nvPr/>
         </p:nvSpPr>
@@ -17624,7 +17635,7 @@
       </p:sp>
       <p:sp>
         <p:nvSpPr>
-          <p:cNvPr id="765340764" name="Text 33"/>
+          <p:cNvPr id="272738305" name="Text 33"/>
           <p:cNvSpPr/>
           <p:nvPr/>
         </p:nvSpPr>
@@ -17659,6 +17670,38 @@
               <a:t>19</a:t>
             </a:r>
             <a:endParaRPr lang="en-US" sz="900"/>
+          </a:p>
+        </p:txBody>
+      </p:sp>
+      <p:sp>
+        <p:nvSpPr>
+          <p:cNvPr id="1507383301" name=""/>
+          <p:cNvSpPr txBox="1"/>
+          <p:nvPr/>
+        </p:nvSpPr>
+        <p:spPr bwMode="auto">
+          <a:xfrm rot="0" flipH="0" flipV="0">
+            <a:off x="5901087" y="3246120"/>
+            <a:ext cx="389824" cy="365759"/>
+          </a:xfrm>
+          <a:prstGeom prst="rect">
+            <a:avLst/>
+          </a:prstGeom>
+          <a:noFill/>
+        </p:spPr>
+        <p:txBody>
+          <a:bodyPr vertOverflow="overflow" horzOverflow="overflow" vert="horz" wrap="square" lIns="91440" tIns="45720" rIns="91440" bIns="45720" numCol="1" spcCol="0" rtlCol="0" fromWordArt="0" anchor="t" anchorCtr="0" forceAA="0" upright="0" compatLnSpc="0">
+            <a:spAutoFit/>
+          </a:bodyPr>
+          <a:p>
+            <a:pPr algn="l">
+              <a:defRPr/>
+            </a:pPr>
+            <a:r>
+              <a:rPr/>
+              <a:t>→</a:t>
+            </a:r>
+            <a:endParaRPr/>
           </a:p>
         </p:txBody>
       </p:sp>
@@ -17704,7 +17747,7 @@
       </p:grpSpPr>
       <p:sp>
         <p:nvSpPr>
-          <p:cNvPr id="2014417417" name="Text 0"/>
+          <p:cNvPr id="305651118" name="Text 0"/>
           <p:cNvSpPr/>
           <p:nvPr/>
         </p:nvSpPr>
@@ -17744,7 +17787,7 @@
       </p:sp>
       <p:sp>
         <p:nvSpPr>
-          <p:cNvPr id="1430556546" name="Text 1"/>
+          <p:cNvPr id="437864802" name="Text 1"/>
           <p:cNvSpPr/>
           <p:nvPr/>
         </p:nvSpPr>
@@ -17784,7 +17827,7 @@
       </p:sp>
       <p:sp>
         <p:nvSpPr>
-          <p:cNvPr id="861627894" name="Text 2"/>
+          <p:cNvPr id="875413503" name="Text 2"/>
           <p:cNvSpPr/>
           <p:nvPr/>
         </p:nvSpPr>
@@ -17827,7 +17870,7 @@
       </p:sp>
       <p:sp>
         <p:nvSpPr>
-          <p:cNvPr id="1498460530" name="Shape 3"/>
+          <p:cNvPr id="1602907878" name="Shape 3"/>
           <p:cNvSpPr/>
           <p:nvPr/>
         </p:nvSpPr>
@@ -17861,7 +17904,7 @@
       </p:sp>
       <p:sp>
         <p:nvSpPr>
-          <p:cNvPr id="1325461095" name="Shape 4"/>
+          <p:cNvPr id="1699073266" name="Shape 4"/>
           <p:cNvSpPr/>
           <p:nvPr/>
         </p:nvSpPr>
@@ -17888,7 +17931,7 @@
       </p:sp>
       <p:pic>
         <p:nvPicPr>
-          <p:cNvPr id="728340726" name="Image 0" descr="preencoded.png"/>
+          <p:cNvPr id="1495808891" name="Image 0" descr="preencoded.png"/>
           <p:cNvPicPr>
             <a:picLocks noChangeAspect="1"/>
           </p:cNvPicPr>
@@ -17910,7 +17953,7 @@
       </p:pic>
       <p:sp>
         <p:nvSpPr>
-          <p:cNvPr id="1425547429" name="Text 5"/>
+          <p:cNvPr id="833649968" name="Text 5"/>
           <p:cNvSpPr/>
           <p:nvPr/>
         </p:nvSpPr>
@@ -17950,7 +17993,7 @@
       </p:sp>
       <p:sp>
         <p:nvSpPr>
-          <p:cNvPr id="614025180" name="Text 6"/>
+          <p:cNvPr id="569313235" name="Text 6"/>
           <p:cNvSpPr/>
           <p:nvPr/>
         </p:nvSpPr>
@@ -17993,7 +18036,7 @@
       </p:sp>
       <p:sp>
         <p:nvSpPr>
-          <p:cNvPr id="220806172" name="Shape 7"/>
+          <p:cNvPr id="1627811814" name="Shape 7"/>
           <p:cNvSpPr/>
           <p:nvPr/>
         </p:nvSpPr>
@@ -18027,7 +18070,7 @@
       </p:sp>
       <p:sp>
         <p:nvSpPr>
-          <p:cNvPr id="765385134" name="Shape 8"/>
+          <p:cNvPr id="1793626386" name="Shape 8"/>
           <p:cNvSpPr/>
           <p:nvPr/>
         </p:nvSpPr>
@@ -18054,7 +18097,7 @@
       </p:sp>
       <p:pic>
         <p:nvPicPr>
-          <p:cNvPr id="89481809" name="Image 1" descr="preencoded.png"/>
+          <p:cNvPr id="981435828" name="Image 1" descr="preencoded.png"/>
           <p:cNvPicPr>
             <a:picLocks noChangeAspect="1"/>
           </p:cNvPicPr>
@@ -18076,7 +18119,7 @@
       </p:pic>
       <p:sp>
         <p:nvSpPr>
-          <p:cNvPr id="758048221" name="Text 9"/>
+          <p:cNvPr id="584409620" name="Text 9"/>
           <p:cNvSpPr/>
           <p:nvPr/>
         </p:nvSpPr>
@@ -18116,7 +18159,7 @@
       </p:sp>
       <p:sp>
         <p:nvSpPr>
-          <p:cNvPr id="471834029" name="Text 10"/>
+          <p:cNvPr id="1839189469" name="Text 10"/>
           <p:cNvSpPr/>
           <p:nvPr/>
         </p:nvSpPr>
@@ -18159,7 +18202,7 @@
       </p:sp>
       <p:sp>
         <p:nvSpPr>
-          <p:cNvPr id="2126318806" name="Shape 11"/>
+          <p:cNvPr id="95178699" name="Shape 11"/>
           <p:cNvSpPr/>
           <p:nvPr/>
         </p:nvSpPr>
@@ -18193,7 +18236,7 @@
       </p:sp>
       <p:sp>
         <p:nvSpPr>
-          <p:cNvPr id="810510159" name="Shape 12"/>
+          <p:cNvPr id="2027353406" name="Shape 12"/>
           <p:cNvSpPr/>
           <p:nvPr/>
         </p:nvSpPr>
@@ -18213,7 +18256,7 @@
       </p:sp>
       <p:pic>
         <p:nvPicPr>
-          <p:cNvPr id="231267830" name="Image 2" descr="preencoded.png"/>
+          <p:cNvPr id="593615433" name="Image 2" descr="preencoded.png"/>
           <p:cNvPicPr>
             <a:picLocks noChangeAspect="1"/>
           </p:cNvPicPr>
@@ -18235,7 +18278,7 @@
       </p:pic>
       <p:sp>
         <p:nvSpPr>
-          <p:cNvPr id="172186231" name="Text 13"/>
+          <p:cNvPr id="2036548427" name="Text 13"/>
           <p:cNvSpPr/>
           <p:nvPr/>
         </p:nvSpPr>
@@ -18309,7 +18352,7 @@
       </p:sp>
       <p:sp>
         <p:nvSpPr>
-          <p:cNvPr id="320413265" name="Text 14"/>
+          <p:cNvPr id="572651568" name="Text 14"/>
           <p:cNvSpPr/>
           <p:nvPr/>
         </p:nvSpPr>
@@ -18349,7 +18392,7 @@
       </p:sp>
       <p:sp>
         <p:nvSpPr>
-          <p:cNvPr id="35498431" name="Text 15"/>
+          <p:cNvPr id="735982888" name="Text 15"/>
           <p:cNvSpPr/>
           <p:nvPr/>
         </p:nvSpPr>
@@ -18429,7 +18472,7 @@
       </p:grpSpPr>
       <p:sp>
         <p:nvSpPr>
-          <p:cNvPr id="996582918" name="Text 0"/>
+          <p:cNvPr id="131074047" name="Text 0"/>
           <p:cNvSpPr/>
           <p:nvPr/>
         </p:nvSpPr>
@@ -18469,7 +18512,7 @@
       </p:sp>
       <p:sp>
         <p:nvSpPr>
-          <p:cNvPr id="1973262494" name="Text 1"/>
+          <p:cNvPr id="542842296" name="Text 1"/>
           <p:cNvSpPr/>
           <p:nvPr/>
         </p:nvSpPr>
@@ -18509,7 +18552,7 @@
       </p:sp>
       <p:sp>
         <p:nvSpPr>
-          <p:cNvPr id="122432973" name="Shape 2"/>
+          <p:cNvPr id="59084006" name="Shape 2"/>
           <p:cNvSpPr/>
           <p:nvPr/>
         </p:nvSpPr>
@@ -18543,7 +18586,7 @@
       </p:sp>
       <p:sp>
         <p:nvSpPr>
-          <p:cNvPr id="2008466049" name="Shape 3"/>
+          <p:cNvPr id="478139746" name="Shape 3"/>
           <p:cNvSpPr/>
           <p:nvPr/>
         </p:nvSpPr>
@@ -18570,7 +18613,7 @@
       </p:sp>
       <p:pic>
         <p:nvPicPr>
-          <p:cNvPr id="374491577" name="Image 0" descr="preencoded.png"/>
+          <p:cNvPr id="1790119091" name="Image 0" descr="preencoded.png"/>
           <p:cNvPicPr>
             <a:picLocks noChangeAspect="1"/>
           </p:cNvPicPr>
@@ -18592,7 +18635,7 @@
       </p:pic>
       <p:sp>
         <p:nvSpPr>
-          <p:cNvPr id="2088138543" name="Text 4"/>
+          <p:cNvPr id="755603702" name="Text 4"/>
           <p:cNvSpPr/>
           <p:nvPr/>
         </p:nvSpPr>
@@ -18635,7 +18678,7 @@
       </p:sp>
       <p:sp>
         <p:nvSpPr>
-          <p:cNvPr id="795043252" name="Text 5"/>
+          <p:cNvPr id="540462684" name="Text 5"/>
           <p:cNvSpPr/>
           <p:nvPr/>
         </p:nvSpPr>
@@ -18678,7 +18721,7 @@
       </p:sp>
       <p:sp>
         <p:nvSpPr>
-          <p:cNvPr id="1619301897" name="Shape 6"/>
+          <p:cNvPr id="749365321" name="Shape 6"/>
           <p:cNvSpPr/>
           <p:nvPr/>
         </p:nvSpPr>
@@ -18712,7 +18755,7 @@
       </p:sp>
       <p:sp>
         <p:nvSpPr>
-          <p:cNvPr id="2107651773" name="Shape 7"/>
+          <p:cNvPr id="1386452531" name="Shape 7"/>
           <p:cNvSpPr/>
           <p:nvPr/>
         </p:nvSpPr>
@@ -18739,7 +18782,7 @@
       </p:sp>
       <p:pic>
         <p:nvPicPr>
-          <p:cNvPr id="1631719088" name="Image 1" descr="preencoded.png"/>
+          <p:cNvPr id="712348619" name="Image 1" descr="preencoded.png"/>
           <p:cNvPicPr>
             <a:picLocks noChangeAspect="1"/>
           </p:cNvPicPr>
@@ -18761,7 +18804,7 @@
       </p:pic>
       <p:sp>
         <p:nvSpPr>
-          <p:cNvPr id="2097342794" name="Text 8"/>
+          <p:cNvPr id="487240730" name="Text 8"/>
           <p:cNvSpPr/>
           <p:nvPr/>
         </p:nvSpPr>
@@ -18804,7 +18847,7 @@
       </p:sp>
       <p:sp>
         <p:nvSpPr>
-          <p:cNvPr id="336572739" name="Text 9"/>
+          <p:cNvPr id="1122497349" name="Text 9"/>
           <p:cNvSpPr/>
           <p:nvPr/>
         </p:nvSpPr>
@@ -18847,7 +18890,7 @@
       </p:sp>
       <p:sp>
         <p:nvSpPr>
-          <p:cNvPr id="1153342831" name="Shape 10"/>
+          <p:cNvPr id="739022913" name="Shape 10"/>
           <p:cNvSpPr/>
           <p:nvPr/>
         </p:nvSpPr>
@@ -18881,7 +18924,7 @@
       </p:sp>
       <p:sp>
         <p:nvSpPr>
-          <p:cNvPr id="2013718766" name="Shape 11"/>
+          <p:cNvPr id="98206992" name="Shape 11"/>
           <p:cNvSpPr/>
           <p:nvPr/>
         </p:nvSpPr>
@@ -18908,7 +18951,7 @@
       </p:sp>
       <p:pic>
         <p:nvPicPr>
-          <p:cNvPr id="1940732973" name="Image 2" descr="preencoded.png"/>
+          <p:cNvPr id="44281652" name="Image 2" descr="preencoded.png"/>
           <p:cNvPicPr>
             <a:picLocks noChangeAspect="1"/>
           </p:cNvPicPr>
@@ -18930,7 +18973,7 @@
       </p:pic>
       <p:sp>
         <p:nvSpPr>
-          <p:cNvPr id="1122687692" name="Text 12"/>
+          <p:cNvPr id="62389753" name="Text 12"/>
           <p:cNvSpPr/>
           <p:nvPr/>
         </p:nvSpPr>
@@ -18973,7 +19016,7 @@
       </p:sp>
       <p:sp>
         <p:nvSpPr>
-          <p:cNvPr id="141621042" name="Text 13"/>
+          <p:cNvPr id="1377569108" name="Text 13"/>
           <p:cNvSpPr/>
           <p:nvPr/>
         </p:nvSpPr>
@@ -19016,7 +19059,7 @@
       </p:sp>
       <p:sp>
         <p:nvSpPr>
-          <p:cNvPr id="1414359386" name="Shape 14"/>
+          <p:cNvPr id="1112719689" name="Shape 14"/>
           <p:cNvSpPr/>
           <p:nvPr/>
         </p:nvSpPr>
@@ -19050,7 +19093,7 @@
       </p:sp>
       <p:sp>
         <p:nvSpPr>
-          <p:cNvPr id="1385410832" name="Shape 15"/>
+          <p:cNvPr id="1178651328" name="Shape 15"/>
           <p:cNvSpPr/>
           <p:nvPr/>
         </p:nvSpPr>
@@ -19070,7 +19113,7 @@
       </p:sp>
       <p:pic>
         <p:nvPicPr>
-          <p:cNvPr id="2143534735" name="Image 3" descr="preencoded.png"/>
+          <p:cNvPr id="1857322814" name="Image 3" descr="preencoded.png"/>
           <p:cNvPicPr>
             <a:picLocks noChangeAspect="1"/>
           </p:cNvPicPr>
@@ -19092,7 +19135,7 @@
       </p:pic>
       <p:sp>
         <p:nvSpPr>
-          <p:cNvPr id="705692058" name="Text 16"/>
+          <p:cNvPr id="1742341559" name="Text 16"/>
           <p:cNvSpPr/>
           <p:nvPr/>
         </p:nvSpPr>
@@ -19166,7 +19209,7 @@
       </p:sp>
       <p:sp>
         <p:nvSpPr>
-          <p:cNvPr id="1465182305" name="Text 17"/>
+          <p:cNvPr id="492536531" name="Text 17"/>
           <p:cNvSpPr/>
           <p:nvPr/>
         </p:nvSpPr>
@@ -19206,7 +19249,7 @@
       </p:sp>
       <p:sp>
         <p:nvSpPr>
-          <p:cNvPr id="1150777509" name="Text 18"/>
+          <p:cNvPr id="1108109155" name="Text 18"/>
           <p:cNvSpPr/>
           <p:nvPr/>
         </p:nvSpPr>
@@ -19286,7 +19329,7 @@
       </p:grpSpPr>
       <p:sp>
         <p:nvSpPr>
-          <p:cNvPr id="761462761" name="Text 0"/>
+          <p:cNvPr id="1485298139" name="Text 0"/>
           <p:cNvSpPr/>
           <p:nvPr/>
         </p:nvSpPr>
@@ -19326,7 +19369,7 @@
       </p:sp>
       <p:sp>
         <p:nvSpPr>
-          <p:cNvPr id="1641391019" name="Text 1"/>
+          <p:cNvPr id="734663143" name="Text 1"/>
           <p:cNvSpPr/>
           <p:nvPr/>
         </p:nvSpPr>
@@ -19366,7 +19409,7 @@
       </p:sp>
       <p:sp>
         <p:nvSpPr>
-          <p:cNvPr id="1116789200" name="Shape 2"/>
+          <p:cNvPr id="1766255082" name="Shape 2"/>
           <p:cNvSpPr/>
           <p:nvPr/>
         </p:nvSpPr>
@@ -19400,7 +19443,7 @@
       </p:sp>
       <p:sp>
         <p:nvSpPr>
-          <p:cNvPr id="744105304" name="Shape 3"/>
+          <p:cNvPr id="1919358528" name="Shape 3"/>
           <p:cNvSpPr/>
           <p:nvPr/>
         </p:nvSpPr>
@@ -19427,7 +19470,7 @@
       </p:sp>
       <p:pic>
         <p:nvPicPr>
-          <p:cNvPr id="1489438421" name="Image 0" descr="preencoded.png"/>
+          <p:cNvPr id="1902022083" name="Image 0" descr="preencoded.png"/>
           <p:cNvPicPr>
             <a:picLocks noChangeAspect="1"/>
           </p:cNvPicPr>
@@ -19449,7 +19492,7 @@
       </p:pic>
       <p:sp>
         <p:nvSpPr>
-          <p:cNvPr id="1858928770" name="Text 4"/>
+          <p:cNvPr id="1841904099" name="Text 4"/>
           <p:cNvSpPr/>
           <p:nvPr/>
         </p:nvSpPr>
@@ -19489,7 +19532,7 @@
       </p:sp>
       <p:sp>
         <p:nvSpPr>
-          <p:cNvPr id="1180451184" name="Shape 5"/>
+          <p:cNvPr id="1299334260" name="Shape 5"/>
           <p:cNvSpPr/>
           <p:nvPr/>
         </p:nvSpPr>
@@ -19512,7 +19555,7 @@
       </p:sp>
       <p:sp>
         <p:nvSpPr>
-          <p:cNvPr id="1703583545" name="Text 6"/>
+          <p:cNvPr id="1310230117" name="Text 6"/>
           <p:cNvSpPr/>
           <p:nvPr/>
         </p:nvSpPr>
@@ -19601,7 +19644,40 @@
                 <a:ea typeface="Calibri"/>
                 <a:cs typeface="Calibri"/>
               </a:rPr>
-              <a:t>KI lokal → datenschutzfreundlich &amp; ohne Kosten</a:t>
+              <a:t>KI</a:t>
+            </a:r>
+            <a:r>
+              <a:rPr lang="de-DE" sz="1200">
+                <a:solidFill>
+                  <a:srgbClr val="5A6B82"/>
+                </a:solidFill>
+                <a:latin typeface="Calibri"/>
+                <a:ea typeface="Calibri"/>
+                <a:cs typeface="Calibri"/>
+              </a:rPr>
+              <a:t> leistungsstark </a:t>
+            </a:r>
+            <a:r>
+              <a:rPr lang="en-US" sz="1200" b="0" i="0" u="none" strike="noStrike" cap="none" spc="0">
+                <a:solidFill>
+                  <a:srgbClr val="5A6B82"/>
+                </a:solidFill>
+                <a:latin typeface="Calibri"/>
+                <a:ea typeface="Calibri"/>
+                <a:cs typeface="Calibri"/>
+              </a:rPr>
+              <a:t>→</a:t>
+            </a:r>
+            <a:r>
+              <a:rPr lang="de-DE" sz="1200">
+                <a:solidFill>
+                  <a:srgbClr val="5A6B82"/>
+                </a:solidFill>
+                <a:latin typeface="Calibri"/>
+                <a:ea typeface="Calibri"/>
+                <a:cs typeface="Calibri"/>
+              </a:rPr>
+              <a:t> Schnelle Ergebnisse</a:t>
             </a:r>
             <a:endParaRPr lang="en-US" sz="1200"/>
           </a:p>
@@ -19628,13 +19704,24 @@
               </a:rPr>
               <a:t>Kompletter Weg live: Tablet → Mail + DB → Verwaltung</a:t>
             </a:r>
+            <a:r>
+              <a:rPr lang="de-DE" sz="1200">
+                <a:solidFill>
+                  <a:srgbClr val="5A6B82"/>
+                </a:solidFill>
+                <a:latin typeface="Calibri"/>
+                <a:ea typeface="Calibri"/>
+                <a:cs typeface="Calibri"/>
+              </a:rPr>
+              <a:t> </a:t>
+            </a:r>
             <a:endParaRPr lang="en-US" sz="1200"/>
           </a:p>
         </p:txBody>
       </p:sp>
       <p:sp>
         <p:nvSpPr>
-          <p:cNvPr id="1078181772" name="Shape 7"/>
+          <p:cNvPr id="1053329716" name="Shape 7"/>
           <p:cNvSpPr/>
           <p:nvPr/>
         </p:nvSpPr>
@@ -19668,7 +19755,7 @@
       </p:sp>
       <p:sp>
         <p:nvSpPr>
-          <p:cNvPr id="1003697606" name="Shape 8"/>
+          <p:cNvPr id="1482252524" name="Shape 8"/>
           <p:cNvSpPr/>
           <p:nvPr/>
         </p:nvSpPr>
@@ -19695,7 +19782,7 @@
       </p:sp>
       <p:pic>
         <p:nvPicPr>
-          <p:cNvPr id="179436723" name="Image 1" descr="preencoded.png"/>
+          <p:cNvPr id="1205553929" name="Image 1" descr="preencoded.png"/>
           <p:cNvPicPr>
             <a:picLocks noChangeAspect="1"/>
           </p:cNvPicPr>
@@ -19717,7 +19804,7 @@
       </p:pic>
       <p:sp>
         <p:nvSpPr>
-          <p:cNvPr id="1841254252" name="Text 9"/>
+          <p:cNvPr id="872232423" name="Text 9"/>
           <p:cNvSpPr/>
           <p:nvPr/>
         </p:nvSpPr>
@@ -19757,7 +19844,7 @@
       </p:sp>
       <p:sp>
         <p:nvSpPr>
-          <p:cNvPr id="1224898057" name="Shape 10"/>
+          <p:cNvPr id="69627218" name="Shape 10"/>
           <p:cNvSpPr/>
           <p:nvPr/>
         </p:nvSpPr>
@@ -19780,7 +19867,7 @@
       </p:sp>
       <p:sp>
         <p:nvSpPr>
-          <p:cNvPr id="1449634705" name="Text 11"/>
+          <p:cNvPr id="1258815349" name="Text 11"/>
           <p:cNvSpPr/>
           <p:nvPr/>
         </p:nvSpPr>
@@ -19902,7 +19989,7 @@
       </p:sp>
       <p:sp>
         <p:nvSpPr>
-          <p:cNvPr id="788820649" name="Shape 12"/>
+          <p:cNvPr id="1890093842" name="Shape 12"/>
           <p:cNvSpPr/>
           <p:nvPr/>
         </p:nvSpPr>
@@ -19936,7 +20023,7 @@
       </p:sp>
       <p:sp>
         <p:nvSpPr>
-          <p:cNvPr id="1338679362" name="Shape 13"/>
+          <p:cNvPr id="93093791" name="Shape 13"/>
           <p:cNvSpPr/>
           <p:nvPr/>
         </p:nvSpPr>
@@ -19963,7 +20050,7 @@
       </p:sp>
       <p:pic>
         <p:nvPicPr>
-          <p:cNvPr id="67810973" name="Image 2" descr="preencoded.png"/>
+          <p:cNvPr id="1821524444" name="Image 2" descr="preencoded.png"/>
           <p:cNvPicPr>
             <a:picLocks noChangeAspect="1"/>
           </p:cNvPicPr>
@@ -19985,7 +20072,7 @@
       </p:pic>
       <p:sp>
         <p:nvSpPr>
-          <p:cNvPr id="1639123312" name="Text 14"/>
+          <p:cNvPr id="930021198" name="Text 14"/>
           <p:cNvSpPr/>
           <p:nvPr/>
         </p:nvSpPr>
@@ -20025,7 +20112,7 @@
       </p:sp>
       <p:sp>
         <p:nvSpPr>
-          <p:cNvPr id="562285703" name="Shape 15"/>
+          <p:cNvPr id="502066234" name="Shape 15"/>
           <p:cNvSpPr/>
           <p:nvPr/>
         </p:nvSpPr>
@@ -20048,7 +20135,7 @@
       </p:sp>
       <p:sp>
         <p:nvSpPr>
-          <p:cNvPr id="370026620" name="Text 16"/>
+          <p:cNvPr id="890839068" name="Text 16"/>
           <p:cNvSpPr/>
           <p:nvPr/>
         </p:nvSpPr>
@@ -20137,40 +20224,15 @@
                 <a:ea typeface="Calibri"/>
                 <a:cs typeface="Calibri"/>
               </a:rPr>
-              <a:t>Ethik gehört in den Code, nicht nur in die Doku</a:t>
+              <a:t>Auth-Accounts über Studio/API, nicht per SQL</a:t>
             </a:r>
             <a:endParaRPr lang="en-US" sz="1200"/>
           </a:p>
-          <a:p>
-            <a:pPr marL="177800" indent="-177800">
-              <a:lnSpc>
-                <a:spcPct val="103000"/>
-              </a:lnSpc>
-              <a:spcAft>
-                <a:spcPts val="900"/>
-              </a:spcAft>
-              <a:buSzPct val="100000"/>
-              <a:buChar char="•"/>
-              <a:defRPr/>
-            </a:pPr>
-            <a:r>
-              <a:rPr lang="en-US" sz="1200">
-                <a:solidFill>
-                  <a:srgbClr val="5A6B82"/>
-                </a:solidFill>
-                <a:latin typeface="Calibri"/>
-                <a:ea typeface="Calibri"/>
-                <a:cs typeface="Calibri"/>
-              </a:rPr>
-              <a:t>Auth-Accounts über Studio/API, nicht per SQL</a:t>
-            </a:r>
-            <a:endParaRPr lang="en-US" sz="1200"/>
-          </a:p>
-        </p:txBody>
-      </p:sp>
-      <p:sp>
-        <p:nvSpPr>
-          <p:cNvPr id="37970623" name="Text 17"/>
+        </p:txBody>
+      </p:sp>
+      <p:sp>
+        <p:nvSpPr>
+          <p:cNvPr id="1606167544" name="Text 17"/>
           <p:cNvSpPr/>
           <p:nvPr/>
         </p:nvSpPr>
@@ -20210,7 +20272,7 @@
       </p:sp>
       <p:sp>
         <p:nvSpPr>
-          <p:cNvPr id="1904724286" name="Text 18"/>
+          <p:cNvPr id="595315737" name="Text 18"/>
           <p:cNvSpPr/>
           <p:nvPr/>
         </p:nvSpPr>
@@ -20290,7 +20352,7 @@
       </p:grpSpPr>
       <p:sp>
         <p:nvSpPr>
-          <p:cNvPr id="1620769860" name="Text 0"/>
+          <p:cNvPr id="724582844" name="Text 0"/>
           <p:cNvSpPr/>
           <p:nvPr/>
         </p:nvSpPr>
@@ -20330,7 +20392,7 @@
       </p:sp>
       <p:sp>
         <p:nvSpPr>
-          <p:cNvPr id="1410994183" name="Text 1"/>
+          <p:cNvPr id="1159849707" name="Text 1"/>
           <p:cNvSpPr/>
           <p:nvPr/>
         </p:nvSpPr>
@@ -20370,7 +20432,7 @@
       </p:sp>
       <p:sp>
         <p:nvSpPr>
-          <p:cNvPr id="2146137367" name="Shape 2"/>
+          <p:cNvPr id="1725572579" name="Shape 2"/>
           <p:cNvSpPr/>
           <p:nvPr/>
         </p:nvSpPr>
@@ -20404,7 +20466,7 @@
       </p:sp>
       <p:sp>
         <p:nvSpPr>
-          <p:cNvPr id="236001432" name="Shape 3"/>
+          <p:cNvPr id="1675997173" name="Shape 3"/>
           <p:cNvSpPr/>
           <p:nvPr/>
         </p:nvSpPr>
@@ -20431,7 +20493,7 @@
       </p:sp>
       <p:pic>
         <p:nvPicPr>
-          <p:cNvPr id="1485974779" name="Image 0" descr="preencoded.png"/>
+          <p:cNvPr id="1124621171" name="Image 0" descr="preencoded.png"/>
           <p:cNvPicPr>
             <a:picLocks noChangeAspect="1"/>
           </p:cNvPicPr>
@@ -20453,7 +20515,7 @@
       </p:pic>
       <p:sp>
         <p:nvSpPr>
-          <p:cNvPr id="1531034288" name="Text 4"/>
+          <p:cNvPr id="2070673831" name="Text 4"/>
           <p:cNvSpPr/>
           <p:nvPr/>
         </p:nvSpPr>
@@ -20493,7 +20555,7 @@
       </p:sp>
       <p:sp>
         <p:nvSpPr>
-          <p:cNvPr id="1828796965" name="Text 5"/>
+          <p:cNvPr id="152012483" name="Text 5"/>
           <p:cNvSpPr/>
           <p:nvPr/>
         </p:nvSpPr>
@@ -20536,7 +20598,7 @@
       </p:sp>
       <p:sp>
         <p:nvSpPr>
-          <p:cNvPr id="139227616" name="Shape 6"/>
+          <p:cNvPr id="2113516009" name="Shape 6"/>
           <p:cNvSpPr/>
           <p:nvPr/>
         </p:nvSpPr>
@@ -20570,7 +20632,7 @@
       </p:sp>
       <p:sp>
         <p:nvSpPr>
-          <p:cNvPr id="730789993" name="Shape 7"/>
+          <p:cNvPr id="1184326290" name="Shape 7"/>
           <p:cNvSpPr/>
           <p:nvPr/>
         </p:nvSpPr>
@@ -20597,7 +20659,7 @@
       </p:sp>
       <p:pic>
         <p:nvPicPr>
-          <p:cNvPr id="971587494" name="Image 1" descr="preencoded.png"/>
+          <p:cNvPr id="1314052219" name="Image 1" descr="preencoded.png"/>
           <p:cNvPicPr>
             <a:picLocks noChangeAspect="1"/>
           </p:cNvPicPr>
@@ -20619,7 +20681,7 @@
       </p:pic>
       <p:sp>
         <p:nvSpPr>
-          <p:cNvPr id="837712469" name="Text 8"/>
+          <p:cNvPr id="1541768011" name="Text 8"/>
           <p:cNvSpPr/>
           <p:nvPr/>
         </p:nvSpPr>
@@ -20659,7 +20721,7 @@
       </p:sp>
       <p:sp>
         <p:nvSpPr>
-          <p:cNvPr id="45959617" name="Text 9"/>
+          <p:cNvPr id="1927716004" name="Text 9"/>
           <p:cNvSpPr/>
           <p:nvPr/>
         </p:nvSpPr>
@@ -20702,7 +20764,7 @@
       </p:sp>
       <p:sp>
         <p:nvSpPr>
-          <p:cNvPr id="1805058188" name="Shape 10"/>
+          <p:cNvPr id="1226215737" name="Shape 10"/>
           <p:cNvSpPr/>
           <p:nvPr/>
         </p:nvSpPr>
@@ -20736,7 +20798,7 @@
       </p:sp>
       <p:sp>
         <p:nvSpPr>
-          <p:cNvPr id="1388761179" name="Shape 11"/>
+          <p:cNvPr id="430006899" name="Shape 11"/>
           <p:cNvSpPr/>
           <p:nvPr/>
         </p:nvSpPr>
@@ -20763,7 +20825,7 @@
       </p:sp>
       <p:pic>
         <p:nvPicPr>
-          <p:cNvPr id="421361933" name="Image 2" descr="preencoded.png"/>
+          <p:cNvPr id="2074695205" name="Image 2" descr="preencoded.png"/>
           <p:cNvPicPr>
             <a:picLocks noChangeAspect="1"/>
           </p:cNvPicPr>
@@ -20785,7 +20847,7 @@
       </p:pic>
       <p:sp>
         <p:nvSpPr>
-          <p:cNvPr id="2011189610" name="Text 12"/>
+          <p:cNvPr id="1600134666" name="Text 12"/>
           <p:cNvSpPr/>
           <p:nvPr/>
         </p:nvSpPr>
@@ -20825,7 +20887,7 @@
       </p:sp>
       <p:sp>
         <p:nvSpPr>
-          <p:cNvPr id="240700403" name="Text 13"/>
+          <p:cNvPr id="884149484" name="Text 13"/>
           <p:cNvSpPr/>
           <p:nvPr/>
         </p:nvSpPr>
@@ -20868,7 +20930,7 @@
       </p:sp>
       <p:sp>
         <p:nvSpPr>
-          <p:cNvPr id="2052909011" name="Shape 14"/>
+          <p:cNvPr id="1677265567" name="Shape 14"/>
           <p:cNvSpPr/>
           <p:nvPr/>
         </p:nvSpPr>
@@ -20902,7 +20964,7 @@
       </p:sp>
       <p:sp>
         <p:nvSpPr>
-          <p:cNvPr id="1294182112" name="Shape 15"/>
+          <p:cNvPr id="1266237634" name="Shape 15"/>
           <p:cNvSpPr/>
           <p:nvPr/>
         </p:nvSpPr>
@@ -20929,7 +20991,7 @@
       </p:sp>
       <p:pic>
         <p:nvPicPr>
-          <p:cNvPr id="1743778472" name="Image 3" descr="preencoded.png"/>
+          <p:cNvPr id="1840899665" name="Image 3" descr="preencoded.png"/>
           <p:cNvPicPr>
             <a:picLocks noChangeAspect="1"/>
           </p:cNvPicPr>
@@ -20951,7 +21013,7 @@
       </p:pic>
       <p:sp>
         <p:nvSpPr>
-          <p:cNvPr id="1932756469" name="Text 16"/>
+          <p:cNvPr id="1486513782" name="Text 16"/>
           <p:cNvSpPr/>
           <p:nvPr/>
         </p:nvSpPr>
@@ -20991,7 +21053,7 @@
       </p:sp>
       <p:sp>
         <p:nvSpPr>
-          <p:cNvPr id="1461405467" name="Text 17"/>
+          <p:cNvPr id="547444072" name="Text 17"/>
           <p:cNvSpPr/>
           <p:nvPr/>
         </p:nvSpPr>
@@ -21034,7 +21096,7 @@
       </p:sp>
       <p:sp>
         <p:nvSpPr>
-          <p:cNvPr id="1956272642" name="Shape 18"/>
+          <p:cNvPr id="1612655634" name="Shape 18"/>
           <p:cNvSpPr/>
           <p:nvPr/>
         </p:nvSpPr>
@@ -21068,7 +21130,7 @@
       </p:sp>
       <p:sp>
         <p:nvSpPr>
-          <p:cNvPr id="1762357419" name="Shape 19"/>
+          <p:cNvPr id="1348333592" name="Shape 19"/>
           <p:cNvSpPr/>
           <p:nvPr/>
         </p:nvSpPr>
@@ -21095,7 +21157,7 @@
       </p:sp>
       <p:pic>
         <p:nvPicPr>
-          <p:cNvPr id="265504325" name="Image 4" descr="preencoded.png"/>
+          <p:cNvPr id="1857772786" name="Image 4" descr="preencoded.png"/>
           <p:cNvPicPr>
             <a:picLocks noChangeAspect="1"/>
           </p:cNvPicPr>
@@ -21117,7 +21179,7 @@
       </p:pic>
       <p:sp>
         <p:nvSpPr>
-          <p:cNvPr id="883918150" name="Text 20"/>
+          <p:cNvPr id="1925512491" name="Text 20"/>
           <p:cNvSpPr/>
           <p:nvPr/>
         </p:nvSpPr>
@@ -21157,7 +21219,7 @@
       </p:sp>
       <p:sp>
         <p:nvSpPr>
-          <p:cNvPr id="2096941213" name="Text 21"/>
+          <p:cNvPr id="931842019" name="Text 21"/>
           <p:cNvSpPr/>
           <p:nvPr/>
         </p:nvSpPr>
@@ -21200,7 +21262,7 @@
       </p:sp>
       <p:sp>
         <p:nvSpPr>
-          <p:cNvPr id="1746507315" name="Shape 22"/>
+          <p:cNvPr id="2049204622" name="Shape 22"/>
           <p:cNvSpPr/>
           <p:nvPr/>
         </p:nvSpPr>
@@ -21234,7 +21296,7 @@
       </p:sp>
       <p:sp>
         <p:nvSpPr>
-          <p:cNvPr id="1958405843" name="Shape 23"/>
+          <p:cNvPr id="901760100" name="Shape 23"/>
           <p:cNvSpPr/>
           <p:nvPr/>
         </p:nvSpPr>
@@ -21261,7 +21323,7 @@
       </p:sp>
       <p:pic>
         <p:nvPicPr>
-          <p:cNvPr id="242734975" name="Image 5" descr="preencoded.png"/>
+          <p:cNvPr id="744985940" name="Image 5" descr="preencoded.png"/>
           <p:cNvPicPr>
             <a:picLocks noChangeAspect="1"/>
           </p:cNvPicPr>
@@ -21283,7 +21345,7 @@
       </p:pic>
       <p:sp>
         <p:nvSpPr>
-          <p:cNvPr id="953994704" name="Text 24"/>
+          <p:cNvPr id="2099635893" name="Text 24"/>
           <p:cNvSpPr/>
           <p:nvPr/>
         </p:nvSpPr>
@@ -21323,7 +21385,7 @@
       </p:sp>
       <p:sp>
         <p:nvSpPr>
-          <p:cNvPr id="564441262" name="Text 25"/>
+          <p:cNvPr id="4474657" name="Text 25"/>
           <p:cNvSpPr/>
           <p:nvPr/>
         </p:nvSpPr>
@@ -21366,7 +21428,7 @@
       </p:sp>
       <p:sp>
         <p:nvSpPr>
-          <p:cNvPr id="590590546" name="Text 26"/>
+          <p:cNvPr id="207757875" name="Text 26"/>
           <p:cNvSpPr/>
           <p:nvPr/>
         </p:nvSpPr>
@@ -21406,7 +21468,7 @@
       </p:sp>
       <p:sp>
         <p:nvSpPr>
-          <p:cNvPr id="941710710" name="Text 27"/>
+          <p:cNvPr id="972717543" name="Text 27"/>
           <p:cNvSpPr/>
           <p:nvPr/>
         </p:nvSpPr>
@@ -21486,7 +21548,7 @@
       </p:grpSpPr>
       <p:sp>
         <p:nvSpPr>
-          <p:cNvPr id="340378664" name="Shape 0"/>
+          <p:cNvPr id="230289558" name="Shape 0"/>
           <p:cNvSpPr/>
           <p:nvPr/>
         </p:nvSpPr>
@@ -21508,7 +21570,7 @@
       </p:sp>
       <p:sp>
         <p:nvSpPr>
-          <p:cNvPr id="635838333" name="Shape 1"/>
+          <p:cNvPr id="1621971167" name="Shape 1"/>
           <p:cNvSpPr/>
           <p:nvPr/>
         </p:nvSpPr>
@@ -21530,7 +21592,7 @@
       </p:sp>
       <p:sp>
         <p:nvSpPr>
-          <p:cNvPr id="2042156690" name="Shape 2"/>
+          <p:cNvPr id="1427633297" name="Shape 2"/>
           <p:cNvSpPr/>
           <p:nvPr/>
         </p:nvSpPr>
@@ -21552,7 +21614,7 @@
       </p:sp>
       <p:sp>
         <p:nvSpPr>
-          <p:cNvPr id="513343860" name="Shape 3"/>
+          <p:cNvPr id="1852551093" name="Shape 3"/>
           <p:cNvSpPr/>
           <p:nvPr/>
         </p:nvSpPr>
@@ -21574,7 +21636,7 @@
       </p:sp>
       <p:sp>
         <p:nvSpPr>
-          <p:cNvPr id="1245472099" name="Shape 4"/>
+          <p:cNvPr id="619102459" name="Shape 4"/>
           <p:cNvSpPr/>
           <p:nvPr/>
         </p:nvSpPr>
@@ -21596,7 +21658,7 @@
       </p:sp>
       <p:sp>
         <p:nvSpPr>
-          <p:cNvPr id="209738966" name="Shape 5"/>
+          <p:cNvPr id="1065786268" name="Shape 5"/>
           <p:cNvSpPr/>
           <p:nvPr/>
         </p:nvSpPr>
@@ -21618,7 +21680,7 @@
       </p:sp>
       <p:sp>
         <p:nvSpPr>
-          <p:cNvPr id="1873649432" name="Shape 6"/>
+          <p:cNvPr id="1434311329" name="Shape 6"/>
           <p:cNvSpPr/>
           <p:nvPr/>
         </p:nvSpPr>
@@ -21640,7 +21702,7 @@
       </p:sp>
       <p:sp>
         <p:nvSpPr>
-          <p:cNvPr id="2003729312" name="Shape 7"/>
+          <p:cNvPr id="804284641" name="Shape 7"/>
           <p:cNvSpPr/>
           <p:nvPr/>
         </p:nvSpPr>
@@ -21662,7 +21724,7 @@
       </p:sp>
       <p:sp>
         <p:nvSpPr>
-          <p:cNvPr id="1668001147" name="Shape 8"/>
+          <p:cNvPr id="147262559" name="Shape 8"/>
           <p:cNvSpPr/>
           <p:nvPr/>
         </p:nvSpPr>
@@ -21684,7 +21746,7 @@
       </p:sp>
       <p:sp>
         <p:nvSpPr>
-          <p:cNvPr id="429141135" name="Shape 9"/>
+          <p:cNvPr id="867257748" name="Shape 9"/>
           <p:cNvSpPr/>
           <p:nvPr/>
         </p:nvSpPr>
@@ -21706,7 +21768,7 @@
       </p:sp>
       <p:sp>
         <p:nvSpPr>
-          <p:cNvPr id="1472199027" name="Shape 10"/>
+          <p:cNvPr id="139627206" name="Shape 10"/>
           <p:cNvSpPr/>
           <p:nvPr/>
         </p:nvSpPr>
@@ -21728,7 +21790,7 @@
       </p:sp>
       <p:sp>
         <p:nvSpPr>
-          <p:cNvPr id="164858191" name="Shape 11"/>
+          <p:cNvPr id="227144326" name="Shape 11"/>
           <p:cNvSpPr/>
           <p:nvPr/>
         </p:nvSpPr>
@@ -21750,7 +21812,7 @@
       </p:sp>
       <p:sp>
         <p:nvSpPr>
-          <p:cNvPr id="781556232" name="Shape 12"/>
+          <p:cNvPr id="101023955" name="Shape 12"/>
           <p:cNvSpPr/>
           <p:nvPr/>
         </p:nvSpPr>
@@ -21772,7 +21834,7 @@
       </p:sp>
       <p:sp>
         <p:nvSpPr>
-          <p:cNvPr id="48025463" name="Shape 13"/>
+          <p:cNvPr id="236529584" name="Shape 13"/>
           <p:cNvSpPr/>
           <p:nvPr/>
         </p:nvSpPr>
@@ -21794,7 +21856,7 @@
       </p:sp>
       <p:sp>
         <p:nvSpPr>
-          <p:cNvPr id="1202134325" name="Shape 14"/>
+          <p:cNvPr id="1702556815" name="Shape 14"/>
           <p:cNvSpPr/>
           <p:nvPr/>
         </p:nvSpPr>
@@ -21816,7 +21878,7 @@
       </p:sp>
       <p:sp>
         <p:nvSpPr>
-          <p:cNvPr id="2090062545" name="Shape 15"/>
+          <p:cNvPr id="414228898" name="Shape 15"/>
           <p:cNvSpPr/>
           <p:nvPr/>
         </p:nvSpPr>
@@ -21838,7 +21900,7 @@
       </p:sp>
       <p:sp>
         <p:nvSpPr>
-          <p:cNvPr id="1338206018" name="Shape 16"/>
+          <p:cNvPr id="171680638" name="Shape 16"/>
           <p:cNvSpPr/>
           <p:nvPr/>
         </p:nvSpPr>
@@ -21860,7 +21922,7 @@
       </p:sp>
       <p:sp>
         <p:nvSpPr>
-          <p:cNvPr id="103073893" name="Shape 17"/>
+          <p:cNvPr id="1955518087" name="Shape 17"/>
           <p:cNvSpPr/>
           <p:nvPr/>
         </p:nvSpPr>
@@ -21882,7 +21944,7 @@
       </p:sp>
       <p:sp>
         <p:nvSpPr>
-          <p:cNvPr id="1036413537" name="Shape 18"/>
+          <p:cNvPr id="479166635" name="Shape 18"/>
           <p:cNvSpPr/>
           <p:nvPr/>
         </p:nvSpPr>
@@ -21904,7 +21966,7 @@
       </p:sp>
       <p:sp>
         <p:nvSpPr>
-          <p:cNvPr id="557068746" name="Shape 19"/>
+          <p:cNvPr id="116907460" name="Shape 19"/>
           <p:cNvSpPr/>
           <p:nvPr/>
         </p:nvSpPr>
@@ -21926,7 +21988,7 @@
       </p:sp>
       <p:sp>
         <p:nvSpPr>
-          <p:cNvPr id="1509709939" name="Text 20"/>
+          <p:cNvPr id="931311689" name="Text 20"/>
           <p:cNvSpPr/>
           <p:nvPr/>
         </p:nvSpPr>
@@ -21966,7 +22028,7 @@
       </p:sp>
       <p:sp>
         <p:nvSpPr>
-          <p:cNvPr id="547621044" name="Text 21"/>
+          <p:cNvPr id="719766904" name="Text 21"/>
           <p:cNvSpPr/>
           <p:nvPr/>
         </p:nvSpPr>
@@ -22009,7 +22071,7 @@
       </p:sp>
       <p:sp>
         <p:nvSpPr>
-          <p:cNvPr id="2062087369" name="Shape 22"/>
+          <p:cNvPr id="822532220" name="Shape 22"/>
           <p:cNvSpPr/>
           <p:nvPr/>
         </p:nvSpPr>
@@ -22036,7 +22098,7 @@
       </p:sp>
       <p:pic>
         <p:nvPicPr>
-          <p:cNvPr id="1333827582" name="Image 0" descr="preencoded.png"/>
+          <p:cNvPr id="1837151240" name="Image 0" descr="preencoded.png"/>
           <p:cNvPicPr>
             <a:picLocks noChangeAspect="1"/>
           </p:cNvPicPr>
@@ -22058,7 +22120,7 @@
       </p:pic>
       <p:sp>
         <p:nvSpPr>
-          <p:cNvPr id="465097693" name="Text 23"/>
+          <p:cNvPr id="2012719301" name="Text 23"/>
           <p:cNvSpPr/>
           <p:nvPr/>
         </p:nvSpPr>
@@ -22101,7 +22163,18 @@
                 <a:ea typeface="Calibri"/>
                 <a:cs typeface="Calibri"/>
               </a:rPr>
-              <a:t>meine-stimme.jutio.org/wohnform-01</a:t>
+              <a:t>meine-stimme.jutio.org/</a:t>
+            </a:r>
+            <a:r>
+              <a:rPr lang="de-DE" sz="1300">
+                <a:solidFill>
+                  <a:srgbClr val="FFFFFF"/>
+                </a:solidFill>
+                <a:latin typeface="Calibri"/>
+                <a:ea typeface="Calibri"/>
+                <a:cs typeface="Calibri"/>
+              </a:rPr>
+              <a:t>test</a:t>
             </a:r>
             <a:endParaRPr lang="en-US" sz="1300"/>
           </a:p>
@@ -22109,7 +22182,7 @@
       </p:sp>
       <p:sp>
         <p:nvSpPr>
-          <p:cNvPr id="1175283627" name="Shape 24"/>
+          <p:cNvPr id="1255155848" name="Shape 24"/>
           <p:cNvSpPr/>
           <p:nvPr/>
         </p:nvSpPr>
@@ -22136,7 +22209,7 @@
       </p:sp>
       <p:pic>
         <p:nvPicPr>
-          <p:cNvPr id="619502179" name="Image 1" descr="preencoded.png"/>
+          <p:cNvPr id="1847971742" name="Image 1" descr="preencoded.png"/>
           <p:cNvPicPr>
             <a:picLocks noChangeAspect="1"/>
           </p:cNvPicPr>
@@ -22158,7 +22231,7 @@
       </p:pic>
       <p:sp>
         <p:nvSpPr>
-          <p:cNvPr id="115133200" name="Text 25"/>
+          <p:cNvPr id="177082411" name="Text 25"/>
           <p:cNvSpPr/>
           <p:nvPr/>
         </p:nvSpPr>
@@ -22209,7 +22282,7 @@
       </p:sp>
       <p:sp>
         <p:nvSpPr>
-          <p:cNvPr id="1824333648" name="Text 26"/>
+          <p:cNvPr id="1438633511" name="Text 26"/>
           <p:cNvSpPr/>
           <p:nvPr/>
         </p:nvSpPr>
@@ -22249,7 +22322,7 @@
       </p:sp>
       <p:sp>
         <p:nvSpPr>
-          <p:cNvPr id="1944560380" name="Text 27"/>
+          <p:cNvPr id="1685686062" name="Text 27"/>
           <p:cNvSpPr/>
           <p:nvPr/>
         </p:nvSpPr>
@@ -22292,7 +22365,7 @@
       </p:sp>
       <p:sp>
         <p:nvSpPr>
-          <p:cNvPr id="1857629457" name="Text 28"/>
+          <p:cNvPr id="1629831382" name="Text 28"/>
           <p:cNvSpPr/>
           <p:nvPr/>
         </p:nvSpPr>
@@ -22383,7 +22456,7 @@
       </p:grpSpPr>
       <p:sp>
         <p:nvSpPr>
-          <p:cNvPr id="1757580567" name="Text 0"/>
+          <p:cNvPr id="762430111" name="Text 0"/>
           <p:cNvSpPr/>
           <p:nvPr/>
         </p:nvSpPr>
@@ -22423,7 +22496,7 @@
       </p:sp>
       <p:sp>
         <p:nvSpPr>
-          <p:cNvPr id="1099131590" name="Text 1"/>
+          <p:cNvPr id="1613812910" name="Text 1"/>
           <p:cNvSpPr/>
           <p:nvPr/>
         </p:nvSpPr>
@@ -22463,7 +22536,7 @@
       </p:sp>
       <p:sp>
         <p:nvSpPr>
-          <p:cNvPr id="1110186281" name="Shape 2"/>
+          <p:cNvPr id="884375497" name="Shape 2"/>
           <p:cNvSpPr/>
           <p:nvPr/>
         </p:nvSpPr>
@@ -22497,7 +22570,7 @@
       </p:sp>
       <p:sp>
         <p:nvSpPr>
-          <p:cNvPr id="561394588" name="Shape 3"/>
+          <p:cNvPr id="1731842211" name="Shape 3"/>
           <p:cNvSpPr/>
           <p:nvPr/>
         </p:nvSpPr>
@@ -22524,7 +22597,7 @@
       </p:sp>
       <p:pic>
         <p:nvPicPr>
-          <p:cNvPr id="914828233" name="Image 0" descr="preencoded.png"/>
+          <p:cNvPr id="1287598560" name="Image 0" descr="preencoded.png"/>
           <p:cNvPicPr>
             <a:picLocks noChangeAspect="1"/>
           </p:cNvPicPr>
@@ -22546,7 +22619,7 @@
       </p:pic>
       <p:sp>
         <p:nvSpPr>
-          <p:cNvPr id="979221528" name="Text 4"/>
+          <p:cNvPr id="558192232" name="Text 4"/>
           <p:cNvSpPr/>
           <p:nvPr/>
         </p:nvSpPr>
@@ -22586,7 +22659,7 @@
       </p:sp>
       <p:sp>
         <p:nvSpPr>
-          <p:cNvPr id="1178314689" name="Text 5"/>
+          <p:cNvPr id="1976357842" name="Text 5"/>
           <p:cNvSpPr/>
           <p:nvPr/>
         </p:nvSpPr>
@@ -22626,7 +22699,7 @@
       </p:sp>
       <p:sp>
         <p:nvSpPr>
-          <p:cNvPr id="181992664" name="Text 6"/>
+          <p:cNvPr id="214537619" name="Text 6"/>
           <p:cNvSpPr/>
           <p:nvPr/>
         </p:nvSpPr>
@@ -22669,7 +22742,7 @@
       </p:sp>
       <p:sp>
         <p:nvSpPr>
-          <p:cNvPr id="383947152" name="Shape 7"/>
+          <p:cNvPr id="1590836646" name="Shape 7"/>
           <p:cNvSpPr/>
           <p:nvPr/>
         </p:nvSpPr>
@@ -22703,7 +22776,7 @@
       </p:sp>
       <p:sp>
         <p:nvSpPr>
-          <p:cNvPr id="1415653414" name="Shape 8"/>
+          <p:cNvPr id="184801151" name="Shape 8"/>
           <p:cNvSpPr/>
           <p:nvPr/>
         </p:nvSpPr>
@@ -22730,7 +22803,7 @@
       </p:sp>
       <p:pic>
         <p:nvPicPr>
-          <p:cNvPr id="450213956" name="Image 1" descr="preencoded.png"/>
+          <p:cNvPr id="1409569924" name="Image 1" descr="preencoded.png"/>
           <p:cNvPicPr>
             <a:picLocks noChangeAspect="1"/>
           </p:cNvPicPr>
@@ -22752,7 +22825,7 @@
       </p:pic>
       <p:sp>
         <p:nvSpPr>
-          <p:cNvPr id="1142102886" name="Text 9"/>
+          <p:cNvPr id="1024544684" name="Text 9"/>
           <p:cNvSpPr/>
           <p:nvPr/>
         </p:nvSpPr>
@@ -22792,7 +22865,7 @@
       </p:sp>
       <p:sp>
         <p:nvSpPr>
-          <p:cNvPr id="102201528" name="Text 10"/>
+          <p:cNvPr id="1548122954" name="Text 10"/>
           <p:cNvSpPr/>
           <p:nvPr/>
         </p:nvSpPr>
@@ -22832,7 +22905,7 @@
       </p:sp>
       <p:sp>
         <p:nvSpPr>
-          <p:cNvPr id="1573853191" name="Text 11"/>
+          <p:cNvPr id="550992486" name="Text 11"/>
           <p:cNvSpPr/>
           <p:nvPr/>
         </p:nvSpPr>
@@ -22875,7 +22948,7 @@
       </p:sp>
       <p:sp>
         <p:nvSpPr>
-          <p:cNvPr id="358046225" name="Shape 12"/>
+          <p:cNvPr id="910556823" name="Shape 12"/>
           <p:cNvSpPr/>
           <p:nvPr/>
         </p:nvSpPr>
@@ -22909,7 +22982,7 @@
       </p:sp>
       <p:sp>
         <p:nvSpPr>
-          <p:cNvPr id="774487116" name="Shape 13"/>
+          <p:cNvPr id="1568731566" name="Shape 13"/>
           <p:cNvSpPr/>
           <p:nvPr/>
         </p:nvSpPr>
@@ -22936,7 +23009,7 @@
       </p:sp>
       <p:pic>
         <p:nvPicPr>
-          <p:cNvPr id="117689591" name="Image 2" descr="preencoded.png"/>
+          <p:cNvPr id="1504371394" name="Image 2" descr="preencoded.png"/>
           <p:cNvPicPr>
             <a:picLocks noChangeAspect="1"/>
           </p:cNvPicPr>
@@ -22958,7 +23031,7 @@
       </p:pic>
       <p:sp>
         <p:nvSpPr>
-          <p:cNvPr id="199000356" name="Text 14"/>
+          <p:cNvPr id="702482210" name="Text 14"/>
           <p:cNvSpPr/>
           <p:nvPr/>
         </p:nvSpPr>
@@ -22998,7 +23071,7 @@
       </p:sp>
       <p:sp>
         <p:nvSpPr>
-          <p:cNvPr id="538076361" name="Text 15"/>
+          <p:cNvPr id="1138186883" name="Text 15"/>
           <p:cNvSpPr/>
           <p:nvPr/>
         </p:nvSpPr>
@@ -23038,7 +23111,7 @@
       </p:sp>
       <p:sp>
         <p:nvSpPr>
-          <p:cNvPr id="200491990" name="Text 16"/>
+          <p:cNvPr id="955131964" name="Text 16"/>
           <p:cNvSpPr/>
           <p:nvPr/>
         </p:nvSpPr>
@@ -23081,7 +23154,7 @@
       </p:sp>
       <p:sp>
         <p:nvSpPr>
-          <p:cNvPr id="1493540533" name="Shape 17"/>
+          <p:cNvPr id="1437487700" name="Shape 17"/>
           <p:cNvSpPr/>
           <p:nvPr/>
         </p:nvSpPr>
@@ -23108,7 +23181,7 @@
       </p:sp>
       <p:sp>
         <p:nvSpPr>
-          <p:cNvPr id="765165429" name="Text 18"/>
+          <p:cNvPr id="1870455608" name="Text 18"/>
           <p:cNvSpPr/>
           <p:nvPr/>
         </p:nvSpPr>
@@ -23159,7 +23232,7 @@
       </p:sp>
       <p:sp>
         <p:nvSpPr>
-          <p:cNvPr id="1302219082" name="Text 19"/>
+          <p:cNvPr id="1296828062" name="Text 19"/>
           <p:cNvSpPr/>
           <p:nvPr/>
         </p:nvSpPr>
@@ -23199,7 +23272,7 @@
       </p:sp>
       <p:sp>
         <p:nvSpPr>
-          <p:cNvPr id="20959316" name="Text 20"/>
+          <p:cNvPr id="485150957" name="Text 20"/>
           <p:cNvSpPr/>
           <p:nvPr/>
         </p:nvSpPr>
@@ -23279,7 +23352,7 @@
       </p:grpSpPr>
       <p:sp>
         <p:nvSpPr>
-          <p:cNvPr id="2055427207" name="Text 0"/>
+          <p:cNvPr id="1883653197" name="Text 0"/>
           <p:cNvSpPr/>
           <p:nvPr/>
         </p:nvSpPr>
@@ -23319,7 +23392,7 @@
       </p:sp>
       <p:sp>
         <p:nvSpPr>
-          <p:cNvPr id="987719951" name="Text 1"/>
+          <p:cNvPr id="1219232936" name="Text 1"/>
           <p:cNvSpPr/>
           <p:nvPr/>
         </p:nvSpPr>
@@ -23359,7 +23432,7 @@
       </p:sp>
       <p:sp>
         <p:nvSpPr>
-          <p:cNvPr id="2118590408" name="Shape 2"/>
+          <p:cNvPr id="624238161" name="Shape 2"/>
           <p:cNvSpPr/>
           <p:nvPr/>
         </p:nvSpPr>
@@ -23393,7 +23466,7 @@
       </p:sp>
       <p:sp>
         <p:nvSpPr>
-          <p:cNvPr id="280945789" name="Shape 3"/>
+          <p:cNvPr id="832969562" name="Shape 3"/>
           <p:cNvSpPr/>
           <p:nvPr/>
         </p:nvSpPr>
@@ -23420,7 +23493,7 @@
       </p:sp>
       <p:pic>
         <p:nvPicPr>
-          <p:cNvPr id="1057070899" name="Image 0" descr="preencoded.png"/>
+          <p:cNvPr id="764794778" name="Image 0" descr="preencoded.png"/>
           <p:cNvPicPr>
             <a:picLocks noChangeAspect="1"/>
           </p:cNvPicPr>
@@ -23442,7 +23515,7 @@
       </p:pic>
       <p:sp>
         <p:nvSpPr>
-          <p:cNvPr id="1426600970" name="Text 4"/>
+          <p:cNvPr id="1719136650" name="Text 4"/>
           <p:cNvSpPr/>
           <p:nvPr/>
         </p:nvSpPr>
@@ -23482,7 +23555,7 @@
       </p:sp>
       <p:sp>
         <p:nvSpPr>
-          <p:cNvPr id="1232482228" name="Shape 5"/>
+          <p:cNvPr id="552229443" name="Shape 5"/>
           <p:cNvSpPr/>
           <p:nvPr/>
         </p:nvSpPr>
@@ -23504,7 +23577,7 @@
       </p:sp>
       <p:sp>
         <p:nvSpPr>
-          <p:cNvPr id="852675820" name="Text 6"/>
+          <p:cNvPr id="1420360519" name="Text 6"/>
           <p:cNvSpPr/>
           <p:nvPr/>
         </p:nvSpPr>
@@ -23544,7 +23617,7 @@
       </p:sp>
       <p:sp>
         <p:nvSpPr>
-          <p:cNvPr id="1157396122" name="Shape 7"/>
+          <p:cNvPr id="565859317" name="Shape 7"/>
           <p:cNvSpPr/>
           <p:nvPr/>
         </p:nvSpPr>
@@ -23567,7 +23640,7 @@
       </p:sp>
       <p:sp>
         <p:nvSpPr>
-          <p:cNvPr id="282022706" name="Text 8"/>
+          <p:cNvPr id="597021541" name="Text 8"/>
           <p:cNvSpPr/>
           <p:nvPr/>
         </p:nvSpPr>
@@ -23610,7 +23683,7 @@
       </p:sp>
       <p:sp>
         <p:nvSpPr>
-          <p:cNvPr id="575221962" name="Shape 9"/>
+          <p:cNvPr id="410013538" name="Shape 9"/>
           <p:cNvSpPr/>
           <p:nvPr/>
         </p:nvSpPr>
@@ -23644,7 +23717,7 @@
       </p:sp>
       <p:sp>
         <p:nvSpPr>
-          <p:cNvPr id="1955905285" name="Shape 10"/>
+          <p:cNvPr id="598576051" name="Shape 10"/>
           <p:cNvSpPr/>
           <p:nvPr/>
         </p:nvSpPr>
@@ -23671,7 +23744,7 @@
       </p:sp>
       <p:pic>
         <p:nvPicPr>
-          <p:cNvPr id="355937566" name="Image 1" descr="preencoded.png"/>
+          <p:cNvPr id="1963914221" name="Image 1" descr="preencoded.png"/>
           <p:cNvPicPr>
             <a:picLocks noChangeAspect="1"/>
           </p:cNvPicPr>
@@ -23693,7 +23766,7 @@
       </p:pic>
       <p:sp>
         <p:nvSpPr>
-          <p:cNvPr id="633441240" name="Text 11"/>
+          <p:cNvPr id="472726239" name="Text 11"/>
           <p:cNvSpPr/>
           <p:nvPr/>
         </p:nvSpPr>
@@ -23733,7 +23806,7 @@
       </p:sp>
       <p:sp>
         <p:nvSpPr>
-          <p:cNvPr id="691936054" name="Shape 12"/>
+          <p:cNvPr id="1739786228" name="Shape 12"/>
           <p:cNvSpPr/>
           <p:nvPr/>
         </p:nvSpPr>
@@ -23755,7 +23828,7 @@
       </p:sp>
       <p:sp>
         <p:nvSpPr>
-          <p:cNvPr id="172845636" name="Text 13"/>
+          <p:cNvPr id="341264977" name="Text 13"/>
           <p:cNvSpPr/>
           <p:nvPr/>
         </p:nvSpPr>
@@ -23795,7 +23868,7 @@
       </p:sp>
       <p:sp>
         <p:nvSpPr>
-          <p:cNvPr id="16391057" name="Shape 14"/>
+          <p:cNvPr id="273472543" name="Shape 14"/>
           <p:cNvSpPr/>
           <p:nvPr/>
         </p:nvSpPr>
@@ -23818,7 +23891,7 @@
       </p:sp>
       <p:sp>
         <p:nvSpPr>
-          <p:cNvPr id="256818009" name="Text 15"/>
+          <p:cNvPr id="2059298661" name="Text 15"/>
           <p:cNvSpPr/>
           <p:nvPr/>
         </p:nvSpPr>
@@ -23861,7 +23934,7 @@
       </p:sp>
       <p:sp>
         <p:nvSpPr>
-          <p:cNvPr id="1260347868" name="Shape 16"/>
+          <p:cNvPr id="2110962331" name="Shape 16"/>
           <p:cNvSpPr/>
           <p:nvPr/>
         </p:nvSpPr>
@@ -23895,7 +23968,7 @@
       </p:sp>
       <p:sp>
         <p:nvSpPr>
-          <p:cNvPr id="1620487777" name="Shape 17"/>
+          <p:cNvPr id="542208321" name="Shape 17"/>
           <p:cNvSpPr/>
           <p:nvPr/>
         </p:nvSpPr>
@@ -23922,7 +23995,7 @@
       </p:sp>
       <p:pic>
         <p:nvPicPr>
-          <p:cNvPr id="603853806" name="Image 2" descr="preencoded.png"/>
+          <p:cNvPr id="2080433111" name="Image 2" descr="preencoded.png"/>
           <p:cNvPicPr>
             <a:picLocks noChangeAspect="1"/>
           </p:cNvPicPr>
@@ -23944,7 +24017,7 @@
       </p:pic>
       <p:sp>
         <p:nvSpPr>
-          <p:cNvPr id="1699604276" name="Text 18"/>
+          <p:cNvPr id="1707313953" name="Text 18"/>
           <p:cNvSpPr/>
           <p:nvPr/>
         </p:nvSpPr>
@@ -23984,7 +24057,7 @@
       </p:sp>
       <p:sp>
         <p:nvSpPr>
-          <p:cNvPr id="60173534" name="Shape 19"/>
+          <p:cNvPr id="774116875" name="Shape 19"/>
           <p:cNvSpPr/>
           <p:nvPr/>
         </p:nvSpPr>
@@ -24006,7 +24079,7 @@
       </p:sp>
       <p:sp>
         <p:nvSpPr>
-          <p:cNvPr id="1638924211" name="Text 20"/>
+          <p:cNvPr id="1153616670" name="Text 20"/>
           <p:cNvSpPr/>
           <p:nvPr/>
         </p:nvSpPr>
@@ -24046,7 +24119,7 @@
       </p:sp>
       <p:sp>
         <p:nvSpPr>
-          <p:cNvPr id="104410029" name="Shape 21"/>
+          <p:cNvPr id="1198295641" name="Shape 21"/>
           <p:cNvSpPr/>
           <p:nvPr/>
         </p:nvSpPr>
@@ -24069,7 +24142,7 @@
       </p:sp>
       <p:sp>
         <p:nvSpPr>
-          <p:cNvPr id="1561654801" name="Text 22"/>
+          <p:cNvPr id="1320423605" name="Text 22"/>
           <p:cNvSpPr/>
           <p:nvPr/>
         </p:nvSpPr>
@@ -24112,7 +24185,7 @@
       </p:sp>
       <p:sp>
         <p:nvSpPr>
-          <p:cNvPr id="1683354093" name="Shape 23"/>
+          <p:cNvPr id="713439205" name="Shape 23"/>
           <p:cNvSpPr/>
           <p:nvPr/>
         </p:nvSpPr>
@@ -24146,7 +24219,7 @@
       </p:sp>
       <p:sp>
         <p:nvSpPr>
-          <p:cNvPr id="1424191801" name="Shape 24"/>
+          <p:cNvPr id="321095268" name="Shape 24"/>
           <p:cNvSpPr/>
           <p:nvPr/>
         </p:nvSpPr>
@@ -24166,7 +24239,7 @@
       </p:sp>
       <p:pic>
         <p:nvPicPr>
-          <p:cNvPr id="2100245183" name="Image 3" descr="preencoded.png"/>
+          <p:cNvPr id="965432409" name="Image 3" descr="preencoded.png"/>
           <p:cNvPicPr>
             <a:picLocks noChangeAspect="1"/>
           </p:cNvPicPr>
@@ -24188,7 +24261,7 @@
       </p:pic>
       <p:sp>
         <p:nvSpPr>
-          <p:cNvPr id="1151604262" name="Text 25"/>
+          <p:cNvPr id="763425853" name="Text 25"/>
           <p:cNvSpPr/>
           <p:nvPr/>
         </p:nvSpPr>
@@ -24242,7 +24315,7 @@
       </p:sp>
       <p:sp>
         <p:nvSpPr>
-          <p:cNvPr id="673946110" name="Text 26"/>
+          <p:cNvPr id="453331452" name="Text 26"/>
           <p:cNvSpPr/>
           <p:nvPr/>
         </p:nvSpPr>
@@ -24282,7 +24355,7 @@
       </p:sp>
       <p:sp>
         <p:nvSpPr>
-          <p:cNvPr id="1686971955" name="Text 27"/>
+          <p:cNvPr id="1859592870" name="Text 27"/>
           <p:cNvSpPr/>
           <p:nvPr/>
         </p:nvSpPr>
@@ -24362,7 +24435,7 @@
       </p:grpSpPr>
       <p:sp>
         <p:nvSpPr>
-          <p:cNvPr id="1984532170" name="Text 0"/>
+          <p:cNvPr id="317541941" name="Text 0"/>
           <p:cNvSpPr/>
           <p:nvPr/>
         </p:nvSpPr>
@@ -24402,7 +24475,7 @@
       </p:sp>
       <p:sp>
         <p:nvSpPr>
-          <p:cNvPr id="1033809985" name="Text 1"/>
+          <p:cNvPr id="1247508612" name="Text 1"/>
           <p:cNvSpPr/>
           <p:nvPr/>
         </p:nvSpPr>
@@ -24442,7 +24515,7 @@
       </p:sp>
       <p:sp>
         <p:nvSpPr>
-          <p:cNvPr id="872148831" name="Text 2"/>
+          <p:cNvPr id="2085880849" name="Text 2"/>
           <p:cNvSpPr/>
           <p:nvPr/>
         </p:nvSpPr>
@@ -24485,7 +24558,7 @@
       </p:sp>
       <p:sp>
         <p:nvSpPr>
-          <p:cNvPr id="1673623529" name="Shape 3"/>
+          <p:cNvPr id="854488062" name="Shape 3"/>
           <p:cNvSpPr/>
           <p:nvPr/>
         </p:nvSpPr>
@@ -24519,7 +24592,7 @@
       </p:sp>
       <p:sp>
         <p:nvSpPr>
-          <p:cNvPr id="241599502" name="Shape 4"/>
+          <p:cNvPr id="2119571322" name="Shape 4"/>
           <p:cNvSpPr/>
           <p:nvPr/>
         </p:nvSpPr>
@@ -24539,7 +24612,7 @@
       </p:sp>
       <p:pic>
         <p:nvPicPr>
-          <p:cNvPr id="2073273310" name="Image 0" descr="preencoded.png"/>
+          <p:cNvPr id="747503250" name="Image 0" descr="preencoded.png"/>
           <p:cNvPicPr>
             <a:picLocks noChangeAspect="1"/>
           </p:cNvPicPr>
@@ -24561,7 +24634,7 @@
       </p:pic>
       <p:sp>
         <p:nvSpPr>
-          <p:cNvPr id="827782463" name="Text 5"/>
+          <p:cNvPr id="1663836644" name="Text 5"/>
           <p:cNvSpPr/>
           <p:nvPr/>
         </p:nvSpPr>
@@ -24601,7 +24674,7 @@
       </p:sp>
       <p:sp>
         <p:nvSpPr>
-          <p:cNvPr id="851901075" name="Shape 6"/>
+          <p:cNvPr id="1020949358" name="Shape 6"/>
           <p:cNvSpPr/>
           <p:nvPr/>
         </p:nvSpPr>
@@ -24635,7 +24708,7 @@
       </p:sp>
       <p:sp>
         <p:nvSpPr>
-          <p:cNvPr id="691428557" name="Shape 7"/>
+          <p:cNvPr id="1207847356" name="Shape 7"/>
           <p:cNvSpPr/>
           <p:nvPr/>
         </p:nvSpPr>
@@ -24655,7 +24728,7 @@
       </p:sp>
       <p:pic>
         <p:nvPicPr>
-          <p:cNvPr id="171274059" name="Image 1" descr="preencoded.png"/>
+          <p:cNvPr id="571451999" name="Image 1" descr="preencoded.png"/>
           <p:cNvPicPr>
             <a:picLocks noChangeAspect="1"/>
           </p:cNvPicPr>
@@ -24677,7 +24750,7 @@
       </p:pic>
       <p:sp>
         <p:nvSpPr>
-          <p:cNvPr id="1124312606" name="Text 8"/>
+          <p:cNvPr id="966657766" name="Text 8"/>
           <p:cNvSpPr/>
           <p:nvPr/>
         </p:nvSpPr>
@@ -24717,7 +24790,7 @@
       </p:sp>
       <p:sp>
         <p:nvSpPr>
-          <p:cNvPr id="1578952656" name="Shape 9"/>
+          <p:cNvPr id="822913286" name="Shape 9"/>
           <p:cNvSpPr/>
           <p:nvPr/>
         </p:nvSpPr>
@@ -24751,7 +24824,7 @@
       </p:sp>
       <p:sp>
         <p:nvSpPr>
-          <p:cNvPr id="1844250448" name="Shape 10"/>
+          <p:cNvPr id="341230912" name="Shape 10"/>
           <p:cNvSpPr/>
           <p:nvPr/>
         </p:nvSpPr>
@@ -24771,7 +24844,7 @@
       </p:sp>
       <p:pic>
         <p:nvPicPr>
-          <p:cNvPr id="1388546066" name="Image 2" descr="preencoded.png"/>
+          <p:cNvPr id="1097800507" name="Image 2" descr="preencoded.png"/>
           <p:cNvPicPr>
             <a:picLocks noChangeAspect="1"/>
           </p:cNvPicPr>
@@ -24793,7 +24866,7 @@
       </p:pic>
       <p:sp>
         <p:nvSpPr>
-          <p:cNvPr id="376547181" name="Text 11"/>
+          <p:cNvPr id="1636163076" name="Text 11"/>
           <p:cNvSpPr/>
           <p:nvPr/>
         </p:nvSpPr>
@@ -24833,7 +24906,7 @@
       </p:sp>
       <p:sp>
         <p:nvSpPr>
-          <p:cNvPr id="585741731" name="Shape 12"/>
+          <p:cNvPr id="1690925879" name="Shape 12"/>
           <p:cNvSpPr/>
           <p:nvPr/>
         </p:nvSpPr>
@@ -24867,7 +24940,7 @@
       </p:sp>
       <p:sp>
         <p:nvSpPr>
-          <p:cNvPr id="2109753465" name="Shape 13"/>
+          <p:cNvPr id="1662946215" name="Shape 13"/>
           <p:cNvSpPr/>
           <p:nvPr/>
         </p:nvSpPr>
@@ -24887,7 +24960,7 @@
       </p:sp>
       <p:pic>
         <p:nvPicPr>
-          <p:cNvPr id="427091154" name="Image 3" descr="preencoded.png"/>
+          <p:cNvPr id="860243059" name="Image 3" descr="preencoded.png"/>
           <p:cNvPicPr>
             <a:picLocks noChangeAspect="1"/>
           </p:cNvPicPr>
@@ -24909,7 +24982,7 @@
       </p:pic>
       <p:sp>
         <p:nvSpPr>
-          <p:cNvPr id="111351200" name="Text 14"/>
+          <p:cNvPr id="681301169" name="Text 14"/>
           <p:cNvSpPr/>
           <p:nvPr/>
         </p:nvSpPr>
@@ -24949,7 +25022,7 @@
       </p:sp>
       <p:pic>
         <p:nvPicPr>
-          <p:cNvPr id="1440368579" name="Image 4" descr="/home/claude/assets/overview_r.png"/>
+          <p:cNvPr id="879839116" name="Image 4" descr="/home/claude/assets/overview_r.png"/>
           <p:cNvPicPr>
             <a:picLocks noChangeAspect="1"/>
           </p:cNvPicPr>
@@ -24971,7 +25044,7 @@
       </p:pic>
       <p:sp>
         <p:nvSpPr>
-          <p:cNvPr id="386222817" name="Text 15"/>
+          <p:cNvPr id="698992132" name="Text 15"/>
           <p:cNvSpPr/>
           <p:nvPr/>
         </p:nvSpPr>
@@ -25011,7 +25084,7 @@
       </p:sp>
       <p:sp>
         <p:nvSpPr>
-          <p:cNvPr id="1206634058" name="Text 16"/>
+          <p:cNvPr id="383223127" name="Text 16"/>
           <p:cNvSpPr/>
           <p:nvPr/>
         </p:nvSpPr>
@@ -25051,7 +25124,7 @@
       </p:sp>
       <p:sp>
         <p:nvSpPr>
-          <p:cNvPr id="2036790259" name="Text 17"/>
+          <p:cNvPr id="1177465090" name="Text 17"/>
           <p:cNvSpPr/>
           <p:nvPr/>
         </p:nvSpPr>
@@ -25131,7 +25204,7 @@
       </p:grpSpPr>
       <p:sp>
         <p:nvSpPr>
-          <p:cNvPr id="1194113248" name="Text 0"/>
+          <p:cNvPr id="31561208" name="Text 0"/>
           <p:cNvSpPr/>
           <p:nvPr/>
         </p:nvSpPr>
@@ -25171,7 +25244,7 @@
       </p:sp>
       <p:sp>
         <p:nvSpPr>
-          <p:cNvPr id="835406849" name="Text 1"/>
+          <p:cNvPr id="1370059129" name="Text 1"/>
           <p:cNvSpPr/>
           <p:nvPr/>
         </p:nvSpPr>
@@ -25211,7 +25284,7 @@
       </p:sp>
       <p:sp>
         <p:nvSpPr>
-          <p:cNvPr id="1024136598" name="Shape 2"/>
+          <p:cNvPr id="1623288999" name="Shape 2"/>
           <p:cNvSpPr/>
           <p:nvPr/>
         </p:nvSpPr>
@@ -25245,7 +25318,7 @@
       </p:sp>
       <p:pic>
         <p:nvPicPr>
-          <p:cNvPr id="2101083036" name="Image 0" descr="/home/claude/assets/1_start_r.png"/>
+          <p:cNvPr id="1032353518" name="Image 0" descr="/home/claude/assets/1_start_r.png"/>
           <p:cNvPicPr>
             <a:picLocks noChangeAspect="1"/>
           </p:cNvPicPr>
@@ -25267,7 +25340,7 @@
       </p:pic>
       <p:sp>
         <p:nvSpPr>
-          <p:cNvPr id="1339648771" name="Shape 3"/>
+          <p:cNvPr id="1759228684" name="Shape 3"/>
           <p:cNvSpPr/>
           <p:nvPr/>
         </p:nvSpPr>
@@ -25287,7 +25360,7 @@
       </p:sp>
       <p:sp>
         <p:nvSpPr>
-          <p:cNvPr id="302039679" name="Text 4"/>
+          <p:cNvPr id="2056052935" name="Text 4"/>
           <p:cNvSpPr/>
           <p:nvPr/>
         </p:nvSpPr>
@@ -25327,7 +25400,7 @@
       </p:sp>
       <p:sp>
         <p:nvSpPr>
-          <p:cNvPr id="270728777" name="Text 5"/>
+          <p:cNvPr id="1991381091" name="Text 5"/>
           <p:cNvSpPr/>
           <p:nvPr/>
         </p:nvSpPr>
@@ -25367,7 +25440,7 @@
       </p:sp>
       <p:sp>
         <p:nvSpPr>
-          <p:cNvPr id="458426170" name="Text 6"/>
+          <p:cNvPr id="612824641" name="Text 6"/>
           <p:cNvSpPr/>
           <p:nvPr/>
         </p:nvSpPr>
@@ -25407,7 +25480,7 @@
       </p:sp>
       <p:sp>
         <p:nvSpPr>
-          <p:cNvPr id="544145709" name="Shape 7"/>
+          <p:cNvPr id="1493584733" name="Shape 7"/>
           <p:cNvSpPr/>
           <p:nvPr/>
         </p:nvSpPr>
@@ -25441,7 +25514,7 @@
       </p:sp>
       <p:pic>
         <p:nvPicPr>
-          <p:cNvPr id="634913816" name="Image 1" descr="/home/claude/assets/2_problem_r.png"/>
+          <p:cNvPr id="2067097003" name="Image 1" descr="/home/claude/assets/2_problem_r.png"/>
           <p:cNvPicPr>
             <a:picLocks noChangeAspect="1"/>
           </p:cNvPicPr>
@@ -25463,7 +25536,7 @@
       </p:pic>
       <p:sp>
         <p:nvSpPr>
-          <p:cNvPr id="1900358547" name="Shape 8"/>
+          <p:cNvPr id="672562652" name="Shape 8"/>
           <p:cNvSpPr/>
           <p:nvPr/>
         </p:nvSpPr>
@@ -25483,7 +25556,7 @@
       </p:sp>
       <p:sp>
         <p:nvSpPr>
-          <p:cNvPr id="1854942144" name="Text 9"/>
+          <p:cNvPr id="2130677569" name="Text 9"/>
           <p:cNvSpPr/>
           <p:nvPr/>
         </p:nvSpPr>
@@ -25523,7 +25596,7 @@
       </p:sp>
       <p:sp>
         <p:nvSpPr>
-          <p:cNvPr id="1644497929" name="Text 10"/>
+          <p:cNvPr id="1874179857" name="Text 10"/>
           <p:cNvSpPr/>
           <p:nvPr/>
         </p:nvSpPr>
@@ -25563,7 +25636,7 @@
       </p:sp>
       <p:sp>
         <p:nvSpPr>
-          <p:cNvPr id="902203317" name="Text 11"/>
+          <p:cNvPr id="1693370424" name="Text 11"/>
           <p:cNvSpPr/>
           <p:nvPr/>
         </p:nvSpPr>
@@ -25603,7 +25676,7 @@
       </p:sp>
       <p:sp>
         <p:nvSpPr>
-          <p:cNvPr id="516067038" name="Shape 12"/>
+          <p:cNvPr id="1890722972" name="Shape 12"/>
           <p:cNvSpPr/>
           <p:nvPr/>
         </p:nvSpPr>
@@ -25637,7 +25710,7 @@
       </p:sp>
       <p:pic>
         <p:nvPicPr>
-          <p:cNvPr id="73365113" name="Image 2" descr="/home/claude/assets/3_loesung_r.png"/>
+          <p:cNvPr id="1086459554" name="Image 2" descr="/home/claude/assets/3_loesung_r.png"/>
           <p:cNvPicPr>
             <a:picLocks noChangeAspect="1"/>
           </p:cNvPicPr>
@@ -25659,7 +25732,7 @@
       </p:pic>
       <p:sp>
         <p:nvSpPr>
-          <p:cNvPr id="555675267" name="Shape 13"/>
+          <p:cNvPr id="1357786" name="Shape 13"/>
           <p:cNvSpPr/>
           <p:nvPr/>
         </p:nvSpPr>
@@ -25679,7 +25752,7 @@
       </p:sp>
       <p:sp>
         <p:nvSpPr>
-          <p:cNvPr id="1100103600" name="Text 14"/>
+          <p:cNvPr id="868078361" name="Text 14"/>
           <p:cNvSpPr/>
           <p:nvPr/>
         </p:nvSpPr>
@@ -25719,7 +25792,7 @@
       </p:sp>
       <p:sp>
         <p:nvSpPr>
-          <p:cNvPr id="603103246" name="Text 15"/>
+          <p:cNvPr id="1079182347" name="Text 15"/>
           <p:cNvSpPr/>
           <p:nvPr/>
         </p:nvSpPr>
@@ -25759,7 +25832,7 @@
       </p:sp>
       <p:sp>
         <p:nvSpPr>
-          <p:cNvPr id="455661245" name="Text 16"/>
+          <p:cNvPr id="1202073678" name="Text 16"/>
           <p:cNvSpPr/>
           <p:nvPr/>
         </p:nvSpPr>
@@ -25799,7 +25872,7 @@
       </p:sp>
       <p:sp>
         <p:nvSpPr>
-          <p:cNvPr id="1676051759" name="Shape 17"/>
+          <p:cNvPr id="1533565483" name="Shape 17"/>
           <p:cNvSpPr/>
           <p:nvPr/>
         </p:nvSpPr>
@@ -25833,7 +25906,7 @@
       </p:sp>
       <p:pic>
         <p:nvPicPr>
-          <p:cNvPr id="1533976146" name="Image 3" descr="/home/claude/assets/4_name_r.png"/>
+          <p:cNvPr id="1010425106" name="Image 3" descr="/home/claude/assets/4_name_r.png"/>
           <p:cNvPicPr>
             <a:picLocks noChangeAspect="1"/>
           </p:cNvPicPr>
@@ -25855,7 +25928,7 @@
       </p:pic>
       <p:sp>
         <p:nvSpPr>
-          <p:cNvPr id="1418652471" name="Shape 18"/>
+          <p:cNvPr id="1073300268" name="Shape 18"/>
           <p:cNvSpPr/>
           <p:nvPr/>
         </p:nvSpPr>
@@ -25875,7 +25948,7 @@
       </p:sp>
       <p:sp>
         <p:nvSpPr>
-          <p:cNvPr id="446444505" name="Text 19"/>
+          <p:cNvPr id="1353277841" name="Text 19"/>
           <p:cNvSpPr/>
           <p:nvPr/>
         </p:nvSpPr>
@@ -25915,7 +25988,7 @@
       </p:sp>
       <p:sp>
         <p:nvSpPr>
-          <p:cNvPr id="543263448" name="Text 20"/>
+          <p:cNvPr id="1301570203" name="Text 20"/>
           <p:cNvSpPr/>
           <p:nvPr/>
         </p:nvSpPr>
@@ -25955,7 +26028,7 @@
       </p:sp>
       <p:sp>
         <p:nvSpPr>
-          <p:cNvPr id="1010442671" name="Text 21"/>
+          <p:cNvPr id="1619774635" name="Text 21"/>
           <p:cNvSpPr/>
           <p:nvPr/>
         </p:nvSpPr>
@@ -25995,7 +26068,7 @@
       </p:sp>
       <p:sp>
         <p:nvSpPr>
-          <p:cNvPr id="389347064" name="Shape 22"/>
+          <p:cNvPr id="1978852171" name="Shape 22"/>
           <p:cNvSpPr/>
           <p:nvPr/>
         </p:nvSpPr>
@@ -26029,7 +26102,7 @@
       </p:sp>
       <p:pic>
         <p:nvPicPr>
-          <p:cNvPr id="302269291" name="Image 4" descr="/home/claude/assets/5_senden_r.png"/>
+          <p:cNvPr id="1420147989" name="Image 4" descr="/home/claude/assets/5_senden_r.png"/>
           <p:cNvPicPr>
             <a:picLocks noChangeAspect="1"/>
           </p:cNvPicPr>
@@ -26051,7 +26124,7 @@
       </p:pic>
       <p:sp>
         <p:nvSpPr>
-          <p:cNvPr id="92988679" name="Shape 23"/>
+          <p:cNvPr id="1616881075" name="Shape 23"/>
           <p:cNvSpPr/>
           <p:nvPr/>
         </p:nvSpPr>
@@ -26071,7 +26144,7 @@
       </p:sp>
       <p:sp>
         <p:nvSpPr>
-          <p:cNvPr id="239204714" name="Text 24"/>
+          <p:cNvPr id="713042446" name="Text 24"/>
           <p:cNvSpPr/>
           <p:nvPr/>
         </p:nvSpPr>
@@ -26111,7 +26184,7 @@
       </p:sp>
       <p:sp>
         <p:nvSpPr>
-          <p:cNvPr id="784137406" name="Text 25"/>
+          <p:cNvPr id="828658815" name="Text 25"/>
           <p:cNvSpPr/>
           <p:nvPr/>
         </p:nvSpPr>
@@ -26151,7 +26224,7 @@
       </p:sp>
       <p:sp>
         <p:nvSpPr>
-          <p:cNvPr id="1402884116" name="Text 26"/>
+          <p:cNvPr id="1681127497" name="Text 26"/>
           <p:cNvSpPr/>
           <p:nvPr/>
         </p:nvSpPr>
@@ -26191,7 +26264,7 @@
       </p:sp>
       <p:sp>
         <p:nvSpPr>
-          <p:cNvPr id="369178657" name="Shape 27"/>
+          <p:cNvPr id="1999068329" name="Shape 27"/>
           <p:cNvSpPr/>
           <p:nvPr/>
         </p:nvSpPr>
@@ -26225,7 +26298,7 @@
       </p:sp>
       <p:pic>
         <p:nvPicPr>
-          <p:cNvPr id="824410302" name="Image 5" descr="/home/claude/assets/6_fertig_r.png"/>
+          <p:cNvPr id="2022324635" name="Image 5" descr="/home/claude/assets/6_fertig_r.png"/>
           <p:cNvPicPr>
             <a:picLocks noChangeAspect="1"/>
           </p:cNvPicPr>
@@ -26247,7 +26320,7 @@
       </p:pic>
       <p:sp>
         <p:nvSpPr>
-          <p:cNvPr id="1323324306" name="Shape 28"/>
+          <p:cNvPr id="1208445801" name="Shape 28"/>
           <p:cNvSpPr/>
           <p:nvPr/>
         </p:nvSpPr>
@@ -26267,7 +26340,7 @@
       </p:sp>
       <p:sp>
         <p:nvSpPr>
-          <p:cNvPr id="1704835030" name="Text 29"/>
+          <p:cNvPr id="908926285" name="Text 29"/>
           <p:cNvSpPr/>
           <p:nvPr/>
         </p:nvSpPr>
@@ -26307,7 +26380,7 @@
       </p:sp>
       <p:sp>
         <p:nvSpPr>
-          <p:cNvPr id="811543673" name="Text 30"/>
+          <p:cNvPr id="492883467" name="Text 30"/>
           <p:cNvSpPr/>
           <p:nvPr/>
         </p:nvSpPr>
@@ -26347,7 +26420,7 @@
       </p:sp>
       <p:sp>
         <p:nvSpPr>
-          <p:cNvPr id="190924121" name="Text 31"/>
+          <p:cNvPr id="182333577" name="Text 31"/>
           <p:cNvSpPr/>
           <p:nvPr/>
         </p:nvSpPr>
@@ -26387,7 +26460,7 @@
       </p:sp>
       <p:sp>
         <p:nvSpPr>
-          <p:cNvPr id="435660461" name="Text 32"/>
+          <p:cNvPr id="1931116301" name="Text 32"/>
           <p:cNvSpPr/>
           <p:nvPr/>
         </p:nvSpPr>
@@ -26438,7 +26511,7 @@
       </p:sp>
       <p:sp>
         <p:nvSpPr>
-          <p:cNvPr id="1900208268" name="Text 33"/>
+          <p:cNvPr id="739704612" name="Text 33"/>
           <p:cNvSpPr/>
           <p:nvPr/>
         </p:nvSpPr>
@@ -26478,7 +26551,7 @@
       </p:sp>
       <p:sp>
         <p:nvSpPr>
-          <p:cNvPr id="694622258" name="Text 34"/>
+          <p:cNvPr id="213866470" name="Text 34"/>
           <p:cNvSpPr/>
           <p:nvPr/>
         </p:nvSpPr>
@@ -26558,7 +26631,7 @@
       </p:grpSpPr>
       <p:sp>
         <p:nvSpPr>
-          <p:cNvPr id="1610866748" name="Text 0"/>
+          <p:cNvPr id="1816906329" name="Text 0"/>
           <p:cNvSpPr/>
           <p:nvPr/>
         </p:nvSpPr>
@@ -26598,7 +26671,7 @@
       </p:sp>
       <p:sp>
         <p:nvSpPr>
-          <p:cNvPr id="1615450254" name="Text 1"/>
+          <p:cNvPr id="1628518424" name="Text 1"/>
           <p:cNvSpPr/>
           <p:nvPr/>
         </p:nvSpPr>
@@ -26638,7 +26711,7 @@
       </p:sp>
       <p:sp>
         <p:nvSpPr>
-          <p:cNvPr id="1022068309" name="Shape 2"/>
+          <p:cNvPr id="1101834833" name="Shape 2"/>
           <p:cNvSpPr/>
           <p:nvPr/>
         </p:nvSpPr>
@@ -26660,7 +26733,7 @@
       </p:sp>
       <p:sp>
         <p:nvSpPr>
-          <p:cNvPr id="1593952925" name="Text 3"/>
+          <p:cNvPr id="1801184872" name="Text 3"/>
           <p:cNvSpPr/>
           <p:nvPr/>
         </p:nvSpPr>
@@ -26700,7 +26773,7 @@
       </p:sp>
       <p:sp>
         <p:nvSpPr>
-          <p:cNvPr id="1581930022" name="Shape 4"/>
+          <p:cNvPr id="1325290630" name="Shape 4"/>
           <p:cNvSpPr/>
           <p:nvPr/>
         </p:nvSpPr>
@@ -26734,7 +26807,7 @@
       </p:sp>
       <p:sp>
         <p:nvSpPr>
-          <p:cNvPr id="631246577" name="Shape 5"/>
+          <p:cNvPr id="29053888" name="Shape 5"/>
           <p:cNvSpPr/>
           <p:nvPr/>
         </p:nvSpPr>
@@ -26754,7 +26827,7 @@
       </p:sp>
       <p:pic>
         <p:nvPicPr>
-          <p:cNvPr id="1192558455" name="Image 0" descr="preencoded.png"/>
+          <p:cNvPr id="1367342328" name="Image 0" descr="preencoded.png"/>
           <p:cNvPicPr>
             <a:picLocks noChangeAspect="1"/>
           </p:cNvPicPr>
@@ -26776,7 +26849,7 @@
       </p:pic>
       <p:sp>
         <p:nvSpPr>
-          <p:cNvPr id="1510790385" name="Text 6"/>
+          <p:cNvPr id="2021875356" name="Text 6"/>
           <p:cNvSpPr/>
           <p:nvPr/>
         </p:nvSpPr>
@@ -26816,7 +26889,7 @@
       </p:sp>
       <p:sp>
         <p:nvSpPr>
-          <p:cNvPr id="1274795806" name="Text 7"/>
+          <p:cNvPr id="973397134" name="Text 7"/>
           <p:cNvSpPr/>
           <p:nvPr/>
         </p:nvSpPr>
@@ -26856,7 +26929,7 @@
       </p:sp>
       <p:sp>
         <p:nvSpPr>
-          <p:cNvPr id="1735115489" name="Shape 8"/>
+          <p:cNvPr id="1573592279" name="Shape 8"/>
           <p:cNvSpPr/>
           <p:nvPr/>
         </p:nvSpPr>
@@ -26890,7 +26963,7 @@
       </p:sp>
       <p:sp>
         <p:nvSpPr>
-          <p:cNvPr id="841557054" name="Shape 9"/>
+          <p:cNvPr id="1226929526" name="Shape 9"/>
           <p:cNvSpPr/>
           <p:nvPr/>
         </p:nvSpPr>
@@ -26910,7 +26983,7 @@
       </p:sp>
       <p:pic>
         <p:nvPicPr>
-          <p:cNvPr id="584420218" name="Image 1" descr="preencoded.png"/>
+          <p:cNvPr id="276303078" name="Image 1" descr="preencoded.png"/>
           <p:cNvPicPr>
             <a:picLocks noChangeAspect="1"/>
           </p:cNvPicPr>
@@ -26932,7 +27005,7 @@
       </p:pic>
       <p:sp>
         <p:nvSpPr>
-          <p:cNvPr id="366201916" name="Text 10"/>
+          <p:cNvPr id="1375007316" name="Text 10"/>
           <p:cNvSpPr/>
           <p:nvPr/>
         </p:nvSpPr>
@@ -26972,7 +27045,7 @@
       </p:sp>
       <p:sp>
         <p:nvSpPr>
-          <p:cNvPr id="1839975065" name="Text 11"/>
+          <p:cNvPr id="1381188913" name="Text 11"/>
           <p:cNvSpPr/>
           <p:nvPr/>
         </p:nvSpPr>
@@ -27012,7 +27085,7 @@
       </p:sp>
       <p:sp>
         <p:nvSpPr>
-          <p:cNvPr id="42710202" name="Shape 12"/>
+          <p:cNvPr id="1713474744" name="Shape 12"/>
           <p:cNvSpPr/>
           <p:nvPr/>
         </p:nvSpPr>
@@ -27046,7 +27119,7 @@
       </p:sp>
       <p:sp>
         <p:nvSpPr>
-          <p:cNvPr id="1248575333" name="Shape 13"/>
+          <p:cNvPr id="369897494" name="Shape 13"/>
           <p:cNvSpPr/>
           <p:nvPr/>
         </p:nvSpPr>
@@ -27066,7 +27139,7 @@
       </p:sp>
       <p:pic>
         <p:nvPicPr>
-          <p:cNvPr id="895624080" name="Image 2" descr="preencoded.png"/>
+          <p:cNvPr id="30371817" name="Image 2" descr="preencoded.png"/>
           <p:cNvPicPr>
             <a:picLocks noChangeAspect="1"/>
           </p:cNvPicPr>
@@ -27088,7 +27161,7 @@
       </p:pic>
       <p:sp>
         <p:nvSpPr>
-          <p:cNvPr id="275558400" name="Text 14"/>
+          <p:cNvPr id="1083469366" name="Text 14"/>
           <p:cNvSpPr/>
           <p:nvPr/>
         </p:nvSpPr>
@@ -27128,7 +27201,7 @@
       </p:sp>
       <p:sp>
         <p:nvSpPr>
-          <p:cNvPr id="50914878" name="Text 15"/>
+          <p:cNvPr id="1162762396" name="Text 15"/>
           <p:cNvSpPr/>
           <p:nvPr/>
         </p:nvSpPr>
@@ -27168,7 +27241,7 @@
       </p:sp>
       <p:sp>
         <p:nvSpPr>
-          <p:cNvPr id="811634641" name="Shape 16"/>
+          <p:cNvPr id="677217074" name="Shape 16"/>
           <p:cNvSpPr/>
           <p:nvPr/>
         </p:nvSpPr>
@@ -27202,7 +27275,7 @@
       </p:sp>
       <p:sp>
         <p:nvSpPr>
-          <p:cNvPr id="1301364769" name="Shape 17"/>
+          <p:cNvPr id="284435007" name="Shape 17"/>
           <p:cNvSpPr/>
           <p:nvPr/>
         </p:nvSpPr>
@@ -27222,7 +27295,7 @@
       </p:sp>
       <p:pic>
         <p:nvPicPr>
-          <p:cNvPr id="130436288" name="Image 3" descr="preencoded.png"/>
+          <p:cNvPr id="871266548" name="Image 3" descr="preencoded.png"/>
           <p:cNvPicPr>
             <a:picLocks noChangeAspect="1"/>
           </p:cNvPicPr>
@@ -27244,7 +27317,7 @@
       </p:pic>
       <p:sp>
         <p:nvSpPr>
-          <p:cNvPr id="1215241093" name="Text 18"/>
+          <p:cNvPr id="64241566" name="Text 18"/>
           <p:cNvSpPr/>
           <p:nvPr/>
         </p:nvSpPr>
@@ -27284,7 +27357,7 @@
       </p:sp>
       <p:sp>
         <p:nvSpPr>
-          <p:cNvPr id="330062623" name="Text 19"/>
+          <p:cNvPr id="1141556207" name="Text 19"/>
           <p:cNvSpPr/>
           <p:nvPr/>
         </p:nvSpPr>
@@ -27324,7 +27397,7 @@
       </p:sp>
       <p:sp>
         <p:nvSpPr>
-          <p:cNvPr id="347717762" name="Shape 20"/>
+          <p:cNvPr id="507746266" name="Shape 20"/>
           <p:cNvSpPr/>
           <p:nvPr/>
         </p:nvSpPr>
@@ -27358,7 +27431,7 @@
       </p:sp>
       <p:sp>
         <p:nvSpPr>
-          <p:cNvPr id="208204352" name="Shape 21"/>
+          <p:cNvPr id="1137516253" name="Shape 21"/>
           <p:cNvSpPr/>
           <p:nvPr/>
         </p:nvSpPr>
@@ -27378,7 +27451,7 @@
       </p:sp>
       <p:pic>
         <p:nvPicPr>
-          <p:cNvPr id="2072292332" name="Image 4" descr="preencoded.png"/>
+          <p:cNvPr id="7099819" name="Image 4" descr="preencoded.png"/>
           <p:cNvPicPr>
             <a:picLocks noChangeAspect="1"/>
           </p:cNvPicPr>
@@ -27400,7 +27473,7 @@
       </p:pic>
       <p:sp>
         <p:nvSpPr>
-          <p:cNvPr id="258922410" name="Text 22"/>
+          <p:cNvPr id="1781716004" name="Text 22"/>
           <p:cNvSpPr/>
           <p:nvPr/>
         </p:nvSpPr>
@@ -27440,7 +27513,7 @@
       </p:sp>
       <p:sp>
         <p:nvSpPr>
-          <p:cNvPr id="1058181129" name="Text 23"/>
+          <p:cNvPr id="1373821156" name="Text 23"/>
           <p:cNvSpPr/>
           <p:nvPr/>
         </p:nvSpPr>
@@ -27480,7 +27553,7 @@
       </p:sp>
       <p:sp>
         <p:nvSpPr>
-          <p:cNvPr id="1059029410" name="Shape 24"/>
+          <p:cNvPr id="1807912207" name="Shape 24"/>
           <p:cNvSpPr/>
           <p:nvPr/>
         </p:nvSpPr>
@@ -27514,7 +27587,7 @@
       </p:sp>
       <p:sp>
         <p:nvSpPr>
-          <p:cNvPr id="68120106" name="Shape 25"/>
+          <p:cNvPr id="1689789863" name="Shape 25"/>
           <p:cNvSpPr/>
           <p:nvPr/>
         </p:nvSpPr>
@@ -27534,7 +27607,7 @@
       </p:sp>
       <p:pic>
         <p:nvPicPr>
-          <p:cNvPr id="1572244200" name="Image 5" descr="preencoded.png"/>
+          <p:cNvPr id="831667607" name="Image 5" descr="preencoded.png"/>
           <p:cNvPicPr>
             <a:picLocks noChangeAspect="1"/>
           </p:cNvPicPr>
@@ -27556,7 +27629,7 @@
       </p:pic>
       <p:sp>
         <p:nvSpPr>
-          <p:cNvPr id="1438834213" name="Text 26"/>
+          <p:cNvPr id="1483254751" name="Text 26"/>
           <p:cNvSpPr/>
           <p:nvPr/>
         </p:nvSpPr>
@@ -27596,7 +27669,7 @@
       </p:sp>
       <p:sp>
         <p:nvSpPr>
-          <p:cNvPr id="1382574800" name="Text 27"/>
+          <p:cNvPr id="2014818992" name="Text 27"/>
           <p:cNvSpPr/>
           <p:nvPr/>
         </p:nvSpPr>
@@ -27636,7 +27709,7 @@
       </p:sp>
       <p:sp>
         <p:nvSpPr>
-          <p:cNvPr id="1018314027" name="Shape 28"/>
+          <p:cNvPr id="1709024826" name="Shape 28"/>
           <p:cNvSpPr/>
           <p:nvPr/>
         </p:nvSpPr>
@@ -27658,7 +27731,7 @@
       </p:sp>
       <p:sp>
         <p:nvSpPr>
-          <p:cNvPr id="390131707" name="Text 29"/>
+          <p:cNvPr id="1467324134" name="Text 29"/>
           <p:cNvSpPr/>
           <p:nvPr/>
         </p:nvSpPr>
@@ -27698,7 +27771,7 @@
       </p:sp>
       <p:sp>
         <p:nvSpPr>
-          <p:cNvPr id="918097770" name="Text 30"/>
+          <p:cNvPr id="1255390106" name="Text 30"/>
           <p:cNvSpPr/>
           <p:nvPr/>
         </p:nvSpPr>
@@ -27741,7 +27814,7 @@
       </p:sp>
       <p:sp>
         <p:nvSpPr>
-          <p:cNvPr id="623459906" name="Shape 31"/>
+          <p:cNvPr id="1657832645" name="Shape 31"/>
           <p:cNvSpPr/>
           <p:nvPr/>
         </p:nvSpPr>
@@ -27775,7 +27848,7 @@
       </p:sp>
       <p:pic>
         <p:nvPicPr>
-          <p:cNvPr id="992430776" name="Image 6" descr="/home/claude/assets/7_verwaltung_r.png"/>
+          <p:cNvPr id="1842869621" name="Image 6" descr="/home/claude/assets/7_verwaltung_r.png"/>
           <p:cNvPicPr>
             <a:picLocks noChangeAspect="1"/>
           </p:cNvPicPr>
@@ -27797,7 +27870,7 @@
       </p:pic>
       <p:sp>
         <p:nvSpPr>
-          <p:cNvPr id="143342036" name="Text 32"/>
+          <p:cNvPr id="621886449" name="Text 32"/>
           <p:cNvSpPr/>
           <p:nvPr/>
         </p:nvSpPr>
@@ -27840,7 +27913,7 @@
       </p:sp>
       <p:sp>
         <p:nvSpPr>
-          <p:cNvPr id="497810074" name="Text 33"/>
+          <p:cNvPr id="1119168075" name="Text 33"/>
           <p:cNvSpPr/>
           <p:nvPr/>
         </p:nvSpPr>
@@ -27880,7 +27953,7 @@
       </p:sp>
       <p:sp>
         <p:nvSpPr>
-          <p:cNvPr id="957421156" name="Text 34"/>
+          <p:cNvPr id="975831951" name="Text 34"/>
           <p:cNvSpPr/>
           <p:nvPr/>
         </p:nvSpPr>
@@ -27920,7 +27993,7 @@
       </p:sp>
       <p:sp>
         <p:nvSpPr>
-          <p:cNvPr id="774254986" name="Text 35"/>
+          <p:cNvPr id="648064418" name="Text 35"/>
           <p:cNvSpPr/>
           <p:nvPr/>
         </p:nvSpPr>
@@ -28000,7 +28073,7 @@
       </p:grpSpPr>
       <p:sp>
         <p:nvSpPr>
-          <p:cNvPr id="1588583830" name="Text 0"/>
+          <p:cNvPr id="1423479068" name="Text 0"/>
           <p:cNvSpPr/>
           <p:nvPr/>
         </p:nvSpPr>
@@ -28040,7 +28113,7 @@
       </p:sp>
       <p:sp>
         <p:nvSpPr>
-          <p:cNvPr id="1134511069" name="Text 1"/>
+          <p:cNvPr id="1962756630" name="Text 1"/>
           <p:cNvSpPr/>
           <p:nvPr/>
         </p:nvSpPr>
@@ -28080,7 +28153,7 @@
       </p:sp>
       <p:sp>
         <p:nvSpPr>
-          <p:cNvPr id="1915262335" name="Shape 2"/>
+          <p:cNvPr id="1380879668" name="Shape 2"/>
           <p:cNvSpPr/>
           <p:nvPr/>
         </p:nvSpPr>
@@ -28114,7 +28187,7 @@
       </p:sp>
       <p:sp>
         <p:nvSpPr>
-          <p:cNvPr id="982731504" name="Shape 3"/>
+          <p:cNvPr id="1534424870" name="Shape 3"/>
           <p:cNvSpPr/>
           <p:nvPr/>
         </p:nvSpPr>
@@ -28134,7 +28207,7 @@
       </p:sp>
       <p:pic>
         <p:nvPicPr>
-          <p:cNvPr id="228129950" name="Image 0" descr="preencoded.png"/>
+          <p:cNvPr id="374171996" name="Image 0" descr="preencoded.png"/>
           <p:cNvPicPr>
             <a:picLocks noChangeAspect="1"/>
           </p:cNvPicPr>
@@ -28156,7 +28229,7 @@
       </p:pic>
       <p:sp>
         <p:nvSpPr>
-          <p:cNvPr id="1811820329" name="Text 4"/>
+          <p:cNvPr id="2129738764" name="Text 4"/>
           <p:cNvSpPr/>
           <p:nvPr/>
         </p:nvSpPr>
@@ -28196,7 +28269,7 @@
       </p:sp>
       <p:sp>
         <p:nvSpPr>
-          <p:cNvPr id="418697971" name="Text 5"/>
+          <p:cNvPr id="1616821788" name="Text 5"/>
           <p:cNvSpPr/>
           <p:nvPr/>
         </p:nvSpPr>
@@ -28236,7 +28309,7 @@
       </p:sp>
       <p:sp>
         <p:nvSpPr>
-          <p:cNvPr id="1690825609" name="Shape 6"/>
+          <p:cNvPr id="1591267933" name="Shape 6"/>
           <p:cNvSpPr/>
           <p:nvPr/>
         </p:nvSpPr>
@@ -28259,7 +28332,7 @@
       </p:sp>
       <p:sp>
         <p:nvSpPr>
-          <p:cNvPr id="1211074912" name="Text 7"/>
+          <p:cNvPr id="1122287430" name="Text 7"/>
           <p:cNvSpPr/>
           <p:nvPr/>
         </p:nvSpPr>
@@ -28333,7 +28406,7 @@
       </p:sp>
       <p:sp>
         <p:nvSpPr>
-          <p:cNvPr id="1853659117" name="Shape 8"/>
+          <p:cNvPr id="1330580503" name="Shape 8"/>
           <p:cNvSpPr/>
           <p:nvPr/>
         </p:nvSpPr>
@@ -28355,7 +28428,7 @@
       </p:sp>
       <p:sp>
         <p:nvSpPr>
-          <p:cNvPr id="1011632533" name="Shape 9"/>
+          <p:cNvPr id="843130259" name="Shape 9"/>
           <p:cNvSpPr/>
           <p:nvPr/>
         </p:nvSpPr>
@@ -28377,7 +28450,7 @@
       </p:sp>
       <p:sp>
         <p:nvSpPr>
-          <p:cNvPr id="2097022675" name="Shape 10"/>
+          <p:cNvPr id="278309806" name="Shape 10"/>
           <p:cNvSpPr/>
           <p:nvPr/>
         </p:nvSpPr>
@@ -28399,7 +28472,7 @@
       </p:sp>
       <p:sp>
         <p:nvSpPr>
-          <p:cNvPr id="1160233553" name="Shape 11"/>
+          <p:cNvPr id="728826299" name="Shape 11"/>
           <p:cNvSpPr/>
           <p:nvPr/>
         </p:nvSpPr>
@@ -28421,7 +28494,7 @@
       </p:sp>
       <p:sp>
         <p:nvSpPr>
-          <p:cNvPr id="1487034929" name="Shape 12"/>
+          <p:cNvPr id="1205258110" name="Shape 12"/>
           <p:cNvSpPr/>
           <p:nvPr/>
         </p:nvSpPr>
@@ -28443,7 +28516,7 @@
       </p:sp>
       <p:sp>
         <p:nvSpPr>
-          <p:cNvPr id="45230265" name="Shape 13"/>
+          <p:cNvPr id="317166287" name="Shape 13"/>
           <p:cNvSpPr/>
           <p:nvPr/>
         </p:nvSpPr>
@@ -28465,7 +28538,7 @@
       </p:sp>
       <p:sp>
         <p:nvSpPr>
-          <p:cNvPr id="95718274" name="Shape 14"/>
+          <p:cNvPr id="1430813971" name="Shape 14"/>
           <p:cNvSpPr/>
           <p:nvPr/>
         </p:nvSpPr>
@@ -28487,7 +28560,7 @@
       </p:sp>
       <p:sp>
         <p:nvSpPr>
-          <p:cNvPr id="589407386" name="Shape 15"/>
+          <p:cNvPr id="919532940" name="Shape 15"/>
           <p:cNvSpPr/>
           <p:nvPr/>
         </p:nvSpPr>
@@ -28509,7 +28582,7 @@
       </p:sp>
       <p:sp>
         <p:nvSpPr>
-          <p:cNvPr id="186458833" name="Shape 16"/>
+          <p:cNvPr id="378308916" name="Shape 16"/>
           <p:cNvSpPr/>
           <p:nvPr/>
         </p:nvSpPr>
@@ -28531,7 +28604,7 @@
       </p:sp>
       <p:sp>
         <p:nvSpPr>
-          <p:cNvPr id="1997737664" name="Shape 17"/>
+          <p:cNvPr id="877095120" name="Shape 17"/>
           <p:cNvSpPr/>
           <p:nvPr/>
         </p:nvSpPr>
@@ -28553,7 +28626,7 @@
       </p:sp>
       <p:sp>
         <p:nvSpPr>
-          <p:cNvPr id="562999536" name="Shape 18"/>
+          <p:cNvPr id="8481972" name="Shape 18"/>
           <p:cNvSpPr/>
           <p:nvPr/>
         </p:nvSpPr>
@@ -28575,7 +28648,7 @@
       </p:sp>
       <p:sp>
         <p:nvSpPr>
-          <p:cNvPr id="1602228389" name="Shape 19"/>
+          <p:cNvPr id="1024676606" name="Shape 19"/>
           <p:cNvSpPr/>
           <p:nvPr/>
         </p:nvSpPr>
@@ -28597,7 +28670,7 @@
       </p:sp>
       <p:sp>
         <p:nvSpPr>
-          <p:cNvPr id="1117977636" name="Shape 20"/>
+          <p:cNvPr id="316857526" name="Shape 20"/>
           <p:cNvSpPr/>
           <p:nvPr/>
         </p:nvSpPr>
@@ -28619,7 +28692,7 @@
       </p:sp>
       <p:sp>
         <p:nvSpPr>
-          <p:cNvPr id="238558732" name="Shape 21"/>
+          <p:cNvPr id="107682951" name="Shape 21"/>
           <p:cNvSpPr/>
           <p:nvPr/>
         </p:nvSpPr>
@@ -28641,7 +28714,7 @@
       </p:sp>
       <p:sp>
         <p:nvSpPr>
-          <p:cNvPr id="2127238415" name="Shape 22"/>
+          <p:cNvPr id="1034949127" name="Shape 22"/>
           <p:cNvSpPr/>
           <p:nvPr/>
         </p:nvSpPr>
@@ -28663,7 +28736,7 @@
       </p:sp>
       <p:sp>
         <p:nvSpPr>
-          <p:cNvPr id="1195412248" name="Shape 23"/>
+          <p:cNvPr id="1224529048" name="Shape 23"/>
           <p:cNvSpPr/>
           <p:nvPr/>
         </p:nvSpPr>
@@ -28685,7 +28758,7 @@
       </p:sp>
       <p:sp>
         <p:nvSpPr>
-          <p:cNvPr id="1632373428" name="Shape 24"/>
+          <p:cNvPr id="2100805936" name="Shape 24"/>
           <p:cNvSpPr/>
           <p:nvPr/>
         </p:nvSpPr>
@@ -28707,7 +28780,7 @@
       </p:sp>
       <p:sp>
         <p:nvSpPr>
-          <p:cNvPr id="892534236" name="Shape 25"/>
+          <p:cNvPr id="1684262872" name="Shape 25"/>
           <p:cNvSpPr/>
           <p:nvPr/>
         </p:nvSpPr>
@@ -28729,7 +28802,7 @@
       </p:sp>
       <p:sp>
         <p:nvSpPr>
-          <p:cNvPr id="197651502" name="Shape 26"/>
+          <p:cNvPr id="326933392" name="Shape 26"/>
           <p:cNvSpPr/>
           <p:nvPr/>
         </p:nvSpPr>
@@ -28751,7 +28824,7 @@
       </p:sp>
       <p:sp>
         <p:nvSpPr>
-          <p:cNvPr id="1508300074" name="Shape 27"/>
+          <p:cNvPr id="1700385147" name="Shape 27"/>
           <p:cNvSpPr/>
           <p:nvPr/>
         </p:nvSpPr>
@@ -28773,7 +28846,7 @@
       </p:sp>
       <p:sp>
         <p:nvSpPr>
-          <p:cNvPr id="494790880" name="Text 28"/>
+          <p:cNvPr id="863314267" name="Text 28"/>
           <p:cNvSpPr/>
           <p:nvPr/>
         </p:nvSpPr>
@@ -28813,7 +28886,7 @@
       </p:sp>
       <p:sp>
         <p:nvSpPr>
-          <p:cNvPr id="642861806" name="Shape 29"/>
+          <p:cNvPr id="831054161" name="Shape 29"/>
           <p:cNvSpPr/>
           <p:nvPr/>
         </p:nvSpPr>
@@ -28847,7 +28920,7 @@
       </p:sp>
       <p:sp>
         <p:nvSpPr>
-          <p:cNvPr id="1380190706" name="Shape 30"/>
+          <p:cNvPr id="970444153" name="Shape 30"/>
           <p:cNvSpPr/>
           <p:nvPr/>
         </p:nvSpPr>
@@ -28874,7 +28947,7 @@
       </p:sp>
       <p:pic>
         <p:nvPicPr>
-          <p:cNvPr id="992267595" name="Image 1" descr="preencoded.png"/>
+          <p:cNvPr id="1063433415" name="Image 1" descr="preencoded.png"/>
           <p:cNvPicPr>
             <a:picLocks noChangeAspect="1"/>
           </p:cNvPicPr>
@@ -28896,7 +28969,7 @@
       </p:pic>
       <p:sp>
         <p:nvSpPr>
-          <p:cNvPr id="1592812093" name="Text 31"/>
+          <p:cNvPr id="195122431" name="Text 31"/>
           <p:cNvSpPr/>
           <p:nvPr/>
         </p:nvSpPr>
@@ -28936,7 +29009,7 @@
       </p:sp>
       <p:sp>
         <p:nvSpPr>
-          <p:cNvPr id="1166710912" name="Text 32"/>
+          <p:cNvPr id="1527201962" name="Text 32"/>
           <p:cNvSpPr/>
           <p:nvPr/>
         </p:nvSpPr>
@@ -28979,7 +29052,7 @@
       </p:sp>
       <p:sp>
         <p:nvSpPr>
-          <p:cNvPr id="1418883377" name="Shape 33"/>
+          <p:cNvPr id="1106080862" name="Shape 33"/>
           <p:cNvSpPr/>
           <p:nvPr/>
         </p:nvSpPr>
@@ -29013,7 +29086,7 @@
       </p:sp>
       <p:sp>
         <p:nvSpPr>
-          <p:cNvPr id="1136118022" name="Shape 34"/>
+          <p:cNvPr id="1755369769" name="Shape 34"/>
           <p:cNvSpPr/>
           <p:nvPr/>
         </p:nvSpPr>
@@ -29040,7 +29113,7 @@
       </p:sp>
       <p:pic>
         <p:nvPicPr>
-          <p:cNvPr id="1755567293" name="Image 2" descr="preencoded.png"/>
+          <p:cNvPr id="1588055992" name="Image 2" descr="preencoded.png"/>
           <p:cNvPicPr>
             <a:picLocks noChangeAspect="1"/>
           </p:cNvPicPr>
@@ -29062,7 +29135,7 @@
       </p:pic>
       <p:sp>
         <p:nvSpPr>
-          <p:cNvPr id="878433600" name="Text 35"/>
+          <p:cNvPr id="435630699" name="Text 35"/>
           <p:cNvSpPr/>
           <p:nvPr/>
         </p:nvSpPr>
@@ -29102,7 +29175,7 @@
       </p:sp>
       <p:sp>
         <p:nvSpPr>
-          <p:cNvPr id="1116531649" name="Text 36"/>
+          <p:cNvPr id="714647966" name="Text 36"/>
           <p:cNvSpPr/>
           <p:nvPr/>
         </p:nvSpPr>
@@ -29145,7 +29218,7 @@
       </p:sp>
       <p:sp>
         <p:nvSpPr>
-          <p:cNvPr id="1064422268" name="Shape 37"/>
+          <p:cNvPr id="1305384338" name="Shape 37"/>
           <p:cNvSpPr/>
           <p:nvPr/>
         </p:nvSpPr>
@@ -29179,7 +29252,7 @@
       </p:sp>
       <p:sp>
         <p:nvSpPr>
-          <p:cNvPr id="2060408432" name="Shape 38"/>
+          <p:cNvPr id="585913815" name="Shape 38"/>
           <p:cNvSpPr/>
           <p:nvPr/>
         </p:nvSpPr>
@@ -29206,7 +29279,7 @@
       </p:sp>
       <p:pic>
         <p:nvPicPr>
-          <p:cNvPr id="1014872140" name="Image 3" descr="preencoded.png"/>
+          <p:cNvPr id="743978374" name="Image 3" descr="preencoded.png"/>
           <p:cNvPicPr>
             <a:picLocks noChangeAspect="1"/>
           </p:cNvPicPr>
@@ -29228,7 +29301,7 @@
       </p:pic>
       <p:sp>
         <p:nvSpPr>
-          <p:cNvPr id="2012146371" name="Text 39"/>
+          <p:cNvPr id="80291270" name="Text 39"/>
           <p:cNvSpPr/>
           <p:nvPr/>
         </p:nvSpPr>
@@ -29268,7 +29341,7 @@
       </p:sp>
       <p:sp>
         <p:nvSpPr>
-          <p:cNvPr id="2025892114" name="Text 40"/>
+          <p:cNvPr id="1637391274" name="Text 40"/>
           <p:cNvSpPr/>
           <p:nvPr/>
         </p:nvSpPr>
@@ -29311,7 +29384,7 @@
       </p:sp>
       <p:sp>
         <p:nvSpPr>
-          <p:cNvPr id="1440468867" name="Text 41"/>
+          <p:cNvPr id="1210734336" name="Text 41"/>
           <p:cNvSpPr/>
           <p:nvPr/>
         </p:nvSpPr>
@@ -29351,7 +29424,7 @@
       </p:sp>
       <p:sp>
         <p:nvSpPr>
-          <p:cNvPr id="871016055" name="Text 42"/>
+          <p:cNvPr id="142802206" name="Text 42"/>
           <p:cNvSpPr/>
           <p:nvPr/>
         </p:nvSpPr>
@@ -29431,7 +29504,7 @@
       </p:grpSpPr>
       <p:sp>
         <p:nvSpPr>
-          <p:cNvPr id="1855759975" name="Text 0"/>
+          <p:cNvPr id="2111591824" name="Text 0"/>
           <p:cNvSpPr/>
           <p:nvPr/>
         </p:nvSpPr>
@@ -29471,7 +29544,7 @@
       </p:sp>
       <p:sp>
         <p:nvSpPr>
-          <p:cNvPr id="489364661" name="Text 1"/>
+          <p:cNvPr id="406265014" name="Text 1"/>
           <p:cNvSpPr/>
           <p:nvPr/>
         </p:nvSpPr>
@@ -29511,7 +29584,7 @@
       </p:sp>
       <p:sp>
         <p:nvSpPr>
-          <p:cNvPr id="35525082" name="Shape 2"/>
+          <p:cNvPr id="95715531" name="Shape 2"/>
           <p:cNvSpPr/>
           <p:nvPr/>
         </p:nvSpPr>
@@ -29545,7 +29618,7 @@
       </p:sp>
       <p:sp>
         <p:nvSpPr>
-          <p:cNvPr id="760006466" name="Shape 3"/>
+          <p:cNvPr id="1555715339" name="Shape 3"/>
           <p:cNvSpPr/>
           <p:nvPr/>
         </p:nvSpPr>
@@ -29572,7 +29645,7 @@
       </p:sp>
       <p:pic>
         <p:nvPicPr>
-          <p:cNvPr id="694024122" name="Image 0" descr="preencoded.png"/>
+          <p:cNvPr id="959049553" name="Image 0" descr="preencoded.png"/>
           <p:cNvPicPr>
             <a:picLocks noChangeAspect="1"/>
           </p:cNvPicPr>
@@ -29594,7 +29667,7 @@
       </p:pic>
       <p:sp>
         <p:nvSpPr>
-          <p:cNvPr id="1512162888" name="Text 4"/>
+          <p:cNvPr id="435619794" name="Text 4"/>
           <p:cNvSpPr/>
           <p:nvPr/>
         </p:nvSpPr>
@@ -29634,7 +29707,7 @@
       </p:sp>
       <p:sp>
         <p:nvSpPr>
-          <p:cNvPr id="636694259" name="Text 5"/>
+          <p:cNvPr id="322885710" name="Text 5"/>
           <p:cNvSpPr/>
           <p:nvPr/>
         </p:nvSpPr>
@@ -29719,7 +29792,7 @@
       </p:sp>
       <p:sp>
         <p:nvSpPr>
-          <p:cNvPr id="5696306" name="Shape 6"/>
+          <p:cNvPr id="1393493857" name="Shape 6"/>
           <p:cNvSpPr/>
           <p:nvPr/>
         </p:nvSpPr>
@@ -29743,7 +29816,7 @@
       </p:sp>
       <p:sp>
         <p:nvSpPr>
-          <p:cNvPr id="2142656478" name="Text 7"/>
+          <p:cNvPr id="640679351" name="Text 7"/>
           <p:cNvSpPr/>
           <p:nvPr/>
         </p:nvSpPr>
@@ -29783,7 +29856,7 @@
       </p:sp>
       <p:sp>
         <p:nvSpPr>
-          <p:cNvPr id="903594078" name="Shape 8"/>
+          <p:cNvPr id="1413573364" name="Shape 8"/>
           <p:cNvSpPr/>
           <p:nvPr/>
         </p:nvSpPr>
@@ -29817,7 +29890,7 @@
       </p:sp>
       <p:sp>
         <p:nvSpPr>
-          <p:cNvPr id="1373877871" name="Shape 9"/>
+          <p:cNvPr id="1147821822" name="Shape 9"/>
           <p:cNvSpPr/>
           <p:nvPr/>
         </p:nvSpPr>
@@ -29837,7 +29910,7 @@
       </p:sp>
       <p:pic>
         <p:nvPicPr>
-          <p:cNvPr id="221402468" name="Image 1" descr="preencoded.png"/>
+          <p:cNvPr id="745549249" name="Image 1" descr="preencoded.png"/>
           <p:cNvPicPr>
             <a:picLocks noChangeAspect="1"/>
           </p:cNvPicPr>
@@ -29859,7 +29932,7 @@
       </p:pic>
       <p:sp>
         <p:nvSpPr>
-          <p:cNvPr id="747128643" name="Text 10"/>
+          <p:cNvPr id="11375290" name="Text 10"/>
           <p:cNvSpPr/>
           <p:nvPr/>
         </p:nvSpPr>
@@ -29899,7 +29972,7 @@
       </p:sp>
       <p:sp>
         <p:nvSpPr>
-          <p:cNvPr id="1591838179" name="Text 11"/>
+          <p:cNvPr id="807991183" name="Text 11"/>
           <p:cNvSpPr/>
           <p:nvPr/>
         </p:nvSpPr>
@@ -29939,7 +30012,7 @@
       </p:sp>
       <p:sp>
         <p:nvSpPr>
-          <p:cNvPr id="384913118" name="Text 12"/>
+          <p:cNvPr id="860996745" name="Text 12"/>
           <p:cNvSpPr/>
           <p:nvPr/>
         </p:nvSpPr>
@@ -30003,7 +30076,7 @@
       </p:sp>
       <p:sp>
         <p:nvSpPr>
-          <p:cNvPr id="640351898" name="Shape 13"/>
+          <p:cNvPr id="1767828556" name="Shape 13"/>
           <p:cNvSpPr/>
           <p:nvPr/>
         </p:nvSpPr>
@@ -30037,7 +30110,7 @@
       </p:sp>
       <p:sp>
         <p:nvSpPr>
-          <p:cNvPr id="1697701118" name="Shape 14"/>
+          <p:cNvPr id="1888468661" name="Shape 14"/>
           <p:cNvSpPr/>
           <p:nvPr/>
         </p:nvSpPr>
@@ -30057,7 +30130,7 @@
       </p:sp>
       <p:pic>
         <p:nvPicPr>
-          <p:cNvPr id="1474514724" name="Image 2" descr="preencoded.png"/>
+          <p:cNvPr id="767664257" name="Image 2" descr="preencoded.png"/>
           <p:cNvPicPr>
             <a:picLocks noChangeAspect="1"/>
           </p:cNvPicPr>
@@ -30079,7 +30152,7 @@
       </p:pic>
       <p:sp>
         <p:nvSpPr>
-          <p:cNvPr id="682456809" name="Text 15"/>
+          <p:cNvPr id="227614827" name="Text 15"/>
           <p:cNvSpPr/>
           <p:nvPr/>
         </p:nvSpPr>
@@ -30119,7 +30192,7 @@
       </p:sp>
       <p:sp>
         <p:nvSpPr>
-          <p:cNvPr id="2077912417" name="Text 16"/>
+          <p:cNvPr id="527378188" name="Text 16"/>
           <p:cNvSpPr/>
           <p:nvPr/>
         </p:nvSpPr>
@@ -30159,7 +30232,7 @@
       </p:sp>
       <p:sp>
         <p:nvSpPr>
-          <p:cNvPr id="453782921" name="Shape 17"/>
+          <p:cNvPr id="1781909363" name="Shape 17"/>
           <p:cNvSpPr/>
           <p:nvPr/>
         </p:nvSpPr>
@@ -30183,7 +30256,7 @@
       </p:sp>
       <p:sp>
         <p:nvSpPr>
-          <p:cNvPr id="390584621" name="Shape 18"/>
+          <p:cNvPr id="177218548" name="Shape 18"/>
           <p:cNvSpPr/>
           <p:nvPr/>
         </p:nvSpPr>
@@ -30217,7 +30290,7 @@
       </p:sp>
       <p:sp>
         <p:nvSpPr>
-          <p:cNvPr id="1368572234" name="Shape 19"/>
+          <p:cNvPr id="1583145287" name="Shape 19"/>
           <p:cNvSpPr/>
           <p:nvPr/>
         </p:nvSpPr>
@@ -30237,7 +30310,7 @@
       </p:sp>
       <p:pic>
         <p:nvPicPr>
-          <p:cNvPr id="857516441" name="Image 3" descr="preencoded.png"/>
+          <p:cNvPr id="1585967524" name="Image 3" descr="preencoded.png"/>
           <p:cNvPicPr>
             <a:picLocks noChangeAspect="1"/>
           </p:cNvPicPr>
@@ -30259,7 +30332,7 @@
       </p:pic>
       <p:sp>
         <p:nvSpPr>
-          <p:cNvPr id="1125329309" name="Text 20"/>
+          <p:cNvPr id="759052473" name="Text 20"/>
           <p:cNvSpPr/>
           <p:nvPr/>
         </p:nvSpPr>
@@ -30299,7 +30372,7 @@
       </p:sp>
       <p:sp>
         <p:nvSpPr>
-          <p:cNvPr id="388103562" name="Text 21"/>
+          <p:cNvPr id="1321333426" name="Text 21"/>
           <p:cNvSpPr/>
           <p:nvPr/>
         </p:nvSpPr>
@@ -30339,7 +30412,7 @@
       </p:sp>
       <p:sp>
         <p:nvSpPr>
-          <p:cNvPr id="646235525" name="Shape 22"/>
+          <p:cNvPr id="307413759" name="Shape 22"/>
           <p:cNvSpPr/>
           <p:nvPr/>
         </p:nvSpPr>
@@ -30363,7 +30436,7 @@
       </p:sp>
       <p:sp>
         <p:nvSpPr>
-          <p:cNvPr id="1568073601" name="Shape 23"/>
+          <p:cNvPr id="574639197" name="Shape 23"/>
           <p:cNvSpPr/>
           <p:nvPr/>
         </p:nvSpPr>
@@ -30397,7 +30470,7 @@
       </p:sp>
       <p:sp>
         <p:nvSpPr>
-          <p:cNvPr id="284708038" name="Shape 24"/>
+          <p:cNvPr id="488339935" name="Shape 24"/>
           <p:cNvSpPr/>
           <p:nvPr/>
         </p:nvSpPr>
@@ -30417,7 +30490,7 @@
       </p:sp>
       <p:pic>
         <p:nvPicPr>
-          <p:cNvPr id="1074484295" name="Image 4" descr="preencoded.png"/>
+          <p:cNvPr id="1691409956" name="Image 4" descr="preencoded.png"/>
           <p:cNvPicPr>
             <a:picLocks noChangeAspect="1"/>
           </p:cNvPicPr>
@@ -30439,7 +30512,7 @@
       </p:pic>
       <p:sp>
         <p:nvSpPr>
-          <p:cNvPr id="194140785" name="Text 25"/>
+          <p:cNvPr id="1045830989" name="Text 25"/>
           <p:cNvSpPr/>
           <p:nvPr/>
         </p:nvSpPr>
@@ -30479,7 +30552,7 @@
       </p:sp>
       <p:sp>
         <p:nvSpPr>
-          <p:cNvPr id="1932888188" name="Text 26"/>
+          <p:cNvPr id="958614413" name="Text 26"/>
           <p:cNvSpPr/>
           <p:nvPr/>
         </p:nvSpPr>
@@ -30519,7 +30592,7 @@
       </p:sp>
       <p:sp>
         <p:nvSpPr>
-          <p:cNvPr id="1521821163" name="Shape 27"/>
+          <p:cNvPr id="1752496884" name="Shape 27"/>
           <p:cNvSpPr/>
           <p:nvPr/>
         </p:nvSpPr>
@@ -30543,7 +30616,7 @@
       </p:sp>
       <p:sp>
         <p:nvSpPr>
-          <p:cNvPr id="1297813784" name="Shape 28"/>
+          <p:cNvPr id="1435194600" name="Shape 28"/>
           <p:cNvSpPr/>
           <p:nvPr/>
         </p:nvSpPr>
@@ -30577,7 +30650,7 @@
       </p:sp>
       <p:sp>
         <p:nvSpPr>
-          <p:cNvPr id="395060632" name="Shape 29"/>
+          <p:cNvPr id="680383766" name="Shape 29"/>
           <p:cNvSpPr/>
           <p:nvPr/>
         </p:nvSpPr>
@@ -30604,7 +30677,7 @@
       </p:sp>
       <p:pic>
         <p:nvPicPr>
-          <p:cNvPr id="2078622522" name="Image 5" descr="preencoded.png"/>
+          <p:cNvPr id="516330095" name="Image 5" descr="preencoded.png"/>
           <p:cNvPicPr>
             <a:picLocks noChangeAspect="1"/>
           </p:cNvPicPr>
@@ -30626,7 +30699,7 @@
       </p:pic>
       <p:sp>
         <p:nvSpPr>
-          <p:cNvPr id="959872910" name="Text 30"/>
+          <p:cNvPr id="678325878" name="Text 30"/>
           <p:cNvSpPr/>
           <p:nvPr/>
         </p:nvSpPr>
@@ -30666,7 +30739,7 @@
       </p:sp>
       <p:sp>
         <p:nvSpPr>
-          <p:cNvPr id="1430267417" name="Text 31"/>
+          <p:cNvPr id="675145374" name="Text 31"/>
           <p:cNvSpPr/>
           <p:nvPr/>
         </p:nvSpPr>
@@ -30706,7 +30779,7 @@
       </p:sp>
       <p:sp>
         <p:nvSpPr>
-          <p:cNvPr id="1552971494" name="Text 32"/>
+          <p:cNvPr id="38101354" name="Text 32"/>
           <p:cNvSpPr/>
           <p:nvPr/>
         </p:nvSpPr>
@@ -30749,7 +30822,7 @@
       </p:sp>
       <p:sp>
         <p:nvSpPr>
-          <p:cNvPr id="985299390" name="Shape 33"/>
+          <p:cNvPr id="456986024" name="Shape 33"/>
           <p:cNvSpPr/>
           <p:nvPr/>
         </p:nvSpPr>
@@ -30773,7 +30846,7 @@
       </p:sp>
       <p:sp>
         <p:nvSpPr>
-          <p:cNvPr id="701956403" name="Text 34"/>
+          <p:cNvPr id="112527925" name="Text 34"/>
           <p:cNvSpPr/>
           <p:nvPr/>
         </p:nvSpPr>
@@ -30813,7 +30886,7 @@
       </p:sp>
       <p:sp>
         <p:nvSpPr>
-          <p:cNvPr id="973640319" name="Shape 35"/>
+          <p:cNvPr id="2052859735" name="Shape 35"/>
           <p:cNvSpPr/>
           <p:nvPr/>
         </p:nvSpPr>
@@ -30847,7 +30920,7 @@
       </p:sp>
       <p:sp>
         <p:nvSpPr>
-          <p:cNvPr id="139916461" name="Shape 36"/>
+          <p:cNvPr id="977013796" name="Shape 36"/>
           <p:cNvSpPr/>
           <p:nvPr/>
         </p:nvSpPr>
@@ -30867,7 +30940,7 @@
       </p:sp>
       <p:pic>
         <p:nvPicPr>
-          <p:cNvPr id="1074419419" name="Image 6" descr="preencoded.png"/>
+          <p:cNvPr id="1598841351" name="Image 6" descr="preencoded.png"/>
           <p:cNvPicPr>
             <a:picLocks noChangeAspect="1"/>
           </p:cNvPicPr>
@@ -30889,7 +30962,7 @@
       </p:pic>
       <p:sp>
         <p:nvSpPr>
-          <p:cNvPr id="1372115805" name="Text 37"/>
+          <p:cNvPr id="1054031608" name="Text 37"/>
           <p:cNvSpPr/>
           <p:nvPr/>
         </p:nvSpPr>
@@ -30929,7 +31002,7 @@
       </p:sp>
       <p:sp>
         <p:nvSpPr>
-          <p:cNvPr id="2114146992" name="Text 38"/>
+          <p:cNvPr id="2060096094" name="Text 38"/>
           <p:cNvSpPr/>
           <p:nvPr/>
         </p:nvSpPr>
@@ -30972,7 +31045,7 @@
       </p:sp>
       <p:sp>
         <p:nvSpPr>
-          <p:cNvPr id="2120217861" name="Shape 39"/>
+          <p:cNvPr id="751031004" name="Shape 39"/>
           <p:cNvSpPr/>
           <p:nvPr/>
         </p:nvSpPr>
@@ -31006,7 +31079,7 @@
       </p:sp>
       <p:sp>
         <p:nvSpPr>
-          <p:cNvPr id="400653623" name="Shape 40"/>
+          <p:cNvPr id="135810296" name="Shape 40"/>
           <p:cNvSpPr/>
           <p:nvPr/>
         </p:nvSpPr>
@@ -31026,7 +31099,7 @@
       </p:sp>
       <p:pic>
         <p:nvPicPr>
-          <p:cNvPr id="82361899" name="Image 7" descr="preencoded.png"/>
+          <p:cNvPr id="917885407" name="Image 7" descr="preencoded.png"/>
           <p:cNvPicPr>
             <a:picLocks noChangeAspect="1"/>
           </p:cNvPicPr>
@@ -31048,7 +31121,7 @@
       </p:pic>
       <p:sp>
         <p:nvSpPr>
-          <p:cNvPr id="690086337" name="Text 41"/>
+          <p:cNvPr id="486064061" name="Text 41"/>
           <p:cNvSpPr/>
           <p:nvPr/>
         </p:nvSpPr>
@@ -31088,7 +31161,7 @@
       </p:sp>
       <p:sp>
         <p:nvSpPr>
-          <p:cNvPr id="696532588" name="Text 42"/>
+          <p:cNvPr id="1499184710" name="Text 42"/>
           <p:cNvSpPr/>
           <p:nvPr/>
         </p:nvSpPr>
@@ -31131,7 +31204,7 @@
       </p:sp>
       <p:sp>
         <p:nvSpPr>
-          <p:cNvPr id="852172410" name="Text 43"/>
+          <p:cNvPr id="1749781528" name="Text 43"/>
           <p:cNvSpPr/>
           <p:nvPr/>
         </p:nvSpPr>
@@ -31171,7 +31244,7 @@
       </p:sp>
       <p:sp>
         <p:nvSpPr>
-          <p:cNvPr id="1187297582" name="Text 44"/>
+          <p:cNvPr id="1920407158" name="Text 44"/>
           <p:cNvSpPr/>
           <p:nvPr/>
         </p:nvSpPr>
